--- a/Презентацияя.pptx
+++ b/Презентацияя.pptx
@@ -361,7 +361,7 @@
             <a:pPr indent="0" algn="r">
               <a:buNone/>
             </a:pPr>
-            <a:fld id="{BCE6AA35-32BB-44CC-9C88-87DFCCF55A7C}" type="slidenum">
+            <a:fld id="{8A717784-699C-4C6F-810D-710D2C1B76FF}" type="slidenum">
               <a:rPr b="0" lang="ru-RU" sz="1400" spc="-1" strike="noStrike">
                 <a:solidFill>
                   <a:srgbClr val="000000"/>
@@ -404,7 +404,7 @@
       </p:grpSpPr>
       <p:sp>
         <p:nvSpPr>
-          <p:cNvPr id="156" name="PlaceHolder 1"/>
+          <p:cNvPr id="167" name="PlaceHolder 1"/>
           <p:cNvSpPr>
             <a:spLocks noGrp="1"/>
           </p:cNvSpPr>
@@ -415,7 +415,7 @@
         <p:spPr>
           <a:xfrm>
             <a:off x="685800" y="1143000"/>
-            <a:ext cx="5485680" cy="3085560"/>
+            <a:ext cx="5485320" cy="3085200"/>
           </a:xfrm>
           <a:prstGeom prst="rect">
             <a:avLst/>
@@ -427,7 +427,7 @@
       </p:sp>
       <p:sp>
         <p:nvSpPr>
-          <p:cNvPr id="157" name="PlaceHolder 2"/>
+          <p:cNvPr id="168" name="PlaceHolder 2"/>
           <p:cNvSpPr>
             <a:spLocks noGrp="1"/>
           </p:cNvSpPr>
@@ -438,7 +438,7 @@
         <p:spPr>
           <a:xfrm>
             <a:off x="685800" y="4400640"/>
-            <a:ext cx="5485680" cy="3599640"/>
+            <a:ext cx="5485320" cy="3599280"/>
           </a:xfrm>
           <a:prstGeom prst="rect">
             <a:avLst/>
@@ -467,7 +467,7 @@
       </p:sp>
       <p:sp>
         <p:nvSpPr>
-          <p:cNvPr id="158" name="PlaceHolder 3"/>
+          <p:cNvPr id="169" name="PlaceHolder 3"/>
           <p:cNvSpPr>
             <a:spLocks noGrp="1"/>
           </p:cNvSpPr>
@@ -478,7 +478,7 @@
         <p:spPr>
           <a:xfrm>
             <a:off x="3884760" y="8685360"/>
-            <a:ext cx="2971080" cy="457920"/>
+            <a:ext cx="2970720" cy="457560"/>
           </a:xfrm>
           <a:prstGeom prst="rect">
             <a:avLst/>
@@ -519,7 +519,7 @@
                 <a:tab algn="l" pos="0"/>
               </a:tabLst>
             </a:pPr>
-            <a:fld id="{80280858-9C0A-4B59-B8AE-60C7A94CBEA7}" type="slidenum">
+            <a:fld id="{B356F396-E791-4F1F-9C37-1146CF335C93}" type="slidenum">
               <a:rPr b="0" lang="ru-RU" sz="1200" spc="-1" strike="noStrike">
                 <a:solidFill>
                   <a:srgbClr val="000000"/>
@@ -572,7 +572,7 @@
         <p:spPr>
           <a:xfrm>
             <a:off x="838080" y="365040"/>
-            <a:ext cx="10514880" cy="1324800"/>
+            <a:ext cx="10514520" cy="1324440"/>
           </a:xfrm>
           <a:prstGeom prst="rect">
             <a:avLst/>
@@ -612,7 +612,7 @@
         <p:spPr>
           <a:xfrm>
             <a:off x="838080" y="1825560"/>
-            <a:ext cx="10514880" cy="4350600"/>
+            <a:ext cx="10514520" cy="4350240"/>
           </a:xfrm>
           <a:prstGeom prst="rect">
             <a:avLst/>
@@ -673,7 +673,7 @@
         <p:txBody>
           <a:bodyPr/>
           <a:p>
-            <a:fld id="{21FDBFA2-B04B-4F11-82B3-0A357B48019D}" type="slidenum">
+            <a:fld id="{A385E6A6-902D-40CC-AE9D-E54C41350C3C}" type="slidenum">
               <a:t>&lt;#&gt;</a:t>
             </a:fld>
           </a:p>
@@ -735,7 +735,7 @@
         <p:spPr>
           <a:xfrm>
             <a:off x="838080" y="365040"/>
-            <a:ext cx="10514880" cy="1324800"/>
+            <a:ext cx="10514520" cy="1324440"/>
           </a:xfrm>
           <a:prstGeom prst="rect">
             <a:avLst/>
@@ -775,7 +775,7 @@
         <p:spPr>
           <a:xfrm>
             <a:off x="838080" y="1825560"/>
-            <a:ext cx="10514880" cy="4350600"/>
+            <a:ext cx="10514520" cy="4350240"/>
           </a:xfrm>
           <a:prstGeom prst="rect">
             <a:avLst/>
@@ -839,7 +839,7 @@
         <p:txBody>
           <a:bodyPr/>
           <a:p>
-            <a:fld id="{35502CDA-8F0A-4B52-A099-DAD92BE7769B}" type="slidenum">
+            <a:fld id="{335A45F2-FC1C-48C1-949B-BDDAA08727D8}" type="slidenum">
               <a:t>&lt;#&gt;</a:t>
             </a:fld>
           </a:p>
@@ -901,7 +901,7 @@
         <p:spPr>
           <a:xfrm>
             <a:off x="838080" y="365040"/>
-            <a:ext cx="10514880" cy="1324800"/>
+            <a:ext cx="10514520" cy="1324440"/>
           </a:xfrm>
           <a:prstGeom prst="rect">
             <a:avLst/>
@@ -941,7 +941,7 @@
         <p:spPr>
           <a:xfrm>
             <a:off x="838080" y="1825560"/>
-            <a:ext cx="10514880" cy="4350600"/>
+            <a:ext cx="10514520" cy="4350240"/>
           </a:xfrm>
           <a:prstGeom prst="rect">
             <a:avLst/>
@@ -1005,7 +1005,7 @@
         <p:txBody>
           <a:bodyPr/>
           <a:p>
-            <a:fld id="{2A62DD92-E740-4BAA-81AD-CB1BB0E085A5}" type="slidenum">
+            <a:fld id="{3B11BA4E-7A83-411D-BD6F-63E5F035B0CD}" type="slidenum">
               <a:t>&lt;#&gt;</a:t>
             </a:fld>
           </a:p>
@@ -1067,7 +1067,7 @@
         <p:spPr>
           <a:xfrm>
             <a:off x="838080" y="365040"/>
-            <a:ext cx="10514880" cy="1324800"/>
+            <a:ext cx="10514520" cy="1324440"/>
           </a:xfrm>
           <a:prstGeom prst="rect">
             <a:avLst/>
@@ -1107,7 +1107,7 @@
         <p:spPr>
           <a:xfrm>
             <a:off x="838080" y="1825560"/>
-            <a:ext cx="10514880" cy="4350600"/>
+            <a:ext cx="10514520" cy="4350240"/>
           </a:xfrm>
           <a:prstGeom prst="rect">
             <a:avLst/>
@@ -1171,7 +1171,7 @@
         <p:txBody>
           <a:bodyPr/>
           <a:p>
-            <a:fld id="{8B2752F1-F9C4-4391-B8A9-5CDB655B6DCB}" type="slidenum">
+            <a:fld id="{D2918B67-877C-400B-B2E9-34BB98CB81BB}" type="slidenum">
               <a:t>&lt;#&gt;</a:t>
             </a:fld>
           </a:p>
@@ -1233,7 +1233,7 @@
         <p:spPr>
           <a:xfrm>
             <a:off x="838080" y="365040"/>
-            <a:ext cx="10514880" cy="1324800"/>
+            <a:ext cx="10514520" cy="1324440"/>
           </a:xfrm>
           <a:prstGeom prst="rect">
             <a:avLst/>
@@ -1273,7 +1273,7 @@
         <p:spPr>
           <a:xfrm>
             <a:off x="838080" y="1825560"/>
-            <a:ext cx="10514880" cy="4350600"/>
+            <a:ext cx="10514520" cy="4350240"/>
           </a:xfrm>
           <a:prstGeom prst="rect">
             <a:avLst/>
@@ -1337,7 +1337,7 @@
         <p:txBody>
           <a:bodyPr/>
           <a:p>
-            <a:fld id="{0B1213AC-EBA5-4505-824A-0F8091CC2837}" type="slidenum">
+            <a:fld id="{A5124FCC-2C4A-4542-AF67-BE9C6D068AEC}" type="slidenum">
               <a:t>&lt;#&gt;</a:t>
             </a:fld>
           </a:p>
@@ -1406,7 +1406,7 @@
         <p:spPr>
           <a:xfrm>
             <a:off x="838080" y="365040"/>
-            <a:ext cx="10514880" cy="1324800"/>
+            <a:ext cx="10514520" cy="1324440"/>
           </a:xfrm>
           <a:prstGeom prst="rect">
             <a:avLst/>
@@ -1455,7 +1455,7 @@
         <p:spPr>
           <a:xfrm>
             <a:off x="4038480" y="6356520"/>
-            <a:ext cx="4114080" cy="364320"/>
+            <a:ext cx="4113720" cy="363960"/>
           </a:xfrm>
           <a:prstGeom prst="rect">
             <a:avLst/>
@@ -1527,7 +1527,7 @@
         <p:spPr>
           <a:xfrm>
             <a:off x="8610480" y="6356520"/>
-            <a:ext cx="2742480" cy="364320"/>
+            <a:ext cx="2742120" cy="363960"/>
           </a:xfrm>
           <a:prstGeom prst="rect">
             <a:avLst/>
@@ -1570,7 +1570,7 @@
                 <a:tab algn="l" pos="0"/>
               </a:tabLst>
             </a:pPr>
-            <a:fld id="{90757D46-4B96-4245-BC4E-376BFB8C7959}" type="slidenum">
+            <a:fld id="{AB45F53B-61DB-49A7-8435-9BECF6D4BC0B}" type="slidenum">
               <a:rPr b="0" lang="ru-RU" sz="1200" spc="-1" strike="noStrike">
                 <a:solidFill>
                   <a:schemeClr val="dk1">
@@ -1579,7 +1579,7 @@
                 </a:solidFill>
                 <a:latin typeface="Calibri"/>
               </a:rPr>
-              <a:t>16</a:t>
+              <a:t>19</a:t>
             </a:fld>
             <a:endParaRPr b="0" lang="ru-RU" sz="1200" spc="-1" strike="noStrike">
               <a:solidFill>
@@ -1603,7 +1603,7 @@
         <p:spPr>
           <a:xfrm>
             <a:off x="838080" y="6356520"/>
-            <a:ext cx="2742480" cy="364320"/>
+            <a:ext cx="2742120" cy="363960"/>
           </a:xfrm>
           <a:prstGeom prst="rect">
             <a:avLst/>
@@ -1921,7 +1921,7 @@
         <p:spPr>
           <a:xfrm>
             <a:off x="838080" y="365040"/>
-            <a:ext cx="10514880" cy="1324800"/>
+            <a:ext cx="10514520" cy="1324440"/>
           </a:xfrm>
           <a:prstGeom prst="rect">
             <a:avLst/>
@@ -1970,7 +1970,7 @@
         <p:spPr>
           <a:xfrm>
             <a:off x="838080" y="1825560"/>
-            <a:ext cx="10514880" cy="4350600"/>
+            <a:ext cx="10514520" cy="4350240"/>
           </a:xfrm>
           <a:prstGeom prst="rect">
             <a:avLst/>
@@ -2195,7 +2195,7 @@
         <p:spPr>
           <a:xfrm>
             <a:off x="4038480" y="6356520"/>
-            <a:ext cx="4114080" cy="364320"/>
+            <a:ext cx="4113720" cy="363960"/>
           </a:xfrm>
           <a:prstGeom prst="rect">
             <a:avLst/>
@@ -2267,7 +2267,7 @@
         <p:spPr>
           <a:xfrm>
             <a:off x="8610480" y="6356520"/>
-            <a:ext cx="2742480" cy="364320"/>
+            <a:ext cx="2742120" cy="363960"/>
           </a:xfrm>
           <a:prstGeom prst="rect">
             <a:avLst/>
@@ -2310,7 +2310,7 @@
                 <a:tab algn="l" pos="0"/>
               </a:tabLst>
             </a:pPr>
-            <a:fld id="{5D0CB147-4B05-416C-B969-653D9E3CACCA}" type="slidenum">
+            <a:fld id="{E6A7E2E6-EB3D-4C81-AF62-9807B13B4329}" type="slidenum">
               <a:rPr b="0" lang="ru-RU" sz="1200" spc="-1" strike="noStrike">
                 <a:solidFill>
                   <a:schemeClr val="dk1">
@@ -2343,7 +2343,7 @@
         <p:spPr>
           <a:xfrm>
             <a:off x="838080" y="6356520"/>
-            <a:ext cx="2742480" cy="364320"/>
+            <a:ext cx="2742120" cy="363960"/>
           </a:xfrm>
           <a:prstGeom prst="rect">
             <a:avLst/>
@@ -2436,7 +2436,7 @@
         <p:spPr>
           <a:xfrm>
             <a:off x="838080" y="365040"/>
-            <a:ext cx="10514880" cy="1324800"/>
+            <a:ext cx="10514520" cy="1324440"/>
           </a:xfrm>
           <a:prstGeom prst="rect">
             <a:avLst/>
@@ -2485,7 +2485,7 @@
         <p:spPr>
           <a:xfrm>
             <a:off x="838080" y="1825560"/>
-            <a:ext cx="10514880" cy="4350600"/>
+            <a:ext cx="10514520" cy="4350240"/>
           </a:xfrm>
           <a:prstGeom prst="rect">
             <a:avLst/>
@@ -2710,7 +2710,7 @@
         <p:spPr>
           <a:xfrm>
             <a:off x="4038480" y="6356520"/>
-            <a:ext cx="4114080" cy="364320"/>
+            <a:ext cx="4113720" cy="363960"/>
           </a:xfrm>
           <a:prstGeom prst="rect">
             <a:avLst/>
@@ -2782,7 +2782,7 @@
         <p:spPr>
           <a:xfrm>
             <a:off x="8610480" y="6356520"/>
-            <a:ext cx="2742480" cy="364320"/>
+            <a:ext cx="2742120" cy="363960"/>
           </a:xfrm>
           <a:prstGeom prst="rect">
             <a:avLst/>
@@ -2825,7 +2825,7 @@
                 <a:tab algn="l" pos="0"/>
               </a:tabLst>
             </a:pPr>
-            <a:fld id="{459DB34A-3EA6-4D61-B93A-F3B7008888D5}" type="slidenum">
+            <a:fld id="{EBF75614-E627-430C-B4EA-7E6BA45A85C1}" type="slidenum">
               <a:rPr b="0" lang="ru-RU" sz="1200" spc="-1" strike="noStrike">
                 <a:solidFill>
                   <a:schemeClr val="dk1">
@@ -2858,7 +2858,7 @@
         <p:spPr>
           <a:xfrm>
             <a:off x="838080" y="6356520"/>
-            <a:ext cx="2742480" cy="364320"/>
+            <a:ext cx="2742120" cy="363960"/>
           </a:xfrm>
           <a:prstGeom prst="rect">
             <a:avLst/>
@@ -2951,7 +2951,7 @@
         <p:spPr>
           <a:xfrm>
             <a:off x="838080" y="365040"/>
-            <a:ext cx="10514880" cy="1324800"/>
+            <a:ext cx="10514520" cy="1324440"/>
           </a:xfrm>
           <a:prstGeom prst="rect">
             <a:avLst/>
@@ -3000,7 +3000,7 @@
         <p:spPr>
           <a:xfrm>
             <a:off x="838080" y="1825560"/>
-            <a:ext cx="10514880" cy="4350600"/>
+            <a:ext cx="10514520" cy="4350240"/>
           </a:xfrm>
           <a:prstGeom prst="rect">
             <a:avLst/>
@@ -3225,7 +3225,7 @@
         <p:spPr>
           <a:xfrm>
             <a:off x="4038480" y="6356520"/>
-            <a:ext cx="4114080" cy="364320"/>
+            <a:ext cx="4113720" cy="363960"/>
           </a:xfrm>
           <a:prstGeom prst="rect">
             <a:avLst/>
@@ -3297,7 +3297,7 @@
         <p:spPr>
           <a:xfrm>
             <a:off x="8610480" y="6356520"/>
-            <a:ext cx="2742480" cy="364320"/>
+            <a:ext cx="2742120" cy="363960"/>
           </a:xfrm>
           <a:prstGeom prst="rect">
             <a:avLst/>
@@ -3340,7 +3340,7 @@
                 <a:tab algn="l" pos="0"/>
               </a:tabLst>
             </a:pPr>
-            <a:fld id="{5C963E88-4B3E-427B-BECC-867691B600F1}" type="slidenum">
+            <a:fld id="{1E257D53-5FAF-4E06-8B60-05271E363F93}" type="slidenum">
               <a:rPr b="0" lang="ru-RU" sz="1200" spc="-1" strike="noStrike">
                 <a:solidFill>
                   <a:schemeClr val="dk1">
@@ -3373,7 +3373,7 @@
         <p:spPr>
           <a:xfrm>
             <a:off x="838080" y="6356520"/>
-            <a:ext cx="2742480" cy="364320"/>
+            <a:ext cx="2742120" cy="363960"/>
           </a:xfrm>
           <a:prstGeom prst="rect">
             <a:avLst/>
@@ -3466,7 +3466,7 @@
         <p:spPr>
           <a:xfrm>
             <a:off x="838080" y="365040"/>
-            <a:ext cx="10514880" cy="1324800"/>
+            <a:ext cx="10514520" cy="1324440"/>
           </a:xfrm>
           <a:prstGeom prst="rect">
             <a:avLst/>
@@ -3515,7 +3515,7 @@
         <p:spPr>
           <a:xfrm>
             <a:off x="838080" y="1825560"/>
-            <a:ext cx="10514880" cy="4350600"/>
+            <a:ext cx="10514520" cy="4350240"/>
           </a:xfrm>
           <a:prstGeom prst="rect">
             <a:avLst/>
@@ -3740,7 +3740,7 @@
         <p:spPr>
           <a:xfrm>
             <a:off x="4038480" y="6356520"/>
-            <a:ext cx="4114080" cy="364320"/>
+            <a:ext cx="4113720" cy="363960"/>
           </a:xfrm>
           <a:prstGeom prst="rect">
             <a:avLst/>
@@ -3812,7 +3812,7 @@
         <p:spPr>
           <a:xfrm>
             <a:off x="8610480" y="6356520"/>
-            <a:ext cx="2742480" cy="364320"/>
+            <a:ext cx="2742120" cy="363960"/>
           </a:xfrm>
           <a:prstGeom prst="rect">
             <a:avLst/>
@@ -3855,7 +3855,7 @@
                 <a:tab algn="l" pos="0"/>
               </a:tabLst>
             </a:pPr>
-            <a:fld id="{E6479143-7FD2-4E0D-8629-BC01A6BCCE12}" type="slidenum">
+            <a:fld id="{99A3FEDE-3C08-4C35-B037-12874FC66C35}" type="slidenum">
               <a:rPr b="0" lang="ru-RU" sz="1200" spc="-1" strike="noStrike">
                 <a:solidFill>
                   <a:schemeClr val="dk1">
@@ -3888,7 +3888,7 @@
         <p:spPr>
           <a:xfrm>
             <a:off x="838080" y="6356520"/>
-            <a:ext cx="2742480" cy="364320"/>
+            <a:ext cx="2742120" cy="363960"/>
           </a:xfrm>
           <a:prstGeom prst="rect">
             <a:avLst/>
@@ -3974,7 +3974,7 @@
         <p:spPr>
           <a:xfrm>
             <a:off x="987840" y="2975400"/>
-            <a:ext cx="10394280" cy="1854360"/>
+            <a:ext cx="10393920" cy="1854000"/>
           </a:xfrm>
           <a:prstGeom prst="rect">
             <a:avLst/>
@@ -4004,6 +4004,7 @@
                   <a:schemeClr val="dk1"/>
                 </a:solidFill>
                 <a:latin typeface="Calibri Light"/>
+                <a:ea typeface="Microsoft YaHei"/>
               </a:rPr>
               <a:t>Выпускная квалификационная работа </a:t>
             </a:r>
@@ -4011,11 +4012,12 @@
               <a:rPr sz="2600"/>
             </a:br>
             <a:r>
-              <a:rPr b="0" lang="ru-RU" sz="2600" spc="-1" strike="noStrike">
-                <a:solidFill>
-                  <a:schemeClr val="dk1"/>
+              <a:rPr b="1" lang="ru-RU" sz="2600" spc="-1" strike="noStrike">
+                <a:solidFill>
+                  <a:srgbClr val="000000"/>
                 </a:solidFill>
                 <a:latin typeface="Calibri Light"/>
+                <a:ea typeface="Microsoft YaHei"/>
               </a:rPr>
               <a:t>на тему:</a:t>
             </a:r>
@@ -4053,7 +4055,7 @@
         <p:spPr>
           <a:xfrm>
             <a:off x="6185160" y="5002920"/>
-            <a:ext cx="6006240" cy="1854360"/>
+            <a:ext cx="6005880" cy="1854000"/>
           </a:xfrm>
           <a:prstGeom prst="rect">
             <a:avLst/>
@@ -4207,7 +4209,7 @@
         <p:spPr>
           <a:xfrm>
             <a:off x="11070720" y="-322920"/>
-            <a:ext cx="2242080" cy="2242080"/>
+            <a:ext cx="2241720" cy="2241720"/>
           </a:xfrm>
           <a:prstGeom prst="rect">
             <a:avLst/>
@@ -4237,7 +4239,7 @@
         <p:spPr>
           <a:xfrm>
             <a:off x="-885240" y="732600"/>
-            <a:ext cx="2242080" cy="2242080"/>
+            <a:ext cx="2241720" cy="2241720"/>
           </a:xfrm>
           <a:prstGeom prst="rect">
             <a:avLst/>
@@ -4263,7 +4265,7 @@
         <p:spPr>
           <a:xfrm>
             <a:off x="1772640" y="148320"/>
-            <a:ext cx="8823960" cy="2706120"/>
+            <a:ext cx="8823600" cy="2705760"/>
           </a:xfrm>
           <a:prstGeom prst="rect">
             <a:avLst/>
@@ -4501,7 +4503,7 @@
         <p:spPr>
           <a:xfrm>
             <a:off x="5326920" y="6444720"/>
-            <a:ext cx="1675080" cy="325440"/>
+            <a:ext cx="1674720" cy="325080"/>
           </a:xfrm>
           <a:prstGeom prst="rect">
             <a:avLst/>
@@ -4581,7 +4583,7 @@
       </p:grpSpPr>
       <p:sp>
         <p:nvSpPr>
-          <p:cNvPr id="93" name="PlaceHolder 1"/>
+          <p:cNvPr id="98" name="PlaceHolder 1"/>
           <p:cNvSpPr>
             <a:spLocks noGrp="1"/>
           </p:cNvSpPr>
@@ -4592,7 +4594,7 @@
         <p:spPr>
           <a:xfrm>
             <a:off x="2323080" y="102960"/>
-            <a:ext cx="7936560" cy="821160"/>
+            <a:ext cx="7936200" cy="820800"/>
           </a:xfrm>
           <a:prstGeom prst="rect">
             <a:avLst/>
@@ -4624,7 +4626,7 @@
                     <a:lumOff val="15000"/>
                   </a:schemeClr>
                 </a:solidFill>
-                <a:latin typeface="Century Gothic"/>
+                <a:latin typeface="Calibri"/>
               </a:rPr>
               <a:t>Справочники</a:t>
             </a:r>
@@ -4632,14 +4634,14 @@
               <a:solidFill>
                 <a:srgbClr val="000000"/>
               </a:solidFill>
-              <a:latin typeface="Arial"/>
+              <a:latin typeface="Calibri"/>
             </a:endParaRPr>
           </a:p>
         </p:txBody>
       </p:sp>
       <p:pic>
         <p:nvPicPr>
-          <p:cNvPr id="94" name="Рисунок 4" descr=""/>
+          <p:cNvPr id="99" name="Рисунок 4" descr=""/>
           <p:cNvPicPr/>
           <p:nvPr/>
         </p:nvPicPr>
@@ -4650,7 +4652,7 @@
         <p:spPr>
           <a:xfrm>
             <a:off x="-966240" y="5590800"/>
-            <a:ext cx="2242080" cy="2242080"/>
+            <a:ext cx="2241720" cy="2241720"/>
           </a:xfrm>
           <a:prstGeom prst="rect">
             <a:avLst/>
@@ -4669,14 +4671,14 @@
       </p:pic>
       <p:sp>
         <p:nvSpPr>
-          <p:cNvPr id="95" name="TextBox 2"/>
+          <p:cNvPr id="100" name="TextBox 2"/>
           <p:cNvSpPr/>
           <p:nvPr/>
         </p:nvSpPr>
         <p:spPr>
           <a:xfrm>
             <a:off x="1371600" y="3519000"/>
-            <a:ext cx="183960" cy="368640"/>
+            <a:ext cx="183600" cy="368280"/>
           </a:xfrm>
           <a:prstGeom prst="rect">
             <a:avLst/>
@@ -4714,7 +4716,7 @@
       </p:sp>
       <p:sp>
         <p:nvSpPr>
-          <p:cNvPr id="96" name="TextBox 5"/>
+          <p:cNvPr id="101" name="TextBox 5"/>
           <p:cNvSpPr/>
           <p:nvPr/>
         </p:nvSpPr>
@@ -4768,7 +4770,7 @@
       </p:sp>
       <p:pic>
         <p:nvPicPr>
-          <p:cNvPr id="97" name="Рисунок 3" descr=""/>
+          <p:cNvPr id="102" name="Рисунок 3" descr=""/>
           <p:cNvPicPr/>
           <p:nvPr/>
         </p:nvPicPr>
@@ -4779,7 +4781,7 @@
         <p:spPr>
           <a:xfrm>
             <a:off x="10699200" y="-1121400"/>
-            <a:ext cx="2242080" cy="2242080"/>
+            <a:ext cx="2241720" cy="2241720"/>
           </a:xfrm>
           <a:prstGeom prst="rect">
             <a:avLst/>
@@ -4798,7 +4800,7 @@
       </p:pic>
       <p:pic>
         <p:nvPicPr>
-          <p:cNvPr id="98" name="" descr=""/>
+          <p:cNvPr id="103" name="" descr=""/>
           <p:cNvPicPr/>
           <p:nvPr/>
         </p:nvPicPr>
@@ -4809,7 +4811,7 @@
         <p:spPr>
           <a:xfrm>
             <a:off x="540000" y="1341360"/>
-            <a:ext cx="11020680" cy="1718280"/>
+            <a:ext cx="11020320" cy="1717920"/>
           </a:xfrm>
           <a:prstGeom prst="rect">
             <a:avLst/>
@@ -4821,7 +4823,7 @@
       </p:pic>
       <p:pic>
         <p:nvPicPr>
-          <p:cNvPr id="99" name="" descr=""/>
+          <p:cNvPr id="104" name="" descr=""/>
           <p:cNvPicPr/>
           <p:nvPr/>
         </p:nvPicPr>
@@ -4832,7 +4834,7 @@
         <p:spPr>
           <a:xfrm>
             <a:off x="180000" y="3673440"/>
-            <a:ext cx="12062520" cy="1366200"/>
+            <a:ext cx="12062160" cy="1365840"/>
           </a:xfrm>
           <a:prstGeom prst="rect">
             <a:avLst/>
@@ -4874,7 +4876,7 @@
       </p:grpSpPr>
       <p:sp>
         <p:nvSpPr>
-          <p:cNvPr id="100" name="PlaceHolder 1"/>
+          <p:cNvPr id="105" name="PlaceHolder 1"/>
           <p:cNvSpPr>
             <a:spLocks noGrp="1"/>
           </p:cNvSpPr>
@@ -4885,7 +4887,7 @@
         <p:spPr>
           <a:xfrm>
             <a:off x="1495080" y="145800"/>
-            <a:ext cx="9200880" cy="1324800"/>
+            <a:ext cx="9200520" cy="1324440"/>
           </a:xfrm>
           <a:prstGeom prst="rect">
             <a:avLst/>
@@ -4919,20 +4921,20 @@
                 </a:solidFill>
                 <a:latin typeface="Calibri"/>
               </a:rPr>
-              <a:t>Документы</a:t>
+              <a:t>Формирование выборки поставщиков</a:t>
             </a:r>
             <a:endParaRPr b="0" lang="ru-RU" sz="3600" spc="-1" strike="noStrike">
               <a:solidFill>
                 <a:srgbClr val="000000"/>
               </a:solidFill>
-              <a:latin typeface="Arial"/>
+              <a:latin typeface="Calibri"/>
             </a:endParaRPr>
           </a:p>
         </p:txBody>
       </p:sp>
       <p:pic>
         <p:nvPicPr>
-          <p:cNvPr id="101" name="Рисунок 3" descr=""/>
+          <p:cNvPr id="106" name="Рисунок 3" descr=""/>
           <p:cNvPicPr/>
           <p:nvPr/>
         </p:nvPicPr>
@@ -4943,7 +4945,7 @@
         <p:spPr>
           <a:xfrm>
             <a:off x="10862640" y="-771480"/>
-            <a:ext cx="2242080" cy="2242080"/>
+            <a:ext cx="2241720" cy="2241720"/>
           </a:xfrm>
           <a:prstGeom prst="rect">
             <a:avLst/>
@@ -4962,7 +4964,7 @@
       </p:pic>
       <p:sp>
         <p:nvSpPr>
-          <p:cNvPr id="102" name="TextBox 2"/>
+          <p:cNvPr id="107" name="TextBox 2"/>
           <p:cNvSpPr/>
           <p:nvPr/>
         </p:nvSpPr>
@@ -5016,7 +5018,7 @@
       </p:sp>
       <p:pic>
         <p:nvPicPr>
-          <p:cNvPr id="103" name="Рисунок 4" descr=""/>
+          <p:cNvPr id="108" name="Рисунок 4" descr=""/>
           <p:cNvPicPr/>
           <p:nvPr/>
         </p:nvPicPr>
@@ -5027,7 +5029,7 @@
         <p:spPr>
           <a:xfrm>
             <a:off x="-819000" y="5221440"/>
-            <a:ext cx="2242080" cy="2242080"/>
+            <a:ext cx="2241720" cy="2241720"/>
           </a:xfrm>
           <a:prstGeom prst="rect">
             <a:avLst/>
@@ -5046,7 +5048,7 @@
       </p:pic>
       <p:pic>
         <p:nvPicPr>
-          <p:cNvPr id="104" name="" descr=""/>
+          <p:cNvPr id="109" name="" descr=""/>
           <p:cNvPicPr/>
           <p:nvPr/>
         </p:nvPicPr>
@@ -5057,7 +5059,7 @@
         <p:spPr>
           <a:xfrm>
             <a:off x="0" y="1216440"/>
-            <a:ext cx="3974760" cy="4004640"/>
+            <a:ext cx="3974400" cy="4004280"/>
           </a:xfrm>
           <a:prstGeom prst="rect">
             <a:avLst/>
@@ -5069,7 +5071,7 @@
       </p:pic>
       <p:pic>
         <p:nvPicPr>
-          <p:cNvPr id="105" name="" descr=""/>
+          <p:cNvPr id="110" name="" descr=""/>
           <p:cNvPicPr/>
           <p:nvPr/>
         </p:nvPicPr>
@@ -5080,7 +5082,7 @@
         <p:spPr>
           <a:xfrm>
             <a:off x="4500000" y="1800000"/>
-            <a:ext cx="7406280" cy="3213360"/>
+            <a:ext cx="7405920" cy="3213000"/>
           </a:xfrm>
           <a:prstGeom prst="rect">
             <a:avLst/>
@@ -5122,7 +5124,7 @@
       </p:grpSpPr>
       <p:sp>
         <p:nvSpPr>
-          <p:cNvPr id="106" name="PlaceHolder 1"/>
+          <p:cNvPr id="111" name="PlaceHolder 1"/>
           <p:cNvSpPr>
             <a:spLocks noGrp="1"/>
           </p:cNvSpPr>
@@ -5133,7 +5135,7 @@
         <p:spPr>
           <a:xfrm>
             <a:off x="643320" y="10080"/>
-            <a:ext cx="10902960" cy="1324800"/>
+            <a:ext cx="10902600" cy="1324440"/>
           </a:xfrm>
           <a:prstGeom prst="rect">
             <a:avLst/>
@@ -5162,100 +5164,30 @@
                 <a:solidFill>
                   <a:schemeClr val="dk1"/>
                 </a:solidFill>
-                <a:latin typeface="Calibri Light"/>
+                <a:latin typeface="Calibri"/>
                 <a:ea typeface="Microsoft YaHei"/>
               </a:rPr>
-              <a:t> </a:t>
-            </a:r>
-            <a:r>
-              <a:rPr b="1" lang="ru-RU" sz="4400" spc="-1" strike="noStrike">
-                <a:solidFill>
-                  <a:schemeClr val="dk1"/>
-                </a:solidFill>
-                <a:latin typeface="Calibri Light"/>
-                <a:ea typeface="Microsoft YaHei"/>
-              </a:rPr>
-              <a:t>Регистры накопления</a:t>
-            </a:r>
-            <a:endParaRPr b="0" lang="ru-RU" sz="4400" spc="-1" strike="noStrike">
-              <a:solidFill>
-                <a:srgbClr val="000000"/>
-              </a:solidFill>
-              <a:latin typeface="Arial"/>
+              <a:t>Сохранение результатов оценки</a:t>
+            </a:r>
+            <a:endParaRPr b="1" lang="ru-RU" sz="4400" spc="-1" strike="noStrike">
+              <a:solidFill>
+                <a:srgbClr val="000000"/>
+              </a:solidFill>
+              <a:latin typeface="Calibri"/>
             </a:endParaRPr>
           </a:p>
         </p:txBody>
       </p:sp>
-      <p:pic>
-        <p:nvPicPr>
-          <p:cNvPr id="107" name="Рисунок 3" descr=""/>
-          <p:cNvPicPr/>
-          <p:nvPr/>
-        </p:nvPicPr>
-        <p:blipFill>
-          <a:blip r:embed="rId1"/>
-          <a:stretch/>
-        </p:blipFill>
-        <p:spPr>
-          <a:xfrm>
-            <a:off x="10877760" y="1119240"/>
-            <a:ext cx="2242080" cy="2242080"/>
-          </a:xfrm>
-          <a:prstGeom prst="rect">
-            <a:avLst/>
-          </a:prstGeom>
-          <a:ln w="0">
-            <a:noFill/>
-          </a:ln>
-          <a:effectLst>
-            <a:outerShdw blurRad="50760" dir="0" dist="38160" rotWithShape="0">
-              <a:srgbClr val="000000">
-                <a:alpha val="40000"/>
-              </a:srgbClr>
-            </a:outerShdw>
-          </a:effectLst>
-        </p:spPr>
-      </p:pic>
-      <p:pic>
-        <p:nvPicPr>
-          <p:cNvPr id="108" name="Рисунок 4" descr=""/>
-          <p:cNvPicPr/>
-          <p:nvPr/>
-        </p:nvPicPr>
-        <p:blipFill>
-          <a:blip r:embed="rId2"/>
-          <a:stretch/>
-        </p:blipFill>
-        <p:spPr>
-          <a:xfrm>
-            <a:off x="-871200" y="5221440"/>
-            <a:ext cx="2242080" cy="2242080"/>
-          </a:xfrm>
-          <a:prstGeom prst="rect">
-            <a:avLst/>
-          </a:prstGeom>
-          <a:ln w="0">
-            <a:noFill/>
-          </a:ln>
-          <a:effectLst>
-            <a:outerShdw blurRad="50760" dir="8100000" dist="37674" rotWithShape="0">
-              <a:srgbClr val="000000">
-                <a:alpha val="40000"/>
-              </a:srgbClr>
-            </a:outerShdw>
-          </a:effectLst>
-        </p:spPr>
-      </p:pic>
       <p:sp>
         <p:nvSpPr>
-          <p:cNvPr id="109" name="TextBox 2"/>
+          <p:cNvPr id="112" name="TextBox 2"/>
           <p:cNvSpPr/>
           <p:nvPr/>
         </p:nvSpPr>
         <p:spPr>
           <a:xfrm>
             <a:off x="1371600" y="3519000"/>
-            <a:ext cx="183960" cy="368640"/>
+            <a:ext cx="183600" cy="368280"/>
           </a:xfrm>
           <a:prstGeom prst="rect">
             <a:avLst/>
@@ -5293,7 +5225,7 @@
       </p:sp>
       <p:sp>
         <p:nvSpPr>
-          <p:cNvPr id="110" name="TextBox 7"/>
+          <p:cNvPr id="113" name="TextBox 7"/>
           <p:cNvSpPr/>
           <p:nvPr/>
         </p:nvSpPr>
@@ -5347,7 +5279,53 @@
       </p:sp>
       <p:pic>
         <p:nvPicPr>
-          <p:cNvPr id="111" name="" descr=""/>
+          <p:cNvPr id="114" name="" descr=""/>
+          <p:cNvPicPr/>
+          <p:nvPr/>
+        </p:nvPicPr>
+        <p:blipFill>
+          <a:blip r:embed="rId1"/>
+          <a:stretch/>
+        </p:blipFill>
+        <p:spPr>
+          <a:xfrm>
+            <a:off x="358920" y="1800000"/>
+            <a:ext cx="2520360" cy="2879280"/>
+          </a:xfrm>
+          <a:prstGeom prst="rect">
+            <a:avLst/>
+          </a:prstGeom>
+          <a:ln w="0">
+            <a:noFill/>
+          </a:ln>
+        </p:spPr>
+      </p:pic>
+      <p:pic>
+        <p:nvPicPr>
+          <p:cNvPr id="115" name="" descr=""/>
+          <p:cNvPicPr/>
+          <p:nvPr/>
+        </p:nvPicPr>
+        <p:blipFill>
+          <a:blip r:embed="rId2"/>
+          <a:stretch/>
+        </p:blipFill>
+        <p:spPr>
+          <a:xfrm>
+            <a:off x="2880000" y="1800000"/>
+            <a:ext cx="7600320" cy="1238400"/>
+          </a:xfrm>
+          <a:prstGeom prst="rect">
+            <a:avLst/>
+          </a:prstGeom>
+          <a:ln w="0">
+            <a:noFill/>
+          </a:ln>
+        </p:spPr>
+      </p:pic>
+      <p:pic>
+        <p:nvPicPr>
+          <p:cNvPr id="116" name="" descr=""/>
           <p:cNvPicPr/>
           <p:nvPr/>
         </p:nvPicPr>
@@ -5357,8 +5335,8 @@
         </p:blipFill>
         <p:spPr>
           <a:xfrm>
-            <a:off x="358920" y="1800000"/>
-            <a:ext cx="2520720" cy="2879640"/>
+            <a:off x="2880000" y="3240000"/>
+            <a:ext cx="7450920" cy="2261880"/>
           </a:xfrm>
           <a:prstGeom prst="rect">
             <a:avLst/>
@@ -5370,7 +5348,7 @@
       </p:pic>
       <p:pic>
         <p:nvPicPr>
-          <p:cNvPr id="112" name="" descr=""/>
+          <p:cNvPr id="117" name="Рисунок 17" descr=""/>
           <p:cNvPicPr/>
           <p:nvPr/>
         </p:nvPicPr>
@@ -5380,20 +5358,27 @@
         </p:blipFill>
         <p:spPr>
           <a:xfrm>
-            <a:off x="2880000" y="1800000"/>
-            <a:ext cx="7600680" cy="1238760"/>
-          </a:xfrm>
-          <a:prstGeom prst="rect">
-            <a:avLst/>
-          </a:prstGeom>
-          <a:ln w="0">
-            <a:noFill/>
-          </a:ln>
+            <a:off x="11070720" y="-816120"/>
+            <a:ext cx="2241720" cy="2241720"/>
+          </a:xfrm>
+          <a:prstGeom prst="rect">
+            <a:avLst/>
+          </a:prstGeom>
+          <a:ln w="0">
+            <a:noFill/>
+          </a:ln>
+          <a:effectLst>
+            <a:outerShdw blurRad="50760" dir="2700000" dist="37674" rotWithShape="0">
+              <a:srgbClr val="000000">
+                <a:alpha val="40000"/>
+              </a:srgbClr>
+            </a:outerShdw>
+          </a:effectLst>
         </p:spPr>
       </p:pic>
       <p:pic>
         <p:nvPicPr>
-          <p:cNvPr id="113" name="" descr=""/>
+          <p:cNvPr id="118" name="Рисунок 18" descr=""/>
           <p:cNvPicPr/>
           <p:nvPr/>
         </p:nvPicPr>
@@ -5403,15 +5388,22 @@
         </p:blipFill>
         <p:spPr>
           <a:xfrm>
-            <a:off x="2880000" y="3240000"/>
-            <a:ext cx="7451280" cy="2262240"/>
-          </a:xfrm>
-          <a:prstGeom prst="rect">
-            <a:avLst/>
-          </a:prstGeom>
-          <a:ln w="0">
-            <a:noFill/>
-          </a:ln>
+            <a:off x="-994680" y="5583240"/>
+            <a:ext cx="2241720" cy="2241720"/>
+          </a:xfrm>
+          <a:prstGeom prst="rect">
+            <a:avLst/>
+          </a:prstGeom>
+          <a:ln w="0">
+            <a:noFill/>
+          </a:ln>
+          <a:effectLst>
+            <a:outerShdw blurRad="50760" dir="8100000" dist="37674" rotWithShape="0">
+              <a:srgbClr val="000000">
+                <a:alpha val="40000"/>
+              </a:srgbClr>
+            </a:outerShdw>
+          </a:effectLst>
         </p:spPr>
       </p:pic>
     </p:spTree>
@@ -5446,7 +5438,7 @@
       </p:grpSpPr>
       <p:sp>
         <p:nvSpPr>
-          <p:cNvPr id="114" name="PlaceHolder 1"/>
+          <p:cNvPr id="119" name="PlaceHolder 1"/>
           <p:cNvSpPr>
             <a:spLocks noGrp="1"/>
           </p:cNvSpPr>
@@ -5457,7 +5449,7 @@
         <p:spPr>
           <a:xfrm>
             <a:off x="547560" y="10080"/>
-            <a:ext cx="11210040" cy="1324800"/>
+            <a:ext cx="11209680" cy="1324440"/>
           </a:xfrm>
           <a:prstGeom prst="rect">
             <a:avLst/>
@@ -5486,7 +5478,7 @@
                 <a:solidFill>
                   <a:schemeClr val="dk1"/>
                 </a:solidFill>
-                <a:latin typeface="Calibri Light"/>
+                <a:latin typeface="Calibri"/>
                 <a:ea typeface="Microsoft YaHei"/>
               </a:rPr>
               <a:t>Архитектура Python-сервиса</a:t>
@@ -5495,81 +5487,21 @@
               <a:solidFill>
                 <a:srgbClr val="000000"/>
               </a:solidFill>
-              <a:latin typeface="Arial"/>
+              <a:latin typeface="Calibri"/>
             </a:endParaRPr>
           </a:p>
         </p:txBody>
       </p:sp>
-      <p:pic>
-        <p:nvPicPr>
-          <p:cNvPr id="115" name="Рисунок 3" descr=""/>
-          <p:cNvPicPr/>
-          <p:nvPr/>
-        </p:nvPicPr>
-        <p:blipFill>
-          <a:blip r:embed="rId1"/>
-          <a:stretch/>
-        </p:blipFill>
-        <p:spPr>
-          <a:xfrm>
-            <a:off x="10843200" y="5301720"/>
-            <a:ext cx="2242080" cy="2242080"/>
-          </a:xfrm>
-          <a:prstGeom prst="rect">
-            <a:avLst/>
-          </a:prstGeom>
-          <a:ln w="0">
-            <a:noFill/>
-          </a:ln>
-          <a:effectLst>
-            <a:outerShdw blurRad="50760" dir="2700000" dist="37674" rotWithShape="0">
-              <a:srgbClr val="000000">
-                <a:alpha val="40000"/>
-              </a:srgbClr>
-            </a:outerShdw>
-          </a:effectLst>
-        </p:spPr>
-      </p:pic>
-      <p:pic>
-        <p:nvPicPr>
-          <p:cNvPr id="116" name="Рисунок 4" descr=""/>
-          <p:cNvPicPr/>
-          <p:nvPr/>
-        </p:nvPicPr>
-        <p:blipFill>
-          <a:blip r:embed="rId2"/>
-          <a:stretch/>
-        </p:blipFill>
-        <p:spPr>
-          <a:xfrm>
-            <a:off x="-686520" y="1046520"/>
-            <a:ext cx="2242080" cy="2242080"/>
-          </a:xfrm>
-          <a:prstGeom prst="rect">
-            <a:avLst/>
-          </a:prstGeom>
-          <a:ln w="0">
-            <a:noFill/>
-          </a:ln>
-          <a:effectLst>
-            <a:outerShdw blurRad="50760" dir="10800000" dist="38160" rotWithShape="0">
-              <a:srgbClr val="000000">
-                <a:alpha val="40000"/>
-              </a:srgbClr>
-            </a:outerShdw>
-          </a:effectLst>
-        </p:spPr>
-      </p:pic>
       <p:sp>
         <p:nvSpPr>
-          <p:cNvPr id="117" name="TextBox 2"/>
+          <p:cNvPr id="120" name="TextBox 2"/>
           <p:cNvSpPr/>
           <p:nvPr/>
         </p:nvSpPr>
         <p:spPr>
           <a:xfrm>
             <a:off x="1371600" y="3519000"/>
-            <a:ext cx="183960" cy="368640"/>
+            <a:ext cx="183600" cy="368280"/>
           </a:xfrm>
           <a:prstGeom prst="rect">
             <a:avLst/>
@@ -5607,7 +5539,7 @@
       </p:sp>
       <p:sp>
         <p:nvSpPr>
-          <p:cNvPr id="118" name="TextBox 7"/>
+          <p:cNvPr id="121" name="TextBox 7"/>
           <p:cNvSpPr/>
           <p:nvPr/>
         </p:nvSpPr>
@@ -5661,7 +5593,60 @@
       </p:sp>
       <p:pic>
         <p:nvPicPr>
-          <p:cNvPr id="119" name="" descr=""/>
+          <p:cNvPr id="122" name="" descr=""/>
+          <p:cNvPicPr/>
+          <p:nvPr/>
+        </p:nvPicPr>
+        <p:blipFill>
+          <a:blip r:embed="rId1"/>
+          <a:stretch/>
+        </p:blipFill>
+        <p:spPr>
+          <a:xfrm>
+            <a:off x="4140000" y="1620000"/>
+            <a:ext cx="4139280" cy="4651920"/>
+          </a:xfrm>
+          <a:prstGeom prst="rect">
+            <a:avLst/>
+          </a:prstGeom>
+          <a:ln w="0">
+            <a:noFill/>
+          </a:ln>
+        </p:spPr>
+      </p:pic>
+      <p:pic>
+        <p:nvPicPr>
+          <p:cNvPr id="123" name="Рисунок 19" descr=""/>
+          <p:cNvPicPr/>
+          <p:nvPr/>
+        </p:nvPicPr>
+        <p:blipFill>
+          <a:blip r:embed="rId2"/>
+          <a:stretch/>
+        </p:blipFill>
+        <p:spPr>
+          <a:xfrm>
+            <a:off x="11070720" y="-816120"/>
+            <a:ext cx="2241720" cy="2241720"/>
+          </a:xfrm>
+          <a:prstGeom prst="rect">
+            <a:avLst/>
+          </a:prstGeom>
+          <a:ln w="0">
+            <a:noFill/>
+          </a:ln>
+          <a:effectLst>
+            <a:outerShdw blurRad="50760" dir="2700000" dist="37674" rotWithShape="0">
+              <a:srgbClr val="000000">
+                <a:alpha val="40000"/>
+              </a:srgbClr>
+            </a:outerShdw>
+          </a:effectLst>
+        </p:spPr>
+      </p:pic>
+      <p:pic>
+        <p:nvPicPr>
+          <p:cNvPr id="124" name="Рисунок 24" descr=""/>
           <p:cNvPicPr/>
           <p:nvPr/>
         </p:nvPicPr>
@@ -5671,15 +5656,22 @@
         </p:blipFill>
         <p:spPr>
           <a:xfrm>
-            <a:off x="4140000" y="1620000"/>
-            <a:ext cx="4139640" cy="4652280"/>
-          </a:xfrm>
-          <a:prstGeom prst="rect">
-            <a:avLst/>
-          </a:prstGeom>
-          <a:ln w="0">
-            <a:noFill/>
-          </a:ln>
+            <a:off x="-994680" y="5583240"/>
+            <a:ext cx="2241720" cy="2241720"/>
+          </a:xfrm>
+          <a:prstGeom prst="rect">
+            <a:avLst/>
+          </a:prstGeom>
+          <a:ln w="0">
+            <a:noFill/>
+          </a:ln>
+          <a:effectLst>
+            <a:outerShdw blurRad="50760" dir="8100000" dist="37674" rotWithShape="0">
+              <a:srgbClr val="000000">
+                <a:alpha val="40000"/>
+              </a:srgbClr>
+            </a:outerShdw>
+          </a:effectLst>
         </p:spPr>
       </p:pic>
     </p:spTree>
@@ -5712,76 +5704,16 @@
           <a:chExt cx="0" cy="0"/>
         </a:xfrm>
       </p:grpSpPr>
-      <p:pic>
-        <p:nvPicPr>
-          <p:cNvPr id="120" name="Рисунок 3" descr=""/>
-          <p:cNvPicPr/>
-          <p:nvPr/>
-        </p:nvPicPr>
-        <p:blipFill>
-          <a:blip r:embed="rId1"/>
-          <a:stretch/>
-        </p:blipFill>
-        <p:spPr>
-          <a:xfrm>
-            <a:off x="10877760" y="5035680"/>
-            <a:ext cx="2242080" cy="2242080"/>
-          </a:xfrm>
-          <a:prstGeom prst="rect">
-            <a:avLst/>
-          </a:prstGeom>
-          <a:ln w="0">
-            <a:noFill/>
-          </a:ln>
-          <a:effectLst>
-            <a:outerShdw blurRad="50760" dir="8100000" dist="37674" rotWithShape="0">
-              <a:srgbClr val="000000">
-                <a:alpha val="40000"/>
-              </a:srgbClr>
-            </a:outerShdw>
-          </a:effectLst>
-        </p:spPr>
-      </p:pic>
-      <p:pic>
-        <p:nvPicPr>
-          <p:cNvPr id="121" name="Рисунок 4" descr=""/>
-          <p:cNvPicPr/>
-          <p:nvPr/>
-        </p:nvPicPr>
-        <p:blipFill>
-          <a:blip r:embed="rId2"/>
-          <a:stretch/>
-        </p:blipFill>
-        <p:spPr>
-          <a:xfrm>
-            <a:off x="-871200" y="5221440"/>
-            <a:ext cx="2242080" cy="2242080"/>
-          </a:xfrm>
-          <a:prstGeom prst="rect">
-            <a:avLst/>
-          </a:prstGeom>
-          <a:ln w="0">
-            <a:noFill/>
-          </a:ln>
-          <a:effectLst>
-            <a:outerShdw blurRad="50760" dir="8100000" dist="37674" rotWithShape="0">
-              <a:srgbClr val="000000">
-                <a:alpha val="40000"/>
-              </a:srgbClr>
-            </a:outerShdw>
-          </a:effectLst>
-        </p:spPr>
-      </p:pic>
       <p:sp>
         <p:nvSpPr>
-          <p:cNvPr id="122" name="TextBox 2"/>
+          <p:cNvPr id="125" name="TextBox 2"/>
           <p:cNvSpPr/>
           <p:nvPr/>
         </p:nvSpPr>
         <p:spPr>
           <a:xfrm>
             <a:off x="1371600" y="3519000"/>
-            <a:ext cx="183960" cy="368640"/>
+            <a:ext cx="183600" cy="368280"/>
           </a:xfrm>
           <a:prstGeom prst="rect">
             <a:avLst/>
@@ -5819,7 +5751,7 @@
       </p:sp>
       <p:sp>
         <p:nvSpPr>
-          <p:cNvPr id="123" name="TextBox 7"/>
+          <p:cNvPr id="126" name="TextBox 7"/>
           <p:cNvSpPr/>
           <p:nvPr/>
         </p:nvSpPr>
@@ -5873,18 +5805,18 @@
       </p:sp>
       <p:pic>
         <p:nvPicPr>
-          <p:cNvPr id="124" name="" descr=""/>
+          <p:cNvPr id="127" name="" descr=""/>
           <p:cNvPicPr/>
           <p:nvPr/>
         </p:nvPicPr>
         <p:blipFill>
-          <a:blip r:embed="rId3"/>
+          <a:blip r:embed="rId1"/>
           <a:stretch/>
         </p:blipFill>
         <p:spPr>
           <a:xfrm>
             <a:off x="2340000" y="1222560"/>
-            <a:ext cx="8053200" cy="2197080"/>
+            <a:ext cx="8052840" cy="2196720"/>
           </a:xfrm>
           <a:prstGeom prst="rect">
             <a:avLst/>
@@ -5896,7 +5828,7 @@
       </p:pic>
       <p:sp>
         <p:nvSpPr>
-          <p:cNvPr id="125" name="PlaceHolder 1"/>
+          <p:cNvPr id="128" name="PlaceHolder 1"/>
           <p:cNvSpPr>
             <a:spLocks noGrp="1"/>
           </p:cNvSpPr>
@@ -5907,7 +5839,7 @@
         <p:spPr>
           <a:xfrm>
             <a:off x="720000" y="-245160"/>
-            <a:ext cx="10902960" cy="1324800"/>
+            <a:ext cx="10902600" cy="1324440"/>
           </a:xfrm>
           <a:prstGeom prst="rect">
             <a:avLst/>
@@ -5936,7 +5868,7 @@
                 <a:solidFill>
                   <a:schemeClr val="dk1"/>
                 </a:solidFill>
-                <a:latin typeface="Calibri Light"/>
+                <a:latin typeface="Calibri"/>
                 <a:ea typeface="Microsoft YaHei"/>
               </a:rPr>
               <a:t>Демонстрация</a:t>
@@ -5945,11 +5877,71 @@
               <a:solidFill>
                 <a:srgbClr val="000000"/>
               </a:solidFill>
-              <a:latin typeface="Arial"/>
+              <a:latin typeface="Calibri"/>
             </a:endParaRPr>
           </a:p>
         </p:txBody>
       </p:sp>
+      <p:pic>
+        <p:nvPicPr>
+          <p:cNvPr id="129" name="Рисунок 28" descr=""/>
+          <p:cNvPicPr/>
+          <p:nvPr/>
+        </p:nvPicPr>
+        <p:blipFill>
+          <a:blip r:embed="rId2"/>
+          <a:stretch/>
+        </p:blipFill>
+        <p:spPr>
+          <a:xfrm>
+            <a:off x="11070720" y="-816120"/>
+            <a:ext cx="2241720" cy="2241720"/>
+          </a:xfrm>
+          <a:prstGeom prst="rect">
+            <a:avLst/>
+          </a:prstGeom>
+          <a:ln w="0">
+            <a:noFill/>
+          </a:ln>
+          <a:effectLst>
+            <a:outerShdw blurRad="50760" dir="2700000" dist="37674" rotWithShape="0">
+              <a:srgbClr val="000000">
+                <a:alpha val="40000"/>
+              </a:srgbClr>
+            </a:outerShdw>
+          </a:effectLst>
+        </p:spPr>
+      </p:pic>
+      <p:pic>
+        <p:nvPicPr>
+          <p:cNvPr id="130" name="Рисунок 29" descr=""/>
+          <p:cNvPicPr/>
+          <p:nvPr/>
+        </p:nvPicPr>
+        <p:blipFill>
+          <a:blip r:embed="rId3"/>
+          <a:stretch/>
+        </p:blipFill>
+        <p:spPr>
+          <a:xfrm>
+            <a:off x="-994680" y="5583240"/>
+            <a:ext cx="2241720" cy="2241720"/>
+          </a:xfrm>
+          <a:prstGeom prst="rect">
+            <a:avLst/>
+          </a:prstGeom>
+          <a:ln w="0">
+            <a:noFill/>
+          </a:ln>
+          <a:effectLst>
+            <a:outerShdw blurRad="50760" dir="8100000" dist="37674" rotWithShape="0">
+              <a:srgbClr val="000000">
+                <a:alpha val="40000"/>
+              </a:srgbClr>
+            </a:outerShdw>
+          </a:effectLst>
+        </p:spPr>
+      </p:pic>
     </p:spTree>
   </p:cSld>
   <mc:AlternateContent>
@@ -5980,76 +5972,16 @@
           <a:chExt cx="0" cy="0"/>
         </a:xfrm>
       </p:grpSpPr>
-      <p:pic>
-        <p:nvPicPr>
-          <p:cNvPr id="126" name="Рисунок 3" descr=""/>
-          <p:cNvPicPr/>
-          <p:nvPr/>
-        </p:nvPicPr>
-        <p:blipFill>
-          <a:blip r:embed="rId1"/>
-          <a:stretch/>
-        </p:blipFill>
-        <p:spPr>
-          <a:xfrm>
-            <a:off x="10877760" y="1119240"/>
-            <a:ext cx="2242080" cy="2242080"/>
-          </a:xfrm>
-          <a:prstGeom prst="rect">
-            <a:avLst/>
-          </a:prstGeom>
-          <a:ln w="0">
-            <a:noFill/>
-          </a:ln>
-          <a:effectLst>
-            <a:outerShdw blurRad="50760" dir="0" dist="38160" rotWithShape="0">
-              <a:srgbClr val="000000">
-                <a:alpha val="40000"/>
-              </a:srgbClr>
-            </a:outerShdw>
-          </a:effectLst>
-        </p:spPr>
-      </p:pic>
-      <p:pic>
-        <p:nvPicPr>
-          <p:cNvPr id="127" name="Рисунок 4" descr=""/>
-          <p:cNvPicPr/>
-          <p:nvPr/>
-        </p:nvPicPr>
-        <p:blipFill>
-          <a:blip r:embed="rId2"/>
-          <a:stretch/>
-        </p:blipFill>
-        <p:spPr>
-          <a:xfrm>
-            <a:off x="-871200" y="5221440"/>
-            <a:ext cx="2242080" cy="2242080"/>
-          </a:xfrm>
-          <a:prstGeom prst="rect">
-            <a:avLst/>
-          </a:prstGeom>
-          <a:ln w="0">
-            <a:noFill/>
-          </a:ln>
-          <a:effectLst>
-            <a:outerShdw blurRad="50760" dir="8100000" dist="37674" rotWithShape="0">
-              <a:srgbClr val="000000">
-                <a:alpha val="40000"/>
-              </a:srgbClr>
-            </a:outerShdw>
-          </a:effectLst>
-        </p:spPr>
-      </p:pic>
       <p:sp>
         <p:nvSpPr>
-          <p:cNvPr id="128" name="TextBox 2"/>
+          <p:cNvPr id="131" name="TextBox 2"/>
           <p:cNvSpPr/>
           <p:nvPr/>
         </p:nvSpPr>
         <p:spPr>
           <a:xfrm>
             <a:off x="1371600" y="3519000"/>
-            <a:ext cx="183960" cy="368640"/>
+            <a:ext cx="183600" cy="368280"/>
           </a:xfrm>
           <a:prstGeom prst="rect">
             <a:avLst/>
@@ -6087,7 +6019,7 @@
       </p:sp>
       <p:sp>
         <p:nvSpPr>
-          <p:cNvPr id="129" name="TextBox 7"/>
+          <p:cNvPr id="132" name="TextBox 7"/>
           <p:cNvSpPr/>
           <p:nvPr/>
         </p:nvSpPr>
@@ -6141,7 +6073,53 @@
       </p:sp>
       <p:pic>
         <p:nvPicPr>
-          <p:cNvPr id="130" name="" descr=""/>
+          <p:cNvPr id="133" name="" descr=""/>
+          <p:cNvPicPr/>
+          <p:nvPr/>
+        </p:nvPicPr>
+        <p:blipFill>
+          <a:blip r:embed="rId1"/>
+          <a:stretch/>
+        </p:blipFill>
+        <p:spPr>
+          <a:xfrm>
+            <a:off x="2502720" y="586800"/>
+            <a:ext cx="7396560" cy="2652480"/>
+          </a:xfrm>
+          <a:prstGeom prst="rect">
+            <a:avLst/>
+          </a:prstGeom>
+          <a:ln w="0">
+            <a:noFill/>
+          </a:ln>
+        </p:spPr>
+      </p:pic>
+      <p:pic>
+        <p:nvPicPr>
+          <p:cNvPr id="134" name="" descr=""/>
+          <p:cNvPicPr/>
+          <p:nvPr/>
+        </p:nvPicPr>
+        <p:blipFill>
+          <a:blip r:embed="rId2"/>
+          <a:stretch/>
+        </p:blipFill>
+        <p:spPr>
+          <a:xfrm>
+            <a:off x="2520000" y="3470040"/>
+            <a:ext cx="7357680" cy="2653920"/>
+          </a:xfrm>
+          <a:prstGeom prst="rect">
+            <a:avLst/>
+          </a:prstGeom>
+          <a:ln w="0">
+            <a:noFill/>
+          </a:ln>
+        </p:spPr>
+      </p:pic>
+      <p:pic>
+        <p:nvPicPr>
+          <p:cNvPr id="135" name="Рисунок 30" descr=""/>
           <p:cNvPicPr/>
           <p:nvPr/>
         </p:nvPicPr>
@@ -6151,20 +6129,27 @@
         </p:blipFill>
         <p:spPr>
           <a:xfrm>
-            <a:off x="2502720" y="586800"/>
-            <a:ext cx="7396920" cy="2652840"/>
-          </a:xfrm>
-          <a:prstGeom prst="rect">
-            <a:avLst/>
-          </a:prstGeom>
-          <a:ln w="0">
-            <a:noFill/>
-          </a:ln>
+            <a:off x="11070720" y="-816120"/>
+            <a:ext cx="2241720" cy="2241720"/>
+          </a:xfrm>
+          <a:prstGeom prst="rect">
+            <a:avLst/>
+          </a:prstGeom>
+          <a:ln w="0">
+            <a:noFill/>
+          </a:ln>
+          <a:effectLst>
+            <a:outerShdw blurRad="50760" dir="2700000" dist="37674" rotWithShape="0">
+              <a:srgbClr val="000000">
+                <a:alpha val="40000"/>
+              </a:srgbClr>
+            </a:outerShdw>
+          </a:effectLst>
         </p:spPr>
       </p:pic>
       <p:pic>
         <p:nvPicPr>
-          <p:cNvPr id="131" name="" descr=""/>
+          <p:cNvPr id="136" name="Рисунок 31" descr=""/>
           <p:cNvPicPr/>
           <p:nvPr/>
         </p:nvPicPr>
@@ -6174,15 +6159,22 @@
         </p:blipFill>
         <p:spPr>
           <a:xfrm>
-            <a:off x="2520000" y="3470040"/>
-            <a:ext cx="7358040" cy="2654280"/>
-          </a:xfrm>
-          <a:prstGeom prst="rect">
-            <a:avLst/>
-          </a:prstGeom>
-          <a:ln w="0">
-            <a:noFill/>
-          </a:ln>
+            <a:off x="-994680" y="5583240"/>
+            <a:ext cx="2241720" cy="2241720"/>
+          </a:xfrm>
+          <a:prstGeom prst="rect">
+            <a:avLst/>
+          </a:prstGeom>
+          <a:ln w="0">
+            <a:noFill/>
+          </a:ln>
+          <a:effectLst>
+            <a:outerShdw blurRad="50760" dir="8100000" dist="37674" rotWithShape="0">
+              <a:srgbClr val="000000">
+                <a:alpha val="40000"/>
+              </a:srgbClr>
+            </a:outerShdw>
+          </a:effectLst>
         </p:spPr>
       </p:pic>
     </p:spTree>
@@ -6217,14 +6209,14 @@
       </p:grpSpPr>
       <p:sp>
         <p:nvSpPr>
-          <p:cNvPr id="132" name="TextBox 3"/>
+          <p:cNvPr id="137" name="TextBox 3"/>
           <p:cNvSpPr/>
           <p:nvPr/>
         </p:nvSpPr>
         <p:spPr>
           <a:xfrm>
             <a:off x="5948280" y="6308280"/>
-            <a:ext cx="587520" cy="577440"/>
+            <a:ext cx="587160" cy="577440"/>
           </a:xfrm>
           <a:prstGeom prst="rect">
             <a:avLst/>
@@ -6271,7 +6263,7 @@
       </p:sp>
       <p:pic>
         <p:nvPicPr>
-          <p:cNvPr id="133" name="" descr=""/>
+          <p:cNvPr id="138" name="Рисунок 32" descr=""/>
           <p:cNvPicPr/>
           <p:nvPr/>
         </p:nvPicPr>
@@ -6281,8 +6273,68 @@
         </p:blipFill>
         <p:spPr>
           <a:xfrm>
-            <a:off x="486000" y="875520"/>
-            <a:ext cx="11573640" cy="4524120"/>
+            <a:off x="11070720" y="-816120"/>
+            <a:ext cx="2241720" cy="2241720"/>
+          </a:xfrm>
+          <a:prstGeom prst="rect">
+            <a:avLst/>
+          </a:prstGeom>
+          <a:ln w="0">
+            <a:noFill/>
+          </a:ln>
+          <a:effectLst>
+            <a:outerShdw blurRad="50760" dir="2700000" dist="37674" rotWithShape="0">
+              <a:srgbClr val="000000">
+                <a:alpha val="40000"/>
+              </a:srgbClr>
+            </a:outerShdw>
+          </a:effectLst>
+        </p:spPr>
+      </p:pic>
+      <p:pic>
+        <p:nvPicPr>
+          <p:cNvPr id="139" name="Рисунок 33" descr=""/>
+          <p:cNvPicPr/>
+          <p:nvPr/>
+        </p:nvPicPr>
+        <p:blipFill>
+          <a:blip r:embed="rId2"/>
+          <a:stretch/>
+        </p:blipFill>
+        <p:spPr>
+          <a:xfrm>
+            <a:off x="-994680" y="5583240"/>
+            <a:ext cx="2241720" cy="2241720"/>
+          </a:xfrm>
+          <a:prstGeom prst="rect">
+            <a:avLst/>
+          </a:prstGeom>
+          <a:ln w="0">
+            <a:noFill/>
+          </a:ln>
+          <a:effectLst>
+            <a:outerShdw blurRad="50760" dir="8100000" dist="37674" rotWithShape="0">
+              <a:srgbClr val="000000">
+                <a:alpha val="40000"/>
+              </a:srgbClr>
+            </a:outerShdw>
+          </a:effectLst>
+        </p:spPr>
+      </p:pic>
+      <p:pic>
+        <p:nvPicPr>
+          <p:cNvPr id="140" name="" descr=""/>
+          <p:cNvPicPr/>
+          <p:nvPr/>
+        </p:nvPicPr>
+        <p:blipFill>
+          <a:blip r:embed="rId3"/>
+          <a:stretch/>
+        </p:blipFill>
+        <p:spPr>
+          <a:xfrm>
+            <a:off x="1030320" y="1260000"/>
+            <a:ext cx="10129680" cy="3960000"/>
           </a:xfrm>
           <a:prstGeom prst="rect">
             <a:avLst/>
@@ -6324,7 +6376,7 @@
       </p:grpSpPr>
       <p:sp>
         <p:nvSpPr>
-          <p:cNvPr id="134" name="PlaceHolder 1"/>
+          <p:cNvPr id="141" name="PlaceHolder 1"/>
           <p:cNvSpPr>
             <a:spLocks noGrp="1"/>
           </p:cNvSpPr>
@@ -6334,8 +6386,8 @@
         </p:nvSpPr>
         <p:spPr>
           <a:xfrm>
-            <a:off x="547560" y="10080"/>
-            <a:ext cx="11210040" cy="1324800"/>
+            <a:off x="540000" y="-244440"/>
+            <a:ext cx="11209680" cy="1324440"/>
           </a:xfrm>
           <a:prstGeom prst="rect">
             <a:avLst/>
@@ -6364,7 +6416,7 @@
                 <a:solidFill>
                   <a:schemeClr val="dk1"/>
                 </a:solidFill>
-                <a:latin typeface="Calibri Light"/>
+                <a:latin typeface="Calibri"/>
               </a:rPr>
               <a:t>Тестирование</a:t>
             </a:r>
@@ -6372,81 +6424,21 @@
               <a:solidFill>
                 <a:srgbClr val="000000"/>
               </a:solidFill>
-              <a:latin typeface="Arial"/>
+              <a:latin typeface="Calibri"/>
             </a:endParaRPr>
           </a:p>
         </p:txBody>
       </p:sp>
-      <p:pic>
-        <p:nvPicPr>
-          <p:cNvPr id="135" name="Рисунок 3" descr=""/>
-          <p:cNvPicPr/>
-          <p:nvPr/>
-        </p:nvPicPr>
-        <p:blipFill>
-          <a:blip r:embed="rId1"/>
-          <a:stretch/>
-        </p:blipFill>
-        <p:spPr>
-          <a:xfrm>
-            <a:off x="11225160" y="5869440"/>
-            <a:ext cx="2242080" cy="2242080"/>
-          </a:xfrm>
-          <a:prstGeom prst="rect">
-            <a:avLst/>
-          </a:prstGeom>
-          <a:ln w="0">
-            <a:noFill/>
-          </a:ln>
-          <a:effectLst>
-            <a:outerShdw blurRad="50760" dir="2700000" dist="37674" rotWithShape="0">
-              <a:srgbClr val="000000">
-                <a:alpha val="40000"/>
-              </a:srgbClr>
-            </a:outerShdw>
-          </a:effectLst>
-        </p:spPr>
-      </p:pic>
-      <p:pic>
-        <p:nvPicPr>
-          <p:cNvPr id="136" name="Рисунок 4" descr=""/>
-          <p:cNvPicPr/>
-          <p:nvPr/>
-        </p:nvPicPr>
-        <p:blipFill>
-          <a:blip r:embed="rId2"/>
-          <a:stretch/>
-        </p:blipFill>
-        <p:spPr>
-          <a:xfrm>
-            <a:off x="-669240" y="-843120"/>
-            <a:ext cx="2242080" cy="2242080"/>
-          </a:xfrm>
-          <a:prstGeom prst="rect">
-            <a:avLst/>
-          </a:prstGeom>
-          <a:ln w="0">
-            <a:noFill/>
-          </a:ln>
-          <a:effectLst>
-            <a:outerShdw blurRad="50760" dir="13500000" dist="37674" rotWithShape="0">
-              <a:srgbClr val="000000">
-                <a:alpha val="40000"/>
-              </a:srgbClr>
-            </a:outerShdw>
-          </a:effectLst>
-        </p:spPr>
-      </p:pic>
       <p:sp>
         <p:nvSpPr>
-          <p:cNvPr id="137" name="TextBox 2"/>
+          <p:cNvPr id="142" name="TextBox 2"/>
           <p:cNvSpPr/>
           <p:nvPr/>
         </p:nvSpPr>
         <p:spPr>
           <a:xfrm>
             <a:off x="1371600" y="3519000"/>
-            <a:ext cx="183960" cy="368640"/>
+            <a:ext cx="183600" cy="368280"/>
           </a:xfrm>
           <a:prstGeom prst="rect">
             <a:avLst/>
@@ -6484,7 +6476,7 @@
       </p:sp>
       <p:sp>
         <p:nvSpPr>
-          <p:cNvPr id="138" name="TextBox 7"/>
+          <p:cNvPr id="143" name="TextBox 7"/>
           <p:cNvSpPr/>
           <p:nvPr/>
         </p:nvSpPr>
@@ -6538,14 +6530,14 @@
       </p:sp>
       <p:sp>
         <p:nvSpPr>
-          <p:cNvPr id="139" name="Rectangle 2"/>
+          <p:cNvPr id="144" name="Rectangle 2"/>
           <p:cNvSpPr/>
           <p:nvPr/>
         </p:nvSpPr>
         <p:spPr>
           <a:xfrm>
             <a:off x="1697400" y="2512080"/>
-            <a:ext cx="12191400" cy="360"/>
+            <a:ext cx="12191040" cy="360"/>
           </a:xfrm>
           <a:prstGeom prst="rect">
             <a:avLst/>
@@ -6583,7 +6575,53 @@
       </p:sp>
       <p:pic>
         <p:nvPicPr>
-          <p:cNvPr id="140" name="Рисунок 20" descr=""/>
+          <p:cNvPr id="145" name="Рисунок 20" descr=""/>
+          <p:cNvPicPr/>
+          <p:nvPr/>
+        </p:nvPicPr>
+        <p:blipFill>
+          <a:blip r:embed="rId1"/>
+          <a:stretch/>
+        </p:blipFill>
+        <p:spPr>
+          <a:xfrm>
+            <a:off x="1234080" y="1439640"/>
+            <a:ext cx="366840" cy="350640"/>
+          </a:xfrm>
+          <a:prstGeom prst="rect">
+            <a:avLst/>
+          </a:prstGeom>
+          <a:ln w="0">
+            <a:noFill/>
+          </a:ln>
+        </p:spPr>
+      </p:pic>
+      <p:pic>
+        <p:nvPicPr>
+          <p:cNvPr id="146" name="Рисунок 21" descr=""/>
+          <p:cNvPicPr/>
+          <p:nvPr/>
+        </p:nvPicPr>
+        <p:blipFill>
+          <a:blip r:embed="rId2"/>
+          <a:stretch/>
+        </p:blipFill>
+        <p:spPr>
+          <a:xfrm>
+            <a:off x="1173240" y="2284200"/>
+            <a:ext cx="366840" cy="350640"/>
+          </a:xfrm>
+          <a:prstGeom prst="rect">
+            <a:avLst/>
+          </a:prstGeom>
+          <a:ln w="0">
+            <a:noFill/>
+          </a:ln>
+        </p:spPr>
+      </p:pic>
+      <p:pic>
+        <p:nvPicPr>
+          <p:cNvPr id="147" name="Рисунок 22" descr=""/>
           <p:cNvPicPr/>
           <p:nvPr/>
         </p:nvPicPr>
@@ -6593,8 +6631,8 @@
         </p:blipFill>
         <p:spPr>
           <a:xfrm>
-            <a:off x="1234080" y="1439640"/>
-            <a:ext cx="367200" cy="351000"/>
+            <a:off x="1137960" y="4331160"/>
+            <a:ext cx="366840" cy="350640"/>
           </a:xfrm>
           <a:prstGeom prst="rect">
             <a:avLst/>
@@ -6606,7 +6644,7 @@
       </p:pic>
       <p:pic>
         <p:nvPicPr>
-          <p:cNvPr id="141" name="Рисунок 21" descr=""/>
+          <p:cNvPr id="148" name="Рисунок 23" descr=""/>
           <p:cNvPicPr/>
           <p:nvPr/>
         </p:nvPicPr>
@@ -6616,8 +6654,8 @@
         </p:blipFill>
         <p:spPr>
           <a:xfrm>
-            <a:off x="1173240" y="2284200"/>
-            <a:ext cx="367200" cy="351000"/>
+            <a:off x="1173240" y="5139360"/>
+            <a:ext cx="366840" cy="350640"/>
           </a:xfrm>
           <a:prstGeom prst="rect">
             <a:avLst/>
@@ -6629,7 +6667,7 @@
       </p:pic>
       <p:pic>
         <p:nvPicPr>
-          <p:cNvPr id="142" name="Рисунок 22" descr=""/>
+          <p:cNvPr id="149" name="Рисунок 25" descr=""/>
           <p:cNvPicPr/>
           <p:nvPr/>
         </p:nvPicPr>
@@ -6639,8 +6677,8 @@
         </p:blipFill>
         <p:spPr>
           <a:xfrm>
-            <a:off x="1137960" y="4331160"/>
-            <a:ext cx="367200" cy="351000"/>
+            <a:off x="1173240" y="3522960"/>
+            <a:ext cx="366840" cy="350640"/>
           </a:xfrm>
           <a:prstGeom prst="rect">
             <a:avLst/>
@@ -6652,7 +6690,7 @@
       </p:pic>
       <p:pic>
         <p:nvPicPr>
-          <p:cNvPr id="143" name="Рисунок 23" descr=""/>
+          <p:cNvPr id="150" name="Рисунок 26" descr=""/>
           <p:cNvPicPr/>
           <p:nvPr/>
         </p:nvPicPr>
@@ -6662,8 +6700,8 @@
         </p:blipFill>
         <p:spPr>
           <a:xfrm>
-            <a:off x="1173240" y="5139360"/>
-            <a:ext cx="367200" cy="351000"/>
+            <a:off x="1173240" y="2887560"/>
+            <a:ext cx="366840" cy="350640"/>
           </a:xfrm>
           <a:prstGeom prst="rect">
             <a:avLst/>
@@ -6675,7 +6713,7 @@
       </p:pic>
       <p:pic>
         <p:nvPicPr>
-          <p:cNvPr id="144" name="Рисунок 25" descr=""/>
+          <p:cNvPr id="151" name="Рисунок 27" descr=""/>
           <p:cNvPicPr/>
           <p:nvPr/>
         </p:nvPicPr>
@@ -6685,54 +6723,8 @@
         </p:blipFill>
         <p:spPr>
           <a:xfrm>
-            <a:off x="1173240" y="3522960"/>
-            <a:ext cx="367200" cy="351000"/>
-          </a:xfrm>
-          <a:prstGeom prst="rect">
-            <a:avLst/>
-          </a:prstGeom>
-          <a:ln w="0">
-            <a:noFill/>
-          </a:ln>
-        </p:spPr>
-      </p:pic>
-      <p:pic>
-        <p:nvPicPr>
-          <p:cNvPr id="145" name="Рисунок 26" descr=""/>
-          <p:cNvPicPr/>
-          <p:nvPr/>
-        </p:nvPicPr>
-        <p:blipFill>
-          <a:blip r:embed="rId8"/>
-          <a:stretch/>
-        </p:blipFill>
-        <p:spPr>
-          <a:xfrm>
-            <a:off x="1173240" y="2887560"/>
-            <a:ext cx="367200" cy="351000"/>
-          </a:xfrm>
-          <a:prstGeom prst="rect">
-            <a:avLst/>
-          </a:prstGeom>
-          <a:ln w="0">
-            <a:noFill/>
-          </a:ln>
-        </p:spPr>
-      </p:pic>
-      <p:pic>
-        <p:nvPicPr>
-          <p:cNvPr id="146" name="Рисунок 27" descr=""/>
-          <p:cNvPicPr/>
-          <p:nvPr/>
-        </p:nvPicPr>
-        <p:blipFill>
-          <a:blip r:embed="rId9"/>
-          <a:stretch/>
-        </p:blipFill>
-        <p:spPr>
-          <a:xfrm>
             <a:off x="1143360" y="5933880"/>
-            <a:ext cx="367200" cy="351000"/>
+            <a:ext cx="366840" cy="350640"/>
           </a:xfrm>
           <a:prstGeom prst="rect">
             <a:avLst/>
@@ -6744,7 +6736,7 @@
       </p:pic>
       <p:graphicFrame>
         <p:nvGraphicFramePr>
-          <p:cNvPr id="147" name="Таблица 8"/>
+          <p:cNvPr id="152" name="Таблица 8"/>
           <p:cNvGraphicFramePr/>
           <p:nvPr/>
         </p:nvGraphicFramePr>
@@ -7677,6 +7669,66 @@
           </a:graphicData>
         </a:graphic>
       </p:graphicFrame>
+      <p:pic>
+        <p:nvPicPr>
+          <p:cNvPr id="153" name="Рисунок 34" descr=""/>
+          <p:cNvPicPr/>
+          <p:nvPr/>
+        </p:nvPicPr>
+        <p:blipFill>
+          <a:blip r:embed="rId8"/>
+          <a:stretch/>
+        </p:blipFill>
+        <p:spPr>
+          <a:xfrm>
+            <a:off x="11070720" y="-816120"/>
+            <a:ext cx="2241720" cy="2241720"/>
+          </a:xfrm>
+          <a:prstGeom prst="rect">
+            <a:avLst/>
+          </a:prstGeom>
+          <a:ln w="0">
+            <a:noFill/>
+          </a:ln>
+          <a:effectLst>
+            <a:outerShdw blurRad="50760" dir="2700000" dist="37674" rotWithShape="0">
+              <a:srgbClr val="000000">
+                <a:alpha val="40000"/>
+              </a:srgbClr>
+            </a:outerShdw>
+          </a:effectLst>
+        </p:spPr>
+      </p:pic>
+      <p:pic>
+        <p:nvPicPr>
+          <p:cNvPr id="154" name="Рисунок 35" descr=""/>
+          <p:cNvPicPr/>
+          <p:nvPr/>
+        </p:nvPicPr>
+        <p:blipFill>
+          <a:blip r:embed="rId9"/>
+          <a:stretch/>
+        </p:blipFill>
+        <p:spPr>
+          <a:xfrm>
+            <a:off x="-994680" y="5583240"/>
+            <a:ext cx="2241720" cy="2241720"/>
+          </a:xfrm>
+          <a:prstGeom prst="rect">
+            <a:avLst/>
+          </a:prstGeom>
+          <a:ln w="0">
+            <a:noFill/>
+          </a:ln>
+          <a:effectLst>
+            <a:outerShdw blurRad="50760" dir="8100000" dist="37674" rotWithShape="0">
+              <a:srgbClr val="000000">
+                <a:alpha val="40000"/>
+              </a:srgbClr>
+            </a:outerShdw>
+          </a:effectLst>
+        </p:spPr>
+      </p:pic>
     </p:spTree>
   </p:cSld>
   <mc:AlternateContent>
@@ -7709,7 +7761,7 @@
       </p:grpSpPr>
       <p:sp>
         <p:nvSpPr>
-          <p:cNvPr id="148" name="PlaceHolder 1"/>
+          <p:cNvPr id="155" name="PlaceHolder 1"/>
           <p:cNvSpPr>
             <a:spLocks noGrp="1"/>
           </p:cNvSpPr>
@@ -7720,7 +7772,7 @@
         <p:spPr>
           <a:xfrm>
             <a:off x="4272480" y="313560"/>
-            <a:ext cx="3646080" cy="624600"/>
+            <a:ext cx="3645720" cy="624240"/>
           </a:xfrm>
           <a:prstGeom prst="rect">
             <a:avLst/>
@@ -7749,7 +7801,7 @@
                 <a:solidFill>
                   <a:schemeClr val="dk1"/>
                 </a:solidFill>
-                <a:latin typeface="Calibri Light"/>
+                <a:latin typeface="Calibri"/>
               </a:rPr>
               <a:t>Заключение</a:t>
             </a:r>
@@ -7757,21 +7809,21 @@
               <a:solidFill>
                 <a:srgbClr val="000000"/>
               </a:solidFill>
-              <a:latin typeface="Arial"/>
+              <a:latin typeface="Calibri"/>
             </a:endParaRPr>
           </a:p>
         </p:txBody>
       </p:sp>
       <p:sp>
         <p:nvSpPr>
-          <p:cNvPr id="149" name="TextBox 2"/>
+          <p:cNvPr id="156" name="TextBox 2"/>
           <p:cNvSpPr/>
           <p:nvPr/>
         </p:nvSpPr>
         <p:spPr>
           <a:xfrm>
             <a:off x="1371600" y="3519000"/>
-            <a:ext cx="183960" cy="368640"/>
+            <a:ext cx="183600" cy="368280"/>
           </a:xfrm>
           <a:prstGeom prst="rect">
             <a:avLst/>
@@ -7809,14 +7861,14 @@
       </p:sp>
       <p:sp>
         <p:nvSpPr>
-          <p:cNvPr id="150" name="TextBox 6"/>
+          <p:cNvPr id="157" name="TextBox 6"/>
           <p:cNvSpPr/>
           <p:nvPr/>
         </p:nvSpPr>
         <p:spPr>
           <a:xfrm>
-            <a:off x="965520" y="1073880"/>
-            <a:ext cx="10260000" cy="3693240"/>
+            <a:off x="720000" y="1273680"/>
+            <a:ext cx="11160000" cy="4367520"/>
           </a:xfrm>
           <a:prstGeom prst="rect">
             <a:avLst/>
@@ -7854,17 +7906,17 @@
               <a:buAutoNum type="arabicPeriod"/>
             </a:pPr>
             <a:r>
-              <a:rPr b="1" lang="ru-RU" sz="2000" spc="-1" strike="noStrike">
+              <a:rPr b="1" lang="ru-RU" sz="1600" spc="-1" strike="noStrike">
                 <a:solidFill>
                   <a:schemeClr val="dk1"/>
                 </a:solidFill>
                 <a:latin typeface="Calibri"/>
                 <a:ea typeface="DejaVu Sans"/>
               </a:rPr>
-              <a:t>Проведён анализ и выявлена проблема:</a:t>
-            </a:r>
-            <a:r>
-              <a:rPr b="0" lang="ru-RU" sz="2000" spc="-1" strike="noStrike">
+              <a:t>Проведён анализ теоретических основ  и выявлена проблема:</a:t>
+            </a:r>
+            <a:r>
+              <a:rPr b="0" lang="ru-RU" sz="1600" spc="-1" strike="noStrike">
                 <a:solidFill>
                   <a:schemeClr val="dk1"/>
                 </a:solidFill>
@@ -7873,11 +7925,11 @@
               </a:rPr>
               <a:t> Изучена деятельность ООО «Авангард», в результате чего детально исследован и описан (с помощью модели IDEF0) неэффективный процесс оценки надёжности поставщиков, требующий автоматизации. Были сформулированы функциональные требования к будущему решению.</a:t>
             </a:r>
-            <a:endParaRPr b="0" lang="ru-RU" sz="2000" spc="-1" strike="noStrike">
-              <a:solidFill>
-                <a:srgbClr val="000000"/>
-              </a:solidFill>
-              <a:latin typeface="Arial"/>
+            <a:endParaRPr b="0" lang="ru-RU" sz="1600" spc="-1" strike="noStrike">
+              <a:solidFill>
+                <a:srgbClr val="000000"/>
+              </a:solidFill>
+              <a:latin typeface="Calibri"/>
             </a:endParaRPr>
           </a:p>
           <a:p>
@@ -7898,30 +7950,30 @@
               <a:buAutoNum type="arabicPeriod"/>
             </a:pPr>
             <a:r>
-              <a:rPr b="1" lang="ru-RU" sz="2000" spc="-1" strike="noStrike">
+              <a:rPr b="1" lang="ru-RU" sz="1600" spc="-1" strike="noStrike">
                 <a:solidFill>
                   <a:schemeClr val="dk1"/>
                 </a:solidFill>
                 <a:latin typeface="Calibri"/>
                 <a:ea typeface="DejaVu Sans"/>
               </a:rPr>
-              <a:t>Обоснован и выбран метод решения:</a:t>
-            </a:r>
-            <a:r>
-              <a:rPr b="0" lang="ru-RU" sz="2000" spc="-1" strike="noStrike">
+              <a:t>Выполнен анализ деятельности и организационной структуры ООО «Авангард»:</a:t>
+            </a:r>
+            <a:r>
+              <a:rPr b="0" lang="ru-RU" sz="1600" spc="-1" strike="noStrike">
                 <a:solidFill>
                   <a:schemeClr val="dk1"/>
                 </a:solidFill>
                 <a:latin typeface="Calibri"/>
                 <a:ea typeface="DejaVu Sans"/>
               </a:rPr>
-              <a:t> На основе анализа рынка ПО было принято решение о целесообразности собственной разработки на платформе «1С:Предприятие 8.3».</a:t>
-            </a:r>
-            <a:endParaRPr b="0" lang="ru-RU" sz="2000" spc="-1" strike="noStrike">
-              <a:solidFill>
-                <a:srgbClr val="000000"/>
-              </a:solidFill>
-              <a:latin typeface="Arial"/>
+              <a:t> Анализ выявил ключевую проблему ― отсутствие формализованной методики и программного инструмента для объективной оценки поставщиков, что приводит к высоким временным затратам и субъективности решений.</a:t>
+            </a:r>
+            <a:endParaRPr b="0" lang="ru-RU" sz="1600" spc="-1" strike="noStrike">
+              <a:solidFill>
+                <a:srgbClr val="000000"/>
+              </a:solidFill>
+              <a:latin typeface="Calibri"/>
             </a:endParaRPr>
           </a:p>
           <a:p>
@@ -7942,7 +7994,7 @@
               <a:buAutoNum type="arabicPeriod"/>
             </a:pPr>
             <a:r>
-              <a:rPr b="1" lang="ru-RU" sz="2000" spc="-1" strike="noStrike">
+              <a:rPr b="1" lang="ru-RU" sz="1600" spc="-1" strike="noStrike">
                 <a:solidFill>
                   <a:schemeClr val="dk1"/>
                 </a:solidFill>
@@ -7952,7 +8004,7 @@
               <a:t>Разработана и информационная система:</a:t>
             </a:r>
             <a:r>
-              <a:rPr b="0" lang="ru-RU" sz="2000" spc="-1" strike="noStrike">
+              <a:rPr b="0" lang="ru-RU" sz="1600" spc="-1" strike="noStrike">
                 <a:solidFill>
                   <a:schemeClr val="dk1"/>
                 </a:solidFill>
@@ -7961,25 +8013,118 @@
               </a:rPr>
               <a:t> Спроектирована инфологическая модель, разработана архитектура, интерфейс и основные объекты системы. Готовое решение было отлажено и успешно протестировано, подтвердив свою стабильность.</a:t>
             </a:r>
-            <a:endParaRPr b="0" lang="ru-RU" sz="2000" spc="-1" strike="noStrike">
-              <a:solidFill>
-                <a:srgbClr val="000000"/>
-              </a:solidFill>
-              <a:latin typeface="Arial"/>
+            <a:endParaRPr b="0" lang="ru-RU" sz="1600" spc="-1" strike="noStrike">
+              <a:solidFill>
+                <a:srgbClr val="000000"/>
+              </a:solidFill>
+              <a:latin typeface="Calibri"/>
+            </a:endParaRPr>
+          </a:p>
+          <a:p>
+            <a:pPr marL="216000" indent="-216000" defTabSz="914400">
+              <a:lnSpc>
+                <a:spcPct val="100000"/>
+              </a:lnSpc>
+              <a:spcBef>
+                <a:spcPts val="1191"/>
+              </a:spcBef>
+              <a:spcAft>
+                <a:spcPts val="992"/>
+              </a:spcAft>
+              <a:buClr>
+                <a:srgbClr val="000000"/>
+              </a:buClr>
+              <a:buFont typeface="OpenSymbol"/>
+              <a:buAutoNum type="arabicPeriod"/>
+            </a:pPr>
+            <a:r>
+              <a:rPr b="1" lang="ru-RU" sz="1600" spc="-1" strike="noStrike">
+                <a:solidFill>
+                  <a:srgbClr val="000000"/>
+                </a:solidFill>
+                <a:latin typeface="Calibri"/>
+              </a:rPr>
+              <a:t> </a:t>
+            </a:r>
+            <a:r>
+              <a:rPr b="1" lang="ru-RU" sz="1600" spc="-1" strike="noStrike">
+                <a:solidFill>
+                  <a:srgbClr val="000000"/>
+                </a:solidFill>
+                <a:latin typeface="Calibri"/>
+              </a:rPr>
+              <a:t>Проведено тестирование и опытная эксплуатация разработанной информационной системы: </a:t>
+            </a:r>
+            <a:r>
+              <a:rPr b="0" lang="ru-RU" sz="1600" spc="-1" strike="noStrike">
+                <a:solidFill>
+                  <a:srgbClr val="000000"/>
+                </a:solidFill>
+                <a:latin typeface="Calibri"/>
+              </a:rPr>
+              <a:t>Ошибок в работе системы не обнаружено, что подтверждает стабильность и корректность функционирования разработанного модуля.</a:t>
+            </a:r>
+            <a:endParaRPr b="0" lang="ru-RU" sz="1600" spc="-1" strike="noStrike">
+              <a:solidFill>
+                <a:srgbClr val="000000"/>
+              </a:solidFill>
+              <a:latin typeface="Calibri"/>
+            </a:endParaRPr>
+          </a:p>
+          <a:p>
+            <a:pPr marL="216000" indent="-216000" defTabSz="914400">
+              <a:lnSpc>
+                <a:spcPct val="100000"/>
+              </a:lnSpc>
+              <a:spcBef>
+                <a:spcPts val="1191"/>
+              </a:spcBef>
+              <a:spcAft>
+                <a:spcPts val="992"/>
+              </a:spcAft>
+              <a:buClr>
+                <a:srgbClr val="000000"/>
+              </a:buClr>
+              <a:buFont typeface="OpenSymbol"/>
+              <a:buAutoNum type="arabicPeriod"/>
+            </a:pPr>
+            <a:r>
+              <a:rPr b="1" lang="ru-RU" sz="1600" spc="-1" strike="noStrike">
+                <a:solidFill>
+                  <a:srgbClr val="000000"/>
+                </a:solidFill>
+                <a:latin typeface="Calibri"/>
+              </a:rPr>
+              <a:t>Оценена экономическая эффективность внедрения разработанного проектного решения:</a:t>
+            </a:r>
+            <a:r>
+              <a:rPr b="0" lang="ru-RU" sz="1600" spc="-1" strike="noStrike">
+                <a:solidFill>
+                  <a:srgbClr val="000000"/>
+                </a:solidFill>
+                <a:latin typeface="Calibri"/>
+              </a:rPr>
+              <a:t> Расчетный срок окупаемости проекта составил 4 месяца, что подтверждает экономическую целесообразность и практическую значимость разработанной системы.</a:t>
+            </a:r>
+            <a:endParaRPr b="0" lang="ru-RU" sz="1600" spc="-1" strike="noStrike">
+              <a:solidFill>
+                <a:srgbClr val="000000"/>
+              </a:solidFill>
+              <a:latin typeface="Calibri"/>
             </a:endParaRPr>
           </a:p>
         </p:txBody>
       </p:sp>
       <p:sp>
         <p:nvSpPr>
-          <p:cNvPr id="151" name="TextBox 3"/>
+          <p:cNvPr id="158" name="TextBox 3"/>
           <p:cNvSpPr/>
           <p:nvPr/>
         </p:nvSpPr>
         <p:spPr>
           <a:xfrm>
             <a:off x="5948280" y="6308280"/>
-            <a:ext cx="587520" cy="577440"/>
+            <a:ext cx="587160" cy="577440"/>
           </a:xfrm>
           <a:prstGeom prst="rect">
             <a:avLst/>
@@ -8026,14 +8171,14 @@
       </p:sp>
       <p:sp>
         <p:nvSpPr>
-          <p:cNvPr id="152" name="TextBox 5"/>
+          <p:cNvPr id="159" name="TextBox 5"/>
           <p:cNvSpPr/>
           <p:nvPr/>
         </p:nvSpPr>
         <p:spPr>
           <a:xfrm>
             <a:off x="1868400" y="5918040"/>
-            <a:ext cx="8747640" cy="394560"/>
+            <a:ext cx="8747280" cy="394560"/>
           </a:xfrm>
           <a:prstGeom prst="rect">
             <a:avLst/>
@@ -8078,6 +8223,66 @@
           </a:p>
         </p:txBody>
       </p:sp>
+      <p:pic>
+        <p:nvPicPr>
+          <p:cNvPr id="160" name="Рисунок 36" descr=""/>
+          <p:cNvPicPr/>
+          <p:nvPr/>
+        </p:nvPicPr>
+        <p:blipFill>
+          <a:blip r:embed="rId1"/>
+          <a:stretch/>
+        </p:blipFill>
+        <p:spPr>
+          <a:xfrm>
+            <a:off x="11070720" y="-816120"/>
+            <a:ext cx="2241720" cy="2241720"/>
+          </a:xfrm>
+          <a:prstGeom prst="rect">
+            <a:avLst/>
+          </a:prstGeom>
+          <a:ln w="0">
+            <a:noFill/>
+          </a:ln>
+          <a:effectLst>
+            <a:outerShdw blurRad="50760" dir="2700000" dist="37674" rotWithShape="0">
+              <a:srgbClr val="000000">
+                <a:alpha val="40000"/>
+              </a:srgbClr>
+            </a:outerShdw>
+          </a:effectLst>
+        </p:spPr>
+      </p:pic>
+      <p:pic>
+        <p:nvPicPr>
+          <p:cNvPr id="161" name="Рисунок 37" descr=""/>
+          <p:cNvPicPr/>
+          <p:nvPr/>
+        </p:nvPicPr>
+        <p:blipFill>
+          <a:blip r:embed="rId2"/>
+          <a:stretch/>
+        </p:blipFill>
+        <p:spPr>
+          <a:xfrm>
+            <a:off x="-994680" y="5583240"/>
+            <a:ext cx="2241720" cy="2241720"/>
+          </a:xfrm>
+          <a:prstGeom prst="rect">
+            <a:avLst/>
+          </a:prstGeom>
+          <a:ln w="0">
+            <a:noFill/>
+          </a:ln>
+          <a:effectLst>
+            <a:outerShdw blurRad="50760" dir="8100000" dist="37674" rotWithShape="0">
+              <a:srgbClr val="000000">
+                <a:alpha val="40000"/>
+              </a:srgbClr>
+            </a:outerShdw>
+          </a:effectLst>
+        </p:spPr>
+      </p:pic>
     </p:spTree>
   </p:cSld>
   <mc:AlternateContent>
@@ -8110,7 +8315,7 @@
       </p:grpSpPr>
       <p:sp>
         <p:nvSpPr>
-          <p:cNvPr id="153" name="PlaceHolder 1"/>
+          <p:cNvPr id="162" name="PlaceHolder 1"/>
           <p:cNvSpPr>
             <a:spLocks noGrp="1"/>
           </p:cNvSpPr>
@@ -8120,8 +8325,8 @@
         </p:nvSpPr>
         <p:spPr>
           <a:xfrm>
-            <a:off x="2469240" y="2856240"/>
-            <a:ext cx="7252920" cy="1324800"/>
+            <a:off x="0" y="2455560"/>
+            <a:ext cx="12240000" cy="1144440"/>
           </a:xfrm>
           <a:prstGeom prst="rect">
             <a:avLst/>
@@ -8150,7 +8355,7 @@
                 <a:solidFill>
                   <a:schemeClr val="dk1"/>
                 </a:solidFill>
-                <a:latin typeface="Calibri Light"/>
+                <a:latin typeface="Calibri"/>
               </a:rPr>
               <a:t>Спасибо за внимание!</a:t>
             </a:r>
@@ -8158,21 +8363,21 @@
               <a:solidFill>
                 <a:srgbClr val="000000"/>
               </a:solidFill>
-              <a:latin typeface="Arial"/>
+              <a:latin typeface="Calibri"/>
             </a:endParaRPr>
           </a:p>
         </p:txBody>
       </p:sp>
       <p:sp>
         <p:nvSpPr>
-          <p:cNvPr id="154" name="TextBox 2"/>
+          <p:cNvPr id="163" name="TextBox 2"/>
           <p:cNvSpPr/>
           <p:nvPr/>
         </p:nvSpPr>
         <p:spPr>
           <a:xfrm>
             <a:off x="1371600" y="3519000"/>
-            <a:ext cx="183960" cy="368640"/>
+            <a:ext cx="183600" cy="368280"/>
           </a:xfrm>
           <a:prstGeom prst="rect">
             <a:avLst/>
@@ -8210,7 +8415,7 @@
       </p:sp>
       <p:pic>
         <p:nvPicPr>
-          <p:cNvPr id="155" name="Рисунок 8" descr=""/>
+          <p:cNvPr id="164" name="Рисунок 8" descr=""/>
           <p:cNvPicPr/>
           <p:nvPr/>
         </p:nvPicPr>
@@ -8227,7 +8432,7 @@
         <p:spPr>
           <a:xfrm>
             <a:off x="3124080" y="353880"/>
-            <a:ext cx="5942880" cy="1796760"/>
+            <a:ext cx="5942520" cy="1796400"/>
           </a:xfrm>
           <a:prstGeom prst="rect">
             <a:avLst/>
@@ -8237,6 +8442,227 @@
           </a:ln>
         </p:spPr>
       </p:pic>
+      <p:sp>
+        <p:nvSpPr>
+          <p:cNvPr id="165" name="PlaceHolder 4"/>
+          <p:cNvSpPr txBox="1"/>
+          <p:nvPr/>
+        </p:nvSpPr>
+        <p:spPr>
+          <a:xfrm>
+            <a:off x="987840" y="3318480"/>
+            <a:ext cx="10393920" cy="1854000"/>
+          </a:xfrm>
+          <a:prstGeom prst="rect">
+            <a:avLst/>
+          </a:prstGeom>
+          <a:noFill/>
+          <a:ln w="0">
+            <a:noFill/>
+          </a:ln>
+        </p:spPr>
+        <p:txBody>
+          <a:bodyPr anchor="b">
+            <a:noAutofit/>
+          </a:bodyPr>
+          <a:p>
+            <a:pPr algn="ctr" defTabSz="914400">
+              <a:lnSpc>
+                <a:spcPct val="90000"/>
+              </a:lnSpc>
+              <a:tabLst>
+                <a:tab algn="l" pos="0"/>
+              </a:tabLst>
+            </a:pPr>
+            <a:r>
+              <a:rPr b="1" lang="ru-RU" sz="2600" spc="-1" strike="noStrike">
+                <a:solidFill>
+                  <a:schemeClr val="dk1"/>
+                </a:solidFill>
+                <a:latin typeface="Calibri Light"/>
+                <a:ea typeface="Microsoft YaHei"/>
+              </a:rPr>
+              <a:t>Выпускная квалификационная работа </a:t>
+            </a:r>
+            <a:br>
+              <a:rPr sz="2600"/>
+            </a:br>
+            <a:r>
+              <a:rPr b="1" lang="ru-RU" sz="2600" spc="-1" strike="noStrike">
+                <a:solidFill>
+                  <a:srgbClr val="000000"/>
+                </a:solidFill>
+                <a:latin typeface="Calibri Light"/>
+                <a:ea typeface="Microsoft YaHei"/>
+              </a:rPr>
+              <a:t>на тему:</a:t>
+            </a:r>
+            <a:br>
+              <a:rPr sz="2600"/>
+            </a:br>
+            <a:r>
+              <a:rPr b="1" lang="ru-RU" sz="2600" spc="-1" strike="noStrike">
+                <a:solidFill>
+                  <a:schemeClr val="dk1"/>
+                </a:solidFill>
+                <a:latin typeface="Calibri Light"/>
+              </a:rPr>
+              <a:t> Информационная система комплексной оценки надежности поставщиков</a:t>
+            </a:r>
+            <a:endParaRPr b="0" lang="ru-RU" sz="2600" spc="-1" strike="noStrike">
+              <a:solidFill>
+                <a:srgbClr val="000000"/>
+              </a:solidFill>
+              <a:latin typeface="Arial"/>
+            </a:endParaRPr>
+          </a:p>
+        </p:txBody>
+      </p:sp>
+      <p:sp>
+        <p:nvSpPr>
+          <p:cNvPr id="166" name="PlaceHolder 5"/>
+          <p:cNvSpPr txBox="1"/>
+          <p:nvPr/>
+        </p:nvSpPr>
+        <p:spPr>
+          <a:xfrm>
+            <a:off x="6185160" y="5346000"/>
+            <a:ext cx="6005880" cy="1854000"/>
+          </a:xfrm>
+          <a:prstGeom prst="rect">
+            <a:avLst/>
+          </a:prstGeom>
+          <a:noFill/>
+          <a:ln w="0">
+            <a:noFill/>
+          </a:ln>
+        </p:spPr>
+        <p:txBody>
+          <a:bodyPr anchor="t">
+            <a:noAutofit/>
+          </a:bodyPr>
+          <a:p>
+            <a:pPr algn="r" defTabSz="914400">
+              <a:lnSpc>
+                <a:spcPct val="100000"/>
+              </a:lnSpc>
+              <a:tabLst>
+                <a:tab algn="l" pos="0"/>
+              </a:tabLst>
+            </a:pPr>
+            <a:r>
+              <a:rPr b="0" i="1" lang="ru-RU" sz="1600" spc="-1" strike="noStrike">
+                <a:solidFill>
+                  <a:schemeClr val="dk1"/>
+                </a:solidFill>
+                <a:latin typeface="Calibri"/>
+                <a:ea typeface="Times New Roman"/>
+              </a:rPr>
+              <a:t>Выполнил студент группы БВТ2204:</a:t>
+            </a:r>
+            <a:endParaRPr b="0" lang="ru-RU" sz="1600" spc="-1" strike="noStrike">
+              <a:solidFill>
+                <a:srgbClr val="000000"/>
+              </a:solidFill>
+              <a:latin typeface="Arial"/>
+            </a:endParaRPr>
+          </a:p>
+          <a:p>
+            <a:pPr algn="r" defTabSz="914400">
+              <a:lnSpc>
+                <a:spcPct val="100000"/>
+              </a:lnSpc>
+              <a:tabLst>
+                <a:tab algn="l" pos="0"/>
+              </a:tabLst>
+            </a:pPr>
+            <a:r>
+              <a:rPr b="0" i="1" lang="ru-RU" sz="1600" spc="-1" strike="noStrike">
+                <a:solidFill>
+                  <a:schemeClr val="dk1"/>
+                </a:solidFill>
+                <a:latin typeface="Calibri"/>
+                <a:ea typeface="Times New Roman"/>
+              </a:rPr>
+              <a:t>Альвицов Д.С.</a:t>
+            </a:r>
+            <a:endParaRPr b="0" lang="ru-RU" sz="1600" spc="-1" strike="noStrike">
+              <a:solidFill>
+                <a:srgbClr val="000000"/>
+              </a:solidFill>
+              <a:latin typeface="Arial"/>
+            </a:endParaRPr>
+          </a:p>
+          <a:p>
+            <a:pPr algn="r" defTabSz="914400">
+              <a:lnSpc>
+                <a:spcPct val="100000"/>
+              </a:lnSpc>
+              <a:tabLst>
+                <a:tab algn="l" pos="0"/>
+              </a:tabLst>
+            </a:pPr>
+            <a:endParaRPr b="0" lang="ru-RU" sz="1600" spc="-1" strike="noStrike">
+              <a:solidFill>
+                <a:srgbClr val="000000"/>
+              </a:solidFill>
+              <a:latin typeface="Arial"/>
+            </a:endParaRPr>
+          </a:p>
+          <a:p>
+            <a:pPr algn="r" defTabSz="914400">
+              <a:lnSpc>
+                <a:spcPct val="100000"/>
+              </a:lnSpc>
+              <a:tabLst>
+                <a:tab algn="l" pos="0"/>
+              </a:tabLst>
+            </a:pPr>
+            <a:r>
+              <a:rPr b="0" i="1" lang="ru-RU" sz="1600" spc="-1" strike="noStrike">
+                <a:solidFill>
+                  <a:schemeClr val="dk1"/>
+                </a:solidFill>
+                <a:latin typeface="Calibri"/>
+                <a:ea typeface="Times New Roman"/>
+              </a:rPr>
+              <a:t>Научный руководитель:</a:t>
+            </a:r>
+            <a:endParaRPr b="0" lang="ru-RU" sz="1600" spc="-1" strike="noStrike">
+              <a:solidFill>
+                <a:srgbClr val="000000"/>
+              </a:solidFill>
+              <a:latin typeface="Arial"/>
+            </a:endParaRPr>
+          </a:p>
+          <a:p>
+            <a:pPr algn="r" defTabSz="914400">
+              <a:lnSpc>
+                <a:spcPct val="100000"/>
+              </a:lnSpc>
+              <a:tabLst>
+                <a:tab algn="l" pos="0"/>
+              </a:tabLst>
+            </a:pPr>
+            <a:r>
+              <a:rPr b="0" i="1" lang="ru-RU" sz="1600" spc="-1" strike="noStrike">
+                <a:solidFill>
+                  <a:schemeClr val="dk1"/>
+                </a:solidFill>
+                <a:latin typeface="Calibri"/>
+                <a:ea typeface="Times New Roman"/>
+              </a:rPr>
+              <a:t>к.э.н., доцент кафедры КИС Андреев И.А.</a:t>
+            </a:r>
+            <a:endParaRPr b="0" lang="ru-RU" sz="1600" spc="-1" strike="noStrike">
+              <a:solidFill>
+                <a:srgbClr val="000000"/>
+              </a:solidFill>
+              <a:latin typeface="Arial"/>
+            </a:endParaRPr>
+          </a:p>
+        </p:txBody>
+      </p:sp>
     </p:spTree>
   </p:cSld>
   <mc:AlternateContent>
@@ -8280,7 +8706,7 @@
         <p:spPr>
           <a:xfrm>
             <a:off x="3295080" y="255960"/>
-            <a:ext cx="6079320" cy="531360"/>
+            <a:ext cx="6078960" cy="531000"/>
           </a:xfrm>
           <a:prstGeom prst="rect">
             <a:avLst/>
@@ -8295,7 +8721,7 @@
             <a:normAutofit/>
           </a:bodyPr>
           <a:p>
-            <a:pPr indent="0" defTabSz="914400">
+            <a:pPr indent="0" algn="ctr" defTabSz="914400">
               <a:lnSpc>
                 <a:spcPct val="90000"/>
               </a:lnSpc>
@@ -8309,7 +8735,7 @@
                 <a:solidFill>
                   <a:schemeClr val="dk1"/>
                 </a:solidFill>
-                <a:latin typeface="Calibri Light"/>
+                <a:latin typeface="Calibri"/>
               </a:rPr>
               <a:t>Актуальность выбранной темы</a:t>
             </a:r>
@@ -8317,7 +8743,7 @@
               <a:solidFill>
                 <a:srgbClr val="000000"/>
               </a:solidFill>
-              <a:latin typeface="Arial"/>
+              <a:latin typeface="Calibri"/>
             </a:endParaRPr>
           </a:p>
         </p:txBody>
@@ -8335,7 +8761,7 @@
         <p:spPr>
           <a:xfrm>
             <a:off x="635040" y="820800"/>
-            <a:ext cx="10920960" cy="1276200"/>
+            <a:ext cx="11244960" cy="1699200"/>
           </a:xfrm>
           <a:prstGeom prst="rect">
             <a:avLst/>
@@ -8350,17 +8776,8 @@
             <a:normAutofit fontScale="19444"/>
           </a:bodyPr>
           <a:p>
-            <a:pPr indent="0" defTabSz="914400">
-              <a:lnSpc>
-                <a:spcPct val="120000"/>
-              </a:lnSpc>
-              <a:spcBef>
-                <a:spcPts val="1001"/>
-              </a:spcBef>
+            <a:pPr indent="0">
               <a:buNone/>
-              <a:tabLst>
-                <a:tab algn="l" pos="0"/>
-              </a:tabLst>
             </a:pPr>
             <a:r>
               <a:rPr b="0" lang="ru-RU" sz="8000" spc="-1" strike="noStrike">
@@ -8368,43 +8785,16 @@
                   <a:schemeClr val="dk1"/>
                 </a:solidFill>
                 <a:latin typeface="Calibri"/>
-              </a:rPr>
-              <a:t>	</a:t>
-            </a:r>
-            <a:r>
-              <a:rPr b="0" lang="ru-RU" sz="8000" spc="-1" strike="noStrike">
-                <a:solidFill>
-                  <a:schemeClr val="dk1"/>
-                </a:solidFill>
-                <a:latin typeface="Calibri"/>
-              </a:rPr>
-              <a:t>Мультимедийные информационные системы – это комплекс программных и аппаратных средств, предназначенный для сбора, обработки, хранения, передачи и воспроизведения разнообразной информации в мультимедийном формате. На кафедре сетевые информационные технологии и сервисы (СИТиС) в аудиториях Л207 иЛ211 проводятся занятия по курсу «Мультимедийные информационные системы». </a:t>
+                <a:ea typeface="Times New Roman"/>
+              </a:rPr>
+              <a:t>Актуальность темы исследования обусловлена критической важностью выбора надежных поставщиков для обеспечения бесперебойной деятельности торговых предприятий в условиях современной рыночной нестабильности. Основная проблема заключается в противоречии между необходимостью быстрого принятия решений о закупках и трудоемкостью традиционных методов сбора и верификации информации о контрагентах, которая часто разрозненна и труднодоступна. . В связи с этим разработка программного модуля на основе интеллектуального анализа данных, позволяющего оперативно и объективно оценивать благонадежность поставщиков, является своевременным и практически значимым решением.</a:t>
             </a:r>
             <a:endParaRPr b="0" lang="ru-RU" sz="8000" spc="-1" strike="noStrike">
               <a:solidFill>
                 <a:srgbClr val="000000"/>
               </a:solidFill>
               <a:latin typeface="Arial"/>
-            </a:endParaRPr>
-          </a:p>
-          <a:p>
-            <a:pPr indent="0" algn="just" defTabSz="914400">
-              <a:lnSpc>
-                <a:spcPct val="90000"/>
-              </a:lnSpc>
-              <a:spcBef>
-                <a:spcPts val="1001"/>
-              </a:spcBef>
-              <a:buNone/>
-              <a:tabLst>
-                <a:tab algn="l" pos="0"/>
-              </a:tabLst>
-            </a:pPr>
-            <a:endParaRPr b="0" lang="ru-RU" sz="2400" spc="-1" strike="noStrike">
-              <a:solidFill>
-                <a:srgbClr val="000000"/>
-              </a:solidFill>
-              <a:latin typeface="Arial"/>
+              <a:ea typeface="Times New Roman"/>
             </a:endParaRPr>
           </a:p>
         </p:txBody>
@@ -8418,7 +8808,7 @@
         <p:spPr>
           <a:xfrm>
             <a:off x="5947920" y="6308280"/>
-            <a:ext cx="383400" cy="577440"/>
+            <a:ext cx="383040" cy="577440"/>
           </a:xfrm>
           <a:prstGeom prst="rect">
             <a:avLst/>
@@ -8472,7 +8862,7 @@
         <p:spPr>
           <a:xfrm>
             <a:off x="4656960" y="2533320"/>
-            <a:ext cx="2877480" cy="531360"/>
+            <a:ext cx="2877120" cy="531000"/>
           </a:xfrm>
           <a:prstGeom prst="rect">
             <a:avLst/>
@@ -8503,7 +8893,7 @@
                 <a:solidFill>
                   <a:schemeClr val="dk1"/>
                 </a:solidFill>
-                <a:latin typeface="Calibri Light"/>
+                <a:latin typeface="Calibri"/>
                 <a:ea typeface="DejaVu Sans"/>
               </a:rPr>
               <a:t>Цель работы</a:t>
@@ -8512,7 +8902,7 @@
               <a:solidFill>
                 <a:srgbClr val="000000"/>
               </a:solidFill>
-              <a:latin typeface="Arial"/>
+              <a:latin typeface="Calibri"/>
             </a:endParaRPr>
           </a:p>
         </p:txBody>
@@ -8526,7 +8916,7 @@
         <p:spPr>
           <a:xfrm>
             <a:off x="1513800" y="2600280"/>
-            <a:ext cx="9766080" cy="1741680"/>
+            <a:ext cx="9765720" cy="1741320"/>
           </a:xfrm>
           <a:prstGeom prst="rect">
             <a:avLst/>
@@ -8571,7 +8961,7 @@
         <p:spPr>
           <a:xfrm>
             <a:off x="5308560" y="3819240"/>
-            <a:ext cx="1574280" cy="531360"/>
+            <a:ext cx="1573920" cy="531000"/>
           </a:xfrm>
           <a:prstGeom prst="rect">
             <a:avLst/>
@@ -8602,7 +8992,7 @@
                 <a:solidFill>
                   <a:schemeClr val="dk1"/>
                 </a:solidFill>
-                <a:latin typeface="Calibri Light"/>
+                <a:latin typeface="Calibri"/>
                 <a:ea typeface="DejaVu Sans"/>
               </a:rPr>
               <a:t>Задачи</a:t>
@@ -8611,7 +9001,7 @@
               <a:solidFill>
                 <a:srgbClr val="000000"/>
               </a:solidFill>
-              <a:latin typeface="Arial"/>
+              <a:latin typeface="Calibri"/>
             </a:endParaRPr>
           </a:p>
         </p:txBody>
@@ -8625,7 +9015,7 @@
         <p:spPr>
           <a:xfrm>
             <a:off x="635040" y="4508640"/>
-            <a:ext cx="11094120" cy="2304000"/>
+            <a:ext cx="11093760" cy="2303640"/>
           </a:xfrm>
           <a:prstGeom prst="rect">
             <a:avLst/>
@@ -8878,7 +9268,7 @@
         <p:spPr>
           <a:xfrm>
             <a:off x="635040" y="3117600"/>
-            <a:ext cx="11320200" cy="699480"/>
+            <a:ext cx="11319840" cy="699480"/>
           </a:xfrm>
           <a:prstGeom prst="rect">
             <a:avLst/>
@@ -8912,7 +9302,7 @@
                 <a:latin typeface="Calibri"/>
                 <a:ea typeface="DejaVu Sans"/>
               </a:rPr>
-              <a:t>разработка информационной системы оценки благонадежности поставщика товаров </a:t>
+              <a:t>Разработка информационной системы оценки благонадежности поставщика товаров </a:t>
             </a:r>
             <a:r>
               <a:rPr b="0" lang="ru-RU" sz="2000" spc="-1" strike="noStrike">
@@ -8953,6 +9343,66 @@
           </a:p>
         </p:txBody>
       </p:sp>
+      <p:pic>
+        <p:nvPicPr>
+          <p:cNvPr id="55" name="Рисунок 9" descr=""/>
+          <p:cNvPicPr/>
+          <p:nvPr/>
+        </p:nvPicPr>
+        <p:blipFill>
+          <a:blip r:embed="rId1"/>
+          <a:stretch/>
+        </p:blipFill>
+        <p:spPr>
+          <a:xfrm>
+            <a:off x="11070720" y="-816120"/>
+            <a:ext cx="2241720" cy="2241720"/>
+          </a:xfrm>
+          <a:prstGeom prst="rect">
+            <a:avLst/>
+          </a:prstGeom>
+          <a:ln w="0">
+            <a:noFill/>
+          </a:ln>
+          <a:effectLst>
+            <a:outerShdw blurRad="50760" dir="2700000" dist="37674" rotWithShape="0">
+              <a:srgbClr val="000000">
+                <a:alpha val="40000"/>
+              </a:srgbClr>
+            </a:outerShdw>
+          </a:effectLst>
+        </p:spPr>
+      </p:pic>
+      <p:pic>
+        <p:nvPicPr>
+          <p:cNvPr id="56" name="Рисунок 10" descr=""/>
+          <p:cNvPicPr/>
+          <p:nvPr/>
+        </p:nvPicPr>
+        <p:blipFill>
+          <a:blip r:embed="rId2"/>
+          <a:stretch/>
+        </p:blipFill>
+        <p:spPr>
+          <a:xfrm>
+            <a:off x="-994680" y="5583240"/>
+            <a:ext cx="2241720" cy="2241720"/>
+          </a:xfrm>
+          <a:prstGeom prst="rect">
+            <a:avLst/>
+          </a:prstGeom>
+          <a:ln w="0">
+            <a:noFill/>
+          </a:ln>
+          <a:effectLst>
+            <a:outerShdw blurRad="50760" dir="8100000" dist="37674" rotWithShape="0">
+              <a:srgbClr val="000000">
+                <a:alpha val="40000"/>
+              </a:srgbClr>
+            </a:outerShdw>
+          </a:effectLst>
+        </p:spPr>
+      </p:pic>
     </p:spTree>
   </p:cSld>
   <mc:AlternateContent>
@@ -8985,7 +9435,7 @@
       </p:grpSpPr>
       <p:sp>
         <p:nvSpPr>
-          <p:cNvPr id="55" name="PlaceHolder 1"/>
+          <p:cNvPr id="57" name="PlaceHolder 1"/>
           <p:cNvSpPr>
             <a:spLocks noGrp="1"/>
           </p:cNvSpPr>
@@ -8996,7 +9446,7 @@
         <p:spPr>
           <a:xfrm>
             <a:off x="4056120" y="136440"/>
-            <a:ext cx="4078800" cy="531360"/>
+            <a:ext cx="4078440" cy="531000"/>
           </a:xfrm>
           <a:prstGeom prst="rect">
             <a:avLst/>
@@ -9025,7 +9475,7 @@
                 <a:solidFill>
                   <a:schemeClr val="dk1"/>
                 </a:solidFill>
-                <a:latin typeface="Calibri Light"/>
+                <a:latin typeface="Calibri"/>
               </a:rPr>
               <a:t>Постановка задачи</a:t>
             </a:r>
@@ -9033,14 +9483,14 @@
               <a:solidFill>
                 <a:srgbClr val="000000"/>
               </a:solidFill>
-              <a:latin typeface="Arial"/>
+              <a:latin typeface="Calibri"/>
             </a:endParaRPr>
           </a:p>
         </p:txBody>
       </p:sp>
       <p:sp>
         <p:nvSpPr>
-          <p:cNvPr id="56" name="PlaceHolder 2"/>
+          <p:cNvPr id="58" name="PlaceHolder 2"/>
           <p:cNvSpPr>
             <a:spLocks noGrp="1"/>
           </p:cNvSpPr>
@@ -9051,7 +9501,7 @@
         <p:spPr>
           <a:xfrm>
             <a:off x="0" y="668520"/>
-            <a:ext cx="12191400" cy="1060200"/>
+            <a:ext cx="12191040" cy="1059840"/>
           </a:xfrm>
           <a:prstGeom prst="rect">
             <a:avLst/>
@@ -9126,14 +9576,14 @@
       </p:sp>
       <p:sp>
         <p:nvSpPr>
-          <p:cNvPr id="57" name="TextBox 5"/>
+          <p:cNvPr id="59" name="TextBox 5"/>
           <p:cNvSpPr/>
           <p:nvPr/>
         </p:nvSpPr>
         <p:spPr>
           <a:xfrm>
             <a:off x="5947920" y="6308280"/>
-            <a:ext cx="383400" cy="577440"/>
+            <a:ext cx="383040" cy="577440"/>
           </a:xfrm>
           <a:prstGeom prst="rect">
             <a:avLst/>
@@ -9180,14 +9630,14 @@
       </p:sp>
       <p:sp>
         <p:nvSpPr>
-          <p:cNvPr id="58" name="Заголовок 1"/>
+          <p:cNvPr id="60" name="Заголовок 1"/>
           <p:cNvSpPr/>
           <p:nvPr/>
         </p:nvSpPr>
         <p:spPr>
           <a:xfrm>
             <a:off x="4843800" y="1729440"/>
-            <a:ext cx="2739960" cy="531360"/>
+            <a:ext cx="2739600" cy="531000"/>
           </a:xfrm>
           <a:prstGeom prst="rect">
             <a:avLst/>
@@ -9218,7 +9668,7 @@
                 <a:solidFill>
                   <a:schemeClr val="dk1"/>
                 </a:solidFill>
-                <a:latin typeface="Calibri Light"/>
+                <a:latin typeface="Calibri"/>
                 <a:ea typeface="DejaVu Sans"/>
               </a:rPr>
               <a:t>Требования</a:t>
@@ -9234,14 +9684,14 @@
       </p:sp>
       <p:sp>
         <p:nvSpPr>
-          <p:cNvPr id="59" name="Объект 2"/>
+          <p:cNvPr id="61" name="Объект 2"/>
           <p:cNvSpPr/>
           <p:nvPr/>
         </p:nvSpPr>
         <p:spPr>
           <a:xfrm>
             <a:off x="424080" y="2395080"/>
-            <a:ext cx="6241680" cy="3821400"/>
+            <a:ext cx="6241320" cy="3821040"/>
           </a:xfrm>
           <a:prstGeom prst="rect">
             <a:avLst/>
@@ -9522,14 +9972,14 @@
       </p:sp>
       <p:sp>
         <p:nvSpPr>
-          <p:cNvPr id="60" name="Объект 2"/>
+          <p:cNvPr id="62" name="Объект 2"/>
           <p:cNvSpPr/>
           <p:nvPr/>
         </p:nvSpPr>
         <p:spPr>
           <a:xfrm>
             <a:off x="6849360" y="2399400"/>
-            <a:ext cx="4917960" cy="3821400"/>
+            <a:ext cx="4917600" cy="3821040"/>
           </a:xfrm>
           <a:prstGeom prst="rect">
             <a:avLst/>
@@ -9720,6 +10170,66 @@
           </a:p>
         </p:txBody>
       </p:sp>
+      <p:pic>
+        <p:nvPicPr>
+          <p:cNvPr id="63" name="Рисунок 6" descr=""/>
+          <p:cNvPicPr/>
+          <p:nvPr/>
+        </p:nvPicPr>
+        <p:blipFill>
+          <a:blip r:embed="rId1"/>
+          <a:stretch/>
+        </p:blipFill>
+        <p:spPr>
+          <a:xfrm>
+            <a:off x="11070720" y="-816120"/>
+            <a:ext cx="2241720" cy="2241720"/>
+          </a:xfrm>
+          <a:prstGeom prst="rect">
+            <a:avLst/>
+          </a:prstGeom>
+          <a:ln w="0">
+            <a:noFill/>
+          </a:ln>
+          <a:effectLst>
+            <a:outerShdw blurRad="50760" dir="2700000" dist="37674" rotWithShape="0">
+              <a:srgbClr val="000000">
+                <a:alpha val="40000"/>
+              </a:srgbClr>
+            </a:outerShdw>
+          </a:effectLst>
+        </p:spPr>
+      </p:pic>
+      <p:pic>
+        <p:nvPicPr>
+          <p:cNvPr id="64" name="Рисунок 7" descr=""/>
+          <p:cNvPicPr/>
+          <p:nvPr/>
+        </p:nvPicPr>
+        <p:blipFill>
+          <a:blip r:embed="rId2"/>
+          <a:stretch/>
+        </p:blipFill>
+        <p:spPr>
+          <a:xfrm>
+            <a:off x="-994680" y="5583240"/>
+            <a:ext cx="2241720" cy="2241720"/>
+          </a:xfrm>
+          <a:prstGeom prst="rect">
+            <a:avLst/>
+          </a:prstGeom>
+          <a:ln w="0">
+            <a:noFill/>
+          </a:ln>
+          <a:effectLst>
+            <a:outerShdw blurRad="50760" dir="8100000" dist="37674" rotWithShape="0">
+              <a:srgbClr val="000000">
+                <a:alpha val="40000"/>
+              </a:srgbClr>
+            </a:outerShdw>
+          </a:effectLst>
+        </p:spPr>
+      </p:pic>
     </p:spTree>
   </p:cSld>
   <mc:AlternateContent>
@@ -9752,7 +10262,7 @@
       </p:grpSpPr>
       <p:sp>
         <p:nvSpPr>
-          <p:cNvPr id="61" name="PlaceHolder 1"/>
+          <p:cNvPr id="65" name="PlaceHolder 1"/>
           <p:cNvSpPr>
             <a:spLocks noGrp="1"/>
           </p:cNvSpPr>
@@ -9763,7 +10273,7 @@
         <p:spPr>
           <a:xfrm>
             <a:off x="1080000" y="307080"/>
-            <a:ext cx="9719640" cy="718920"/>
+            <a:ext cx="9719280" cy="718560"/>
           </a:xfrm>
           <a:prstGeom prst="rect">
             <a:avLst/>
@@ -9795,7 +10305,7 @@
                     <a:lumOff val="15000"/>
                   </a:schemeClr>
                 </a:solidFill>
-                <a:latin typeface="Calibri Light"/>
+                <a:latin typeface="Calibri"/>
               </a:rPr>
               <a:t>Описание и анализ бизнес процесса закупки товаров</a:t>
             </a:r>
@@ -9803,14 +10313,14 @@
               <a:solidFill>
                 <a:srgbClr val="000000"/>
               </a:solidFill>
-              <a:latin typeface="Arial"/>
+              <a:latin typeface="Calibri"/>
             </a:endParaRPr>
           </a:p>
         </p:txBody>
       </p:sp>
       <p:pic>
         <p:nvPicPr>
-          <p:cNvPr id="62" name="Рисунок 1" descr=""/>
+          <p:cNvPr id="66" name="Рисунок 1" descr=""/>
           <p:cNvPicPr/>
           <p:nvPr/>
         </p:nvPicPr>
@@ -9821,7 +10331,7 @@
         <p:spPr>
           <a:xfrm>
             <a:off x="11070720" y="-843120"/>
-            <a:ext cx="2242080" cy="2242080"/>
+            <a:ext cx="2241720" cy="2241720"/>
           </a:xfrm>
           <a:prstGeom prst="rect">
             <a:avLst/>
@@ -9840,7 +10350,7 @@
       </p:pic>
       <p:pic>
         <p:nvPicPr>
-          <p:cNvPr id="63" name="Рисунок 2" descr=""/>
+          <p:cNvPr id="67" name="Рисунок 2" descr=""/>
           <p:cNvPicPr/>
           <p:nvPr/>
         </p:nvPicPr>
@@ -9851,7 +10361,7 @@
         <p:spPr>
           <a:xfrm>
             <a:off x="-994680" y="5556240"/>
-            <a:ext cx="2242080" cy="2242080"/>
+            <a:ext cx="2241720" cy="2241720"/>
           </a:xfrm>
           <a:prstGeom prst="rect">
             <a:avLst/>
@@ -9870,14 +10380,14 @@
       </p:pic>
       <p:sp>
         <p:nvSpPr>
-          <p:cNvPr id="64" name="TextBox 1"/>
+          <p:cNvPr id="68" name="TextBox 1"/>
           <p:cNvSpPr/>
           <p:nvPr/>
         </p:nvSpPr>
         <p:spPr>
           <a:xfrm>
             <a:off x="5947920" y="6308280"/>
-            <a:ext cx="383400" cy="577440"/>
+            <a:ext cx="383040" cy="577440"/>
           </a:xfrm>
           <a:prstGeom prst="rect">
             <a:avLst/>
@@ -9924,7 +10434,7 @@
       </p:sp>
       <p:pic>
         <p:nvPicPr>
-          <p:cNvPr id="65" name="" descr=""/>
+          <p:cNvPr id="69" name="" descr=""/>
           <p:cNvPicPr/>
           <p:nvPr/>
         </p:nvPicPr>
@@ -9935,7 +10445,7 @@
         <p:spPr>
           <a:xfrm>
             <a:off x="720000" y="1620000"/>
-            <a:ext cx="5314320" cy="3713400"/>
+            <a:ext cx="5313960" cy="3713040"/>
           </a:xfrm>
           <a:prstGeom prst="rect">
             <a:avLst/>
@@ -9947,7 +10457,7 @@
       </p:pic>
       <p:pic>
         <p:nvPicPr>
-          <p:cNvPr id="66" name="" descr=""/>
+          <p:cNvPr id="70" name="" descr=""/>
           <p:cNvPicPr/>
           <p:nvPr/>
         </p:nvPicPr>
@@ -9958,7 +10468,7 @@
         <p:spPr>
           <a:xfrm>
             <a:off x="6278040" y="1620000"/>
-            <a:ext cx="5241960" cy="3670200"/>
+            <a:ext cx="5241600" cy="3669840"/>
           </a:xfrm>
           <a:prstGeom prst="rect">
             <a:avLst/>
@@ -10000,7 +10510,7 @@
       </p:grpSpPr>
       <p:sp>
         <p:nvSpPr>
-          <p:cNvPr id="67" name="PlaceHolder 1"/>
+          <p:cNvPr id="71" name="PlaceHolder 1"/>
           <p:cNvSpPr>
             <a:spLocks noGrp="1"/>
           </p:cNvSpPr>
@@ -10011,7 +10521,7 @@
         <p:spPr>
           <a:xfrm>
             <a:off x="540000" y="180360"/>
-            <a:ext cx="11519640" cy="1324800"/>
+            <a:ext cx="11519280" cy="1324440"/>
           </a:xfrm>
           <a:prstGeom prst="rect">
             <a:avLst/>
@@ -10043,7 +10553,7 @@
                     <a:lumOff val="15000"/>
                   </a:schemeClr>
                 </a:solidFill>
-                <a:latin typeface="Calibri Light"/>
+                <a:latin typeface="Calibri"/>
               </a:rPr>
               <a:t>Декомпозиция блока А2 </a:t>
             </a:r>
@@ -10058,7 +10568,7 @@
                     <a:lumOff val="15000"/>
                   </a:schemeClr>
                 </a:solidFill>
-                <a:latin typeface="Calibri Light"/>
+                <a:latin typeface="Calibri"/>
               </a:rPr>
               <a:t>«Выбор поставщика»</a:t>
             </a:r>
@@ -10066,81 +10576,21 @@
               <a:solidFill>
                 <a:srgbClr val="000000"/>
               </a:solidFill>
-              <a:latin typeface="Arial"/>
+              <a:latin typeface="Calibri"/>
             </a:endParaRPr>
           </a:p>
         </p:txBody>
       </p:sp>
-      <p:pic>
-        <p:nvPicPr>
-          <p:cNvPr id="68" name="Рисунок 3" descr=""/>
-          <p:cNvPicPr/>
-          <p:nvPr/>
-        </p:nvPicPr>
-        <p:blipFill>
-          <a:blip r:embed="rId1"/>
-          <a:stretch/>
-        </p:blipFill>
-        <p:spPr>
-          <a:xfrm>
-            <a:off x="10710360" y="19440"/>
-            <a:ext cx="2242080" cy="2242080"/>
-          </a:xfrm>
-          <a:prstGeom prst="rect">
-            <a:avLst/>
-          </a:prstGeom>
-          <a:ln w="0">
-            <a:noFill/>
-          </a:ln>
-          <a:effectLst>
-            <a:outerShdw blurRad="50760" dir="18900000" dist="37674" rotWithShape="0">
-              <a:srgbClr val="000000">
-                <a:alpha val="40000"/>
-              </a:srgbClr>
-            </a:outerShdw>
-          </a:effectLst>
-        </p:spPr>
-      </p:pic>
-      <p:pic>
-        <p:nvPicPr>
-          <p:cNvPr id="69" name="Рисунок 4" descr=""/>
-          <p:cNvPicPr/>
-          <p:nvPr/>
-        </p:nvPicPr>
-        <p:blipFill>
-          <a:blip r:embed="rId2"/>
-          <a:stretch/>
-        </p:blipFill>
-        <p:spPr>
-          <a:xfrm>
-            <a:off x="-1605600" y="2880000"/>
-            <a:ext cx="2242080" cy="2242080"/>
-          </a:xfrm>
-          <a:prstGeom prst="rect">
-            <a:avLst/>
-          </a:prstGeom>
-          <a:ln w="0">
-            <a:noFill/>
-          </a:ln>
-          <a:effectLst>
-            <a:outerShdw blurRad="50760" dir="10800000" dist="38160" rotWithShape="0">
-              <a:srgbClr val="000000">
-                <a:alpha val="40000"/>
-              </a:srgbClr>
-            </a:outerShdw>
-          </a:effectLst>
-        </p:spPr>
-      </p:pic>
       <p:sp>
         <p:nvSpPr>
-          <p:cNvPr id="70" name="TextBox 2"/>
+          <p:cNvPr id="72" name="TextBox 2"/>
           <p:cNvSpPr/>
           <p:nvPr/>
         </p:nvSpPr>
         <p:spPr>
           <a:xfrm>
             <a:off x="5947920" y="6308280"/>
-            <a:ext cx="383400" cy="577440"/>
+            <a:ext cx="383040" cy="577440"/>
           </a:xfrm>
           <a:prstGeom prst="rect">
             <a:avLst/>
@@ -10187,7 +10637,60 @@
       </p:sp>
       <p:pic>
         <p:nvPicPr>
-          <p:cNvPr id="71" name="" descr=""/>
+          <p:cNvPr id="73" name="" descr=""/>
+          <p:cNvPicPr/>
+          <p:nvPr/>
+        </p:nvPicPr>
+        <p:blipFill>
+          <a:blip r:embed="rId1"/>
+          <a:stretch/>
+        </p:blipFill>
+        <p:spPr>
+          <a:xfrm>
+            <a:off x="3242880" y="1786680"/>
+            <a:ext cx="6476760" cy="4512960"/>
+          </a:xfrm>
+          <a:prstGeom prst="rect">
+            <a:avLst/>
+          </a:prstGeom>
+          <a:ln w="0">
+            <a:noFill/>
+          </a:ln>
+        </p:spPr>
+      </p:pic>
+      <p:pic>
+        <p:nvPicPr>
+          <p:cNvPr id="74" name="Рисунок 11" descr=""/>
+          <p:cNvPicPr/>
+          <p:nvPr/>
+        </p:nvPicPr>
+        <p:blipFill>
+          <a:blip r:embed="rId2"/>
+          <a:stretch/>
+        </p:blipFill>
+        <p:spPr>
+          <a:xfrm>
+            <a:off x="11070720" y="-816120"/>
+            <a:ext cx="2241720" cy="2241720"/>
+          </a:xfrm>
+          <a:prstGeom prst="rect">
+            <a:avLst/>
+          </a:prstGeom>
+          <a:ln w="0">
+            <a:noFill/>
+          </a:ln>
+          <a:effectLst>
+            <a:outerShdw blurRad="50760" dir="2700000" dist="37674" rotWithShape="0">
+              <a:srgbClr val="000000">
+                <a:alpha val="40000"/>
+              </a:srgbClr>
+            </a:outerShdw>
+          </a:effectLst>
+        </p:spPr>
+      </p:pic>
+      <p:pic>
+        <p:nvPicPr>
+          <p:cNvPr id="75" name="Рисунок 12" descr=""/>
           <p:cNvPicPr/>
           <p:nvPr/>
         </p:nvPicPr>
@@ -10197,15 +10700,22 @@
         </p:blipFill>
         <p:spPr>
           <a:xfrm>
-            <a:off x="3242880" y="1786680"/>
-            <a:ext cx="6477120" cy="4513320"/>
-          </a:xfrm>
-          <a:prstGeom prst="rect">
-            <a:avLst/>
-          </a:prstGeom>
-          <a:ln w="0">
-            <a:noFill/>
-          </a:ln>
+            <a:off x="-994680" y="5583240"/>
+            <a:ext cx="2241720" cy="2241720"/>
+          </a:xfrm>
+          <a:prstGeom prst="rect">
+            <a:avLst/>
+          </a:prstGeom>
+          <a:ln w="0">
+            <a:noFill/>
+          </a:ln>
+          <a:effectLst>
+            <a:outerShdw blurRad="50760" dir="8100000" dist="37674" rotWithShape="0">
+              <a:srgbClr val="000000">
+                <a:alpha val="40000"/>
+              </a:srgbClr>
+            </a:outerShdw>
+          </a:effectLst>
         </p:spPr>
       </p:pic>
     </p:spTree>
@@ -10240,7 +10750,7 @@
       </p:grpSpPr>
       <p:sp>
         <p:nvSpPr>
-          <p:cNvPr id="72" name="PlaceHolder 1"/>
+          <p:cNvPr id="76" name="PlaceHolder 1"/>
           <p:cNvSpPr>
             <a:spLocks noGrp="1"/>
           </p:cNvSpPr>
@@ -10251,7 +10761,7 @@
         <p:spPr>
           <a:xfrm>
             <a:off x="342360" y="369360"/>
-            <a:ext cx="11504880" cy="755640"/>
+            <a:ext cx="11504520" cy="755280"/>
           </a:xfrm>
           <a:prstGeom prst="rect">
             <a:avLst/>
@@ -10283,7 +10793,7 @@
                     <a:lumOff val="15000"/>
                   </a:schemeClr>
                 </a:solidFill>
-                <a:latin typeface="Calibri Light"/>
+                <a:latin typeface="Calibri"/>
               </a:rPr>
               <a:t>Сравнительный анализ готовых решений </a:t>
             </a:r>
@@ -10291,21 +10801,21 @@
               <a:solidFill>
                 <a:srgbClr val="000000"/>
               </a:solidFill>
-              <a:latin typeface="Arial"/>
+              <a:latin typeface="Calibri"/>
             </a:endParaRPr>
           </a:p>
         </p:txBody>
       </p:sp>
       <p:sp>
         <p:nvSpPr>
-          <p:cNvPr id="73" name="Rectangle 2"/>
+          <p:cNvPr id="77" name="Rectangle 2"/>
           <p:cNvSpPr/>
           <p:nvPr/>
         </p:nvSpPr>
         <p:spPr>
           <a:xfrm>
             <a:off x="0" y="0"/>
-            <a:ext cx="12191400" cy="360"/>
+            <a:ext cx="12191040" cy="360"/>
           </a:xfrm>
           <a:prstGeom prst="rect">
             <a:avLst/>
@@ -10343,14 +10853,14 @@
       </p:sp>
       <p:sp>
         <p:nvSpPr>
-          <p:cNvPr id="74" name="TextBox 5"/>
+          <p:cNvPr id="78" name="TextBox 5"/>
           <p:cNvSpPr/>
           <p:nvPr/>
         </p:nvSpPr>
         <p:spPr>
           <a:xfrm>
             <a:off x="5947920" y="6308280"/>
-            <a:ext cx="383400" cy="577440"/>
+            <a:ext cx="383040" cy="577440"/>
           </a:xfrm>
           <a:prstGeom prst="rect">
             <a:avLst/>
@@ -10397,7 +10907,7 @@
       </p:sp>
       <p:graphicFrame>
         <p:nvGraphicFramePr>
-          <p:cNvPr id="75" name="Объект 1"/>
+          <p:cNvPr id="79" name="Объект 1"/>
           <p:cNvGraphicFramePr/>
           <p:nvPr/>
         </p:nvGraphicFramePr>
@@ -13233,7 +13743,7 @@
       </p:graphicFrame>
       <p:pic>
         <p:nvPicPr>
-          <p:cNvPr id="76" name="Рисунок 14" descr=""/>
+          <p:cNvPr id="80" name="Рисунок 13" descr=""/>
           <p:cNvPicPr/>
           <p:nvPr/>
         </p:nvPicPr>
@@ -13243,8 +13753,8 @@
         </p:blipFill>
         <p:spPr>
           <a:xfrm>
-            <a:off x="-1643400" y="2880360"/>
-            <a:ext cx="2242080" cy="2242080"/>
+            <a:off x="11070720" y="-816120"/>
+            <a:ext cx="2241720" cy="2241720"/>
           </a:xfrm>
           <a:prstGeom prst="rect">
             <a:avLst/>
@@ -13253,7 +13763,37 @@
             <a:noFill/>
           </a:ln>
           <a:effectLst>
-            <a:outerShdw blurRad="50760" dir="10800000" dist="38160" rotWithShape="0">
+            <a:outerShdw blurRad="50760" dir="2700000" dist="37674" rotWithShape="0">
+              <a:srgbClr val="000000">
+                <a:alpha val="40000"/>
+              </a:srgbClr>
+            </a:outerShdw>
+          </a:effectLst>
+        </p:spPr>
+      </p:pic>
+      <p:pic>
+        <p:nvPicPr>
+          <p:cNvPr id="81" name="Рисунок 14" descr=""/>
+          <p:cNvPicPr/>
+          <p:nvPr/>
+        </p:nvPicPr>
+        <p:blipFill>
+          <a:blip r:embed="rId2"/>
+          <a:stretch/>
+        </p:blipFill>
+        <p:spPr>
+          <a:xfrm>
+            <a:off x="-994680" y="5583240"/>
+            <a:ext cx="2241720" cy="2241720"/>
+          </a:xfrm>
+          <a:prstGeom prst="rect">
+            <a:avLst/>
+          </a:prstGeom>
+          <a:ln w="0">
+            <a:noFill/>
+          </a:ln>
+          <a:effectLst>
+            <a:outerShdw blurRad="50760" dir="8100000" dist="37674" rotWithShape="0">
               <a:srgbClr val="000000">
                 <a:alpha val="40000"/>
               </a:srgbClr>
@@ -13293,7 +13833,7 @@
       </p:grpSpPr>
       <p:sp>
         <p:nvSpPr>
-          <p:cNvPr id="77" name="PlaceHolder 1"/>
+          <p:cNvPr id="82" name="PlaceHolder 1"/>
           <p:cNvSpPr>
             <a:spLocks noGrp="1"/>
           </p:cNvSpPr>
@@ -13304,7 +13844,7 @@
         <p:spPr>
           <a:xfrm>
             <a:off x="1218240" y="270000"/>
-            <a:ext cx="9754920" cy="1324800"/>
+            <a:ext cx="9754560" cy="1324440"/>
           </a:xfrm>
           <a:prstGeom prst="rect">
             <a:avLst/>
@@ -13339,7 +13879,7 @@
                 <a:solidFill>
                   <a:schemeClr val="dk1"/>
                 </a:solidFill>
-                <a:latin typeface="Calibri Light"/>
+                <a:latin typeface="Calibri"/>
               </a:rPr>
               <a:t>Архитектура приложения</a:t>
             </a:r>
@@ -13347,81 +13887,21 @@
               <a:solidFill>
                 <a:srgbClr val="000000"/>
               </a:solidFill>
-              <a:latin typeface="Arial"/>
+              <a:latin typeface="Calibri"/>
             </a:endParaRPr>
           </a:p>
         </p:txBody>
       </p:sp>
-      <p:pic>
-        <p:nvPicPr>
-          <p:cNvPr id="78" name="Рисунок 3" descr=""/>
-          <p:cNvPicPr/>
-          <p:nvPr/>
-        </p:nvPicPr>
-        <p:blipFill>
-          <a:blip r:embed="rId1"/>
-          <a:stretch/>
-        </p:blipFill>
-        <p:spPr>
-          <a:xfrm>
-            <a:off x="10877760" y="1119240"/>
-            <a:ext cx="2242080" cy="2242080"/>
-          </a:xfrm>
-          <a:prstGeom prst="rect">
-            <a:avLst/>
-          </a:prstGeom>
-          <a:ln w="0">
-            <a:noFill/>
-          </a:ln>
-          <a:effectLst>
-            <a:outerShdw blurRad="50760" dir="0" dist="38160" rotWithShape="0">
-              <a:srgbClr val="000000">
-                <a:alpha val="40000"/>
-              </a:srgbClr>
-            </a:outerShdw>
-          </a:effectLst>
-        </p:spPr>
-      </p:pic>
-      <p:pic>
-        <p:nvPicPr>
-          <p:cNvPr id="79" name="Рисунок 4" descr=""/>
-          <p:cNvPicPr/>
-          <p:nvPr/>
-        </p:nvPicPr>
-        <p:blipFill>
-          <a:blip r:embed="rId2"/>
-          <a:stretch/>
-        </p:blipFill>
-        <p:spPr>
-          <a:xfrm>
-            <a:off x="-871200" y="5221440"/>
-            <a:ext cx="2242080" cy="2242080"/>
-          </a:xfrm>
-          <a:prstGeom prst="rect">
-            <a:avLst/>
-          </a:prstGeom>
-          <a:ln w="0">
-            <a:noFill/>
-          </a:ln>
-          <a:effectLst>
-            <a:outerShdw blurRad="50760" dir="8100000" dist="37674" rotWithShape="0">
-              <a:srgbClr val="000000">
-                <a:alpha val="40000"/>
-              </a:srgbClr>
-            </a:outerShdw>
-          </a:effectLst>
-        </p:spPr>
-      </p:pic>
       <p:sp>
         <p:nvSpPr>
-          <p:cNvPr id="80" name="TextBox 2"/>
+          <p:cNvPr id="83" name="TextBox 2"/>
           <p:cNvSpPr/>
           <p:nvPr/>
         </p:nvSpPr>
         <p:spPr>
           <a:xfrm>
             <a:off x="1371600" y="3519000"/>
-            <a:ext cx="183960" cy="368640"/>
+            <a:ext cx="183600" cy="368280"/>
           </a:xfrm>
           <a:prstGeom prst="rect">
             <a:avLst/>
@@ -13459,14 +13939,14 @@
       </p:sp>
       <p:sp>
         <p:nvSpPr>
-          <p:cNvPr id="81" name="TextBox 7"/>
+          <p:cNvPr id="84" name="TextBox 7"/>
           <p:cNvSpPr/>
           <p:nvPr/>
         </p:nvSpPr>
         <p:spPr>
           <a:xfrm>
             <a:off x="6050160" y="6308280"/>
-            <a:ext cx="383400" cy="577440"/>
+            <a:ext cx="383040" cy="577440"/>
           </a:xfrm>
           <a:prstGeom prst="rect">
             <a:avLst/>
@@ -13513,7 +13993,60 @@
       </p:sp>
       <p:pic>
         <p:nvPicPr>
-          <p:cNvPr id="82" name="" descr=""/>
+          <p:cNvPr id="85" name="" descr=""/>
+          <p:cNvPicPr/>
+          <p:nvPr/>
+        </p:nvPicPr>
+        <p:blipFill>
+          <a:blip r:embed="rId1"/>
+          <a:stretch/>
+        </p:blipFill>
+        <p:spPr>
+          <a:xfrm>
+            <a:off x="2340000" y="1611720"/>
+            <a:ext cx="7559280" cy="4147560"/>
+          </a:xfrm>
+          <a:prstGeom prst="rect">
+            <a:avLst/>
+          </a:prstGeom>
+          <a:ln w="0">
+            <a:noFill/>
+          </a:ln>
+        </p:spPr>
+      </p:pic>
+      <p:pic>
+        <p:nvPicPr>
+          <p:cNvPr id="86" name="Рисунок 15" descr=""/>
+          <p:cNvPicPr/>
+          <p:nvPr/>
+        </p:nvPicPr>
+        <p:blipFill>
+          <a:blip r:embed="rId2"/>
+          <a:stretch/>
+        </p:blipFill>
+        <p:spPr>
+          <a:xfrm>
+            <a:off x="11070720" y="-816120"/>
+            <a:ext cx="2241720" cy="2241720"/>
+          </a:xfrm>
+          <a:prstGeom prst="rect">
+            <a:avLst/>
+          </a:prstGeom>
+          <a:ln w="0">
+            <a:noFill/>
+          </a:ln>
+          <a:effectLst>
+            <a:outerShdw blurRad="50760" dir="2700000" dist="37674" rotWithShape="0">
+              <a:srgbClr val="000000">
+                <a:alpha val="40000"/>
+              </a:srgbClr>
+            </a:outerShdw>
+          </a:effectLst>
+        </p:spPr>
+      </p:pic>
+      <p:pic>
+        <p:nvPicPr>
+          <p:cNvPr id="87" name="Рисунок 16" descr=""/>
           <p:cNvPicPr/>
           <p:nvPr/>
         </p:nvPicPr>
@@ -13523,15 +14056,22 @@
         </p:blipFill>
         <p:spPr>
           <a:xfrm>
-            <a:off x="2340000" y="1611720"/>
-            <a:ext cx="7559640" cy="4147920"/>
-          </a:xfrm>
-          <a:prstGeom prst="rect">
-            <a:avLst/>
-          </a:prstGeom>
-          <a:ln w="0">
-            <a:noFill/>
-          </a:ln>
+            <a:off x="-994680" y="5583240"/>
+            <a:ext cx="2241720" cy="2241720"/>
+          </a:xfrm>
+          <a:prstGeom prst="rect">
+            <a:avLst/>
+          </a:prstGeom>
+          <a:ln w="0">
+            <a:noFill/>
+          </a:ln>
+          <a:effectLst>
+            <a:outerShdw blurRad="50760" dir="8100000" dist="37674" rotWithShape="0">
+              <a:srgbClr val="000000">
+                <a:alpha val="40000"/>
+              </a:srgbClr>
+            </a:outerShdw>
+          </a:effectLst>
         </p:spPr>
       </p:pic>
     </p:spTree>
@@ -13566,7 +14106,7 @@
       </p:grpSpPr>
       <p:sp>
         <p:nvSpPr>
-          <p:cNvPr id="83" name="PlaceHolder 1"/>
+          <p:cNvPr id="88" name="PlaceHolder 1"/>
           <p:cNvSpPr>
             <a:spLocks noGrp="1"/>
           </p:cNvSpPr>
@@ -13577,7 +14117,7 @@
         <p:spPr>
           <a:xfrm>
             <a:off x="2674080" y="0"/>
-            <a:ext cx="7765560" cy="718920"/>
+            <a:ext cx="7765200" cy="718560"/>
           </a:xfrm>
           <a:prstGeom prst="rect">
             <a:avLst/>
@@ -13592,7 +14132,7 @@
             <a:normAutofit/>
           </a:bodyPr>
           <a:p>
-            <a:pPr indent="0" defTabSz="457200">
+            <a:pPr indent="0" algn="ctr" defTabSz="457200">
               <a:lnSpc>
                 <a:spcPct val="100000"/>
               </a:lnSpc>
@@ -13609,7 +14149,7 @@
                     <a:lumOff val="15000"/>
                   </a:schemeClr>
                 </a:solidFill>
-                <a:latin typeface="Century Gothic"/>
+                <a:latin typeface="Calibri"/>
               </a:rPr>
               <a:t>Инфологическая модель БД</a:t>
             </a:r>
@@ -13617,14 +14157,14 @@
               <a:solidFill>
                 <a:srgbClr val="000000"/>
               </a:solidFill>
-              <a:latin typeface="Arial"/>
+              <a:latin typeface="Calibri"/>
             </a:endParaRPr>
           </a:p>
         </p:txBody>
       </p:sp>
       <p:pic>
         <p:nvPicPr>
-          <p:cNvPr id="84" name="Рисунок 3" descr=""/>
+          <p:cNvPr id="89" name="Рисунок 3" descr=""/>
           <p:cNvPicPr/>
           <p:nvPr/>
         </p:nvPicPr>
@@ -13635,7 +14175,7 @@
         <p:spPr>
           <a:xfrm>
             <a:off x="11070720" y="-585360"/>
-            <a:ext cx="2242080" cy="2242080"/>
+            <a:ext cx="2241720" cy="2241720"/>
           </a:xfrm>
           <a:prstGeom prst="rect">
             <a:avLst/>
@@ -13654,14 +14194,14 @@
       </p:pic>
       <p:sp>
         <p:nvSpPr>
-          <p:cNvPr id="85" name="TextBox 5"/>
+          <p:cNvPr id="90" name="TextBox 5"/>
           <p:cNvSpPr/>
           <p:nvPr/>
         </p:nvSpPr>
         <p:spPr>
           <a:xfrm>
             <a:off x="5947920" y="6308280"/>
-            <a:ext cx="383400" cy="577440"/>
+            <a:ext cx="383040" cy="577440"/>
           </a:xfrm>
           <a:prstGeom prst="rect">
             <a:avLst/>
@@ -13708,7 +14248,7 @@
       </p:sp>
       <p:pic>
         <p:nvPicPr>
-          <p:cNvPr id="86" name="Рисунок 4" descr=""/>
+          <p:cNvPr id="91" name="Рисунок 4" descr=""/>
           <p:cNvPicPr/>
           <p:nvPr/>
         </p:nvPicPr>
@@ -13719,7 +14259,7 @@
         <p:spPr>
           <a:xfrm>
             <a:off x="-994680" y="5556240"/>
-            <a:ext cx="2242080" cy="2242080"/>
+            <a:ext cx="2241720" cy="2241720"/>
           </a:xfrm>
           <a:prstGeom prst="rect">
             <a:avLst/>
@@ -13738,7 +14278,7 @@
       </p:pic>
       <p:pic>
         <p:nvPicPr>
-          <p:cNvPr id="87" name="" descr=""/>
+          <p:cNvPr id="92" name="" descr=""/>
           <p:cNvPicPr/>
           <p:nvPr/>
         </p:nvPicPr>
@@ -13749,7 +14289,7 @@
         <p:spPr>
           <a:xfrm>
             <a:off x="3060000" y="837360"/>
-            <a:ext cx="6263640" cy="5642280"/>
+            <a:ext cx="6263280" cy="5641920"/>
           </a:xfrm>
           <a:prstGeom prst="rect">
             <a:avLst/>
@@ -13791,7 +14331,7 @@
       </p:grpSpPr>
       <p:sp>
         <p:nvSpPr>
-          <p:cNvPr id="88" name="PlaceHolder 1"/>
+          <p:cNvPr id="93" name="PlaceHolder 1"/>
           <p:cNvSpPr>
             <a:spLocks noGrp="1"/>
           </p:cNvSpPr>
@@ -13802,7 +14342,7 @@
         <p:spPr>
           <a:xfrm>
             <a:off x="1620000" y="0"/>
-            <a:ext cx="8819640" cy="705960"/>
+            <a:ext cx="8819280" cy="705600"/>
           </a:xfrm>
           <a:prstGeom prst="rect">
             <a:avLst/>
@@ -13814,7 +14354,7 @@
         </p:spPr>
         <p:txBody>
           <a:bodyPr lIns="91440" rIns="91440" tIns="45720" bIns="45720" anchor="ctr">
-            <a:normAutofit fontScale="71666"/>
+            <a:normAutofit fontScale="83888"/>
           </a:bodyPr>
           <a:p>
             <a:pPr indent="0" algn="ctr" defTabSz="457200">
@@ -13834,22 +14374,22 @@
                     <a:lumOff val="15000"/>
                   </a:schemeClr>
                 </a:solidFill>
-                <a:latin typeface="Century Gothic"/>
+                <a:latin typeface="Calibri"/>
               </a:rPr>
               <a:t>Структура метаданных информационной системы</a:t>
             </a:r>
-            <a:endParaRPr b="0" lang="ru-RU" sz="3600" spc="-1" strike="noStrike">
-              <a:solidFill>
-                <a:srgbClr val="000000"/>
-              </a:solidFill>
-              <a:latin typeface="Arial"/>
+            <a:endParaRPr b="1" lang="ru-RU" sz="3600" spc="-1" strike="noStrike">
+              <a:solidFill>
+                <a:srgbClr val="000000"/>
+              </a:solidFill>
+              <a:latin typeface="Calibri"/>
             </a:endParaRPr>
           </a:p>
         </p:txBody>
       </p:sp>
       <p:pic>
         <p:nvPicPr>
-          <p:cNvPr id="89" name="Рисунок 3" descr=""/>
+          <p:cNvPr id="94" name="Рисунок 3" descr=""/>
           <p:cNvPicPr/>
           <p:nvPr/>
         </p:nvPicPr>
@@ -13860,7 +14400,7 @@
         <p:spPr>
           <a:xfrm>
             <a:off x="10845720" y="-1278360"/>
-            <a:ext cx="2242080" cy="2242080"/>
+            <a:ext cx="2241720" cy="2241720"/>
           </a:xfrm>
           <a:prstGeom prst="rect">
             <a:avLst/>
@@ -13879,7 +14419,7 @@
       </p:pic>
       <p:pic>
         <p:nvPicPr>
-          <p:cNvPr id="90" name="Рисунок 4" descr=""/>
+          <p:cNvPr id="95" name="Рисунок 4" descr=""/>
           <p:cNvPicPr/>
           <p:nvPr/>
         </p:nvPicPr>
@@ -13890,7 +14430,7 @@
         <p:spPr>
           <a:xfrm>
             <a:off x="-966240" y="5590800"/>
-            <a:ext cx="2242080" cy="2242080"/>
+            <a:ext cx="2241720" cy="2241720"/>
           </a:xfrm>
           <a:prstGeom prst="rect">
             <a:avLst/>
@@ -13909,14 +14449,14 @@
       </p:pic>
       <p:sp>
         <p:nvSpPr>
-          <p:cNvPr id="91" name="TextBox 5"/>
+          <p:cNvPr id="96" name="TextBox 5"/>
           <p:cNvSpPr/>
           <p:nvPr/>
         </p:nvSpPr>
         <p:spPr>
           <a:xfrm>
             <a:off x="5925960" y="6273360"/>
-            <a:ext cx="383400" cy="577440"/>
+            <a:ext cx="383040" cy="577440"/>
           </a:xfrm>
           <a:prstGeom prst="rect">
             <a:avLst/>
@@ -13963,7 +14503,7 @@
       </p:sp>
       <p:pic>
         <p:nvPicPr>
-          <p:cNvPr id="92" name="" descr=""/>
+          <p:cNvPr id="97" name="" descr=""/>
           <p:cNvPicPr/>
           <p:nvPr/>
         </p:nvPicPr>
@@ -13974,7 +14514,7 @@
         <p:spPr>
           <a:xfrm>
             <a:off x="1986480" y="1162800"/>
-            <a:ext cx="8633160" cy="4236840"/>
+            <a:ext cx="8632800" cy="4236480"/>
           </a:xfrm>
           <a:prstGeom prst="rect">
             <a:avLst/>

--- a/Презентацияя.pptx
+++ b/Презентацияя.pptx
@@ -361,7 +361,7 @@
             <a:pPr indent="0" algn="r">
               <a:buNone/>
             </a:pPr>
-            <a:fld id="{8A717784-699C-4C6F-810D-710D2C1B76FF}" type="slidenum">
+            <a:fld id="{CCCFA6A0-0A3C-47DC-A859-7D603A349129}" type="slidenum">
               <a:rPr b="0" lang="ru-RU" sz="1400" spc="-1" strike="noStrike">
                 <a:solidFill>
                   <a:srgbClr val="000000"/>
@@ -415,7 +415,7 @@
         <p:spPr>
           <a:xfrm>
             <a:off x="685800" y="1143000"/>
-            <a:ext cx="5485320" cy="3085200"/>
+            <a:ext cx="5484960" cy="3084840"/>
           </a:xfrm>
           <a:prstGeom prst="rect">
             <a:avLst/>
@@ -438,7 +438,7 @@
         <p:spPr>
           <a:xfrm>
             <a:off x="685800" y="4400640"/>
-            <a:ext cx="5485320" cy="3599280"/>
+            <a:ext cx="5484960" cy="3598920"/>
           </a:xfrm>
           <a:prstGeom prst="rect">
             <a:avLst/>
@@ -478,7 +478,7 @@
         <p:spPr>
           <a:xfrm>
             <a:off x="3884760" y="8685360"/>
-            <a:ext cx="2970720" cy="457560"/>
+            <a:ext cx="2970360" cy="457200"/>
           </a:xfrm>
           <a:prstGeom prst="rect">
             <a:avLst/>
@@ -519,7 +519,7 @@
                 <a:tab algn="l" pos="0"/>
               </a:tabLst>
             </a:pPr>
-            <a:fld id="{B356F396-E791-4F1F-9C37-1146CF335C93}" type="slidenum">
+            <a:fld id="{B793C74A-003B-47DC-A18F-2A9C8D2096C5}" type="slidenum">
               <a:rPr b="0" lang="ru-RU" sz="1200" spc="-1" strike="noStrike">
                 <a:solidFill>
                   <a:srgbClr val="000000"/>
@@ -572,7 +572,7 @@
         <p:spPr>
           <a:xfrm>
             <a:off x="838080" y="365040"/>
-            <a:ext cx="10514520" cy="1324440"/>
+            <a:ext cx="10514160" cy="1324080"/>
           </a:xfrm>
           <a:prstGeom prst="rect">
             <a:avLst/>
@@ -612,7 +612,7 @@
         <p:spPr>
           <a:xfrm>
             <a:off x="838080" y="1825560"/>
-            <a:ext cx="10514520" cy="4350240"/>
+            <a:ext cx="10514160" cy="4349880"/>
           </a:xfrm>
           <a:prstGeom prst="rect">
             <a:avLst/>
@@ -673,7 +673,7 @@
         <p:txBody>
           <a:bodyPr/>
           <a:p>
-            <a:fld id="{A385E6A6-902D-40CC-AE9D-E54C41350C3C}" type="slidenum">
+            <a:fld id="{DBFAA648-EB33-4878-89B2-E88EA329D08F}" type="slidenum">
               <a:t>&lt;#&gt;</a:t>
             </a:fld>
           </a:p>
@@ -735,7 +735,7 @@
         <p:spPr>
           <a:xfrm>
             <a:off x="838080" y="365040"/>
-            <a:ext cx="10514520" cy="1324440"/>
+            <a:ext cx="10514160" cy="1324080"/>
           </a:xfrm>
           <a:prstGeom prst="rect">
             <a:avLst/>
@@ -775,7 +775,7 @@
         <p:spPr>
           <a:xfrm>
             <a:off x="838080" y="1825560"/>
-            <a:ext cx="10514520" cy="4350240"/>
+            <a:ext cx="10514160" cy="4349880"/>
           </a:xfrm>
           <a:prstGeom prst="rect">
             <a:avLst/>
@@ -839,7 +839,7 @@
         <p:txBody>
           <a:bodyPr/>
           <a:p>
-            <a:fld id="{335A45F2-FC1C-48C1-949B-BDDAA08727D8}" type="slidenum">
+            <a:fld id="{44F79816-0E68-4BC5-B5D0-68FBAA61CF62}" type="slidenum">
               <a:t>&lt;#&gt;</a:t>
             </a:fld>
           </a:p>
@@ -901,7 +901,7 @@
         <p:spPr>
           <a:xfrm>
             <a:off x="838080" y="365040"/>
-            <a:ext cx="10514520" cy="1324440"/>
+            <a:ext cx="10514160" cy="1324080"/>
           </a:xfrm>
           <a:prstGeom prst="rect">
             <a:avLst/>
@@ -941,7 +941,7 @@
         <p:spPr>
           <a:xfrm>
             <a:off x="838080" y="1825560"/>
-            <a:ext cx="10514520" cy="4350240"/>
+            <a:ext cx="10514160" cy="4349880"/>
           </a:xfrm>
           <a:prstGeom prst="rect">
             <a:avLst/>
@@ -1005,7 +1005,7 @@
         <p:txBody>
           <a:bodyPr/>
           <a:p>
-            <a:fld id="{3B11BA4E-7A83-411D-BD6F-63E5F035B0CD}" type="slidenum">
+            <a:fld id="{AD5F05BF-C7E7-429D-8297-5CAE9A5490A2}" type="slidenum">
               <a:t>&lt;#&gt;</a:t>
             </a:fld>
           </a:p>
@@ -1067,7 +1067,7 @@
         <p:spPr>
           <a:xfrm>
             <a:off x="838080" y="365040"/>
-            <a:ext cx="10514520" cy="1324440"/>
+            <a:ext cx="10514160" cy="1324080"/>
           </a:xfrm>
           <a:prstGeom prst="rect">
             <a:avLst/>
@@ -1107,7 +1107,7 @@
         <p:spPr>
           <a:xfrm>
             <a:off x="838080" y="1825560"/>
-            <a:ext cx="10514520" cy="4350240"/>
+            <a:ext cx="10514160" cy="4349880"/>
           </a:xfrm>
           <a:prstGeom prst="rect">
             <a:avLst/>
@@ -1171,7 +1171,7 @@
         <p:txBody>
           <a:bodyPr/>
           <a:p>
-            <a:fld id="{D2918B67-877C-400B-B2E9-34BB98CB81BB}" type="slidenum">
+            <a:fld id="{58A6E60D-97A3-4207-A779-08A1EEDE2399}" type="slidenum">
               <a:t>&lt;#&gt;</a:t>
             </a:fld>
           </a:p>
@@ -1233,7 +1233,7 @@
         <p:spPr>
           <a:xfrm>
             <a:off x="838080" y="365040"/>
-            <a:ext cx="10514520" cy="1324440"/>
+            <a:ext cx="10514160" cy="1324080"/>
           </a:xfrm>
           <a:prstGeom prst="rect">
             <a:avLst/>
@@ -1273,7 +1273,7 @@
         <p:spPr>
           <a:xfrm>
             <a:off x="838080" y="1825560"/>
-            <a:ext cx="10514520" cy="4350240"/>
+            <a:ext cx="10514160" cy="4349880"/>
           </a:xfrm>
           <a:prstGeom prst="rect">
             <a:avLst/>
@@ -1337,7 +1337,7 @@
         <p:txBody>
           <a:bodyPr/>
           <a:p>
-            <a:fld id="{A5124FCC-2C4A-4542-AF67-BE9C6D068AEC}" type="slidenum">
+            <a:fld id="{5402AEA2-6B0C-4F07-99E4-AEA652B22D21}" type="slidenum">
               <a:t>&lt;#&gt;</a:t>
             </a:fld>
           </a:p>
@@ -1406,7 +1406,7 @@
         <p:spPr>
           <a:xfrm>
             <a:off x="838080" y="365040"/>
-            <a:ext cx="10514520" cy="1324440"/>
+            <a:ext cx="10514160" cy="1324080"/>
           </a:xfrm>
           <a:prstGeom prst="rect">
             <a:avLst/>
@@ -1455,7 +1455,7 @@
         <p:spPr>
           <a:xfrm>
             <a:off x="4038480" y="6356520"/>
-            <a:ext cx="4113720" cy="363960"/>
+            <a:ext cx="4113360" cy="363600"/>
           </a:xfrm>
           <a:prstGeom prst="rect">
             <a:avLst/>
@@ -1503,7 +1503,7 @@
                 </a:solidFill>
                 <a:latin typeface="Times New Roman"/>
               </a:rPr>
-              <a:t> </a:t>
+              <a:t>&lt;нижний колонтитул&gt;</a:t>
             </a:r>
             <a:endParaRPr b="0" lang="ru-RU" sz="1400" spc="-1" strike="noStrike">
               <a:solidFill>
@@ -1527,7 +1527,7 @@
         <p:spPr>
           <a:xfrm>
             <a:off x="8610480" y="6356520"/>
-            <a:ext cx="2742120" cy="363960"/>
+            <a:ext cx="2741760" cy="363600"/>
           </a:xfrm>
           <a:prstGeom prst="rect">
             <a:avLst/>
@@ -1570,7 +1570,7 @@
                 <a:tab algn="l" pos="0"/>
               </a:tabLst>
             </a:pPr>
-            <a:fld id="{AB45F53B-61DB-49A7-8435-9BECF6D4BC0B}" type="slidenum">
+            <a:fld id="{E9EB89DD-F1DF-42CA-B3F2-112A1069F705}" type="slidenum">
               <a:rPr b="0" lang="ru-RU" sz="1200" spc="-1" strike="noStrike">
                 <a:solidFill>
                   <a:schemeClr val="dk1">
@@ -1579,7 +1579,7 @@
                 </a:solidFill>
                 <a:latin typeface="Calibri"/>
               </a:rPr>
-              <a:t>19</a:t>
+              <a:t>&lt;номер&gt;</a:t>
             </a:fld>
             <a:endParaRPr b="0" lang="ru-RU" sz="1200" spc="-1" strike="noStrike">
               <a:solidFill>
@@ -1603,7 +1603,7 @@
         <p:spPr>
           <a:xfrm>
             <a:off x="838080" y="6356520"/>
-            <a:ext cx="2742120" cy="363960"/>
+            <a:ext cx="2741760" cy="363600"/>
           </a:xfrm>
           <a:prstGeom prst="rect">
             <a:avLst/>
@@ -1639,7 +1639,7 @@
                 </a:solidFill>
                 <a:latin typeface="Times New Roman"/>
               </a:rPr>
-              <a:t> </a:t>
+              <a:t>&lt;дата/время&gt;</a:t>
             </a:r>
             <a:endParaRPr b="0" lang="ru-RU" sz="1400" spc="-1" strike="noStrike">
               <a:solidFill>
@@ -1921,7 +1921,7 @@
         <p:spPr>
           <a:xfrm>
             <a:off x="838080" y="365040"/>
-            <a:ext cx="10514520" cy="1324440"/>
+            <a:ext cx="10514160" cy="1324080"/>
           </a:xfrm>
           <a:prstGeom prst="rect">
             <a:avLst/>
@@ -1970,7 +1970,7 @@
         <p:spPr>
           <a:xfrm>
             <a:off x="838080" y="1825560"/>
-            <a:ext cx="10514520" cy="4350240"/>
+            <a:ext cx="10514160" cy="4349880"/>
           </a:xfrm>
           <a:prstGeom prst="rect">
             <a:avLst/>
@@ -2195,7 +2195,7 @@
         <p:spPr>
           <a:xfrm>
             <a:off x="4038480" y="6356520"/>
-            <a:ext cx="4113720" cy="363960"/>
+            <a:ext cx="4113360" cy="363600"/>
           </a:xfrm>
           <a:prstGeom prst="rect">
             <a:avLst/>
@@ -2267,7 +2267,7 @@
         <p:spPr>
           <a:xfrm>
             <a:off x="8610480" y="6356520"/>
-            <a:ext cx="2742120" cy="363960"/>
+            <a:ext cx="2741760" cy="363600"/>
           </a:xfrm>
           <a:prstGeom prst="rect">
             <a:avLst/>
@@ -2310,7 +2310,7 @@
                 <a:tab algn="l" pos="0"/>
               </a:tabLst>
             </a:pPr>
-            <a:fld id="{E6A7E2E6-EB3D-4C81-AF62-9807B13B4329}" type="slidenum">
+            <a:fld id="{EBAD2970-52BB-4817-8A71-336808D785A1}" type="slidenum">
               <a:rPr b="0" lang="ru-RU" sz="1200" spc="-1" strike="noStrike">
                 <a:solidFill>
                   <a:schemeClr val="dk1">
@@ -2343,7 +2343,7 @@
         <p:spPr>
           <a:xfrm>
             <a:off x="838080" y="6356520"/>
-            <a:ext cx="2742120" cy="363960"/>
+            <a:ext cx="2741760" cy="363600"/>
           </a:xfrm>
           <a:prstGeom prst="rect">
             <a:avLst/>
@@ -2436,7 +2436,7 @@
         <p:spPr>
           <a:xfrm>
             <a:off x="838080" y="365040"/>
-            <a:ext cx="10514520" cy="1324440"/>
+            <a:ext cx="10514160" cy="1324080"/>
           </a:xfrm>
           <a:prstGeom prst="rect">
             <a:avLst/>
@@ -2485,7 +2485,7 @@
         <p:spPr>
           <a:xfrm>
             <a:off x="838080" y="1825560"/>
-            <a:ext cx="10514520" cy="4350240"/>
+            <a:ext cx="10514160" cy="4349880"/>
           </a:xfrm>
           <a:prstGeom prst="rect">
             <a:avLst/>
@@ -2710,7 +2710,7 @@
         <p:spPr>
           <a:xfrm>
             <a:off x="4038480" y="6356520"/>
-            <a:ext cx="4113720" cy="363960"/>
+            <a:ext cx="4113360" cy="363600"/>
           </a:xfrm>
           <a:prstGeom prst="rect">
             <a:avLst/>
@@ -2782,7 +2782,7 @@
         <p:spPr>
           <a:xfrm>
             <a:off x="8610480" y="6356520"/>
-            <a:ext cx="2742120" cy="363960"/>
+            <a:ext cx="2741760" cy="363600"/>
           </a:xfrm>
           <a:prstGeom prst="rect">
             <a:avLst/>
@@ -2825,7 +2825,7 @@
                 <a:tab algn="l" pos="0"/>
               </a:tabLst>
             </a:pPr>
-            <a:fld id="{EBF75614-E627-430C-B4EA-7E6BA45A85C1}" type="slidenum">
+            <a:fld id="{E1F4BAB7-5DFF-4A4C-857F-1B91D72E74D8}" type="slidenum">
               <a:rPr b="0" lang="ru-RU" sz="1200" spc="-1" strike="noStrike">
                 <a:solidFill>
                   <a:schemeClr val="dk1">
@@ -2858,7 +2858,7 @@
         <p:spPr>
           <a:xfrm>
             <a:off x="838080" y="6356520"/>
-            <a:ext cx="2742120" cy="363960"/>
+            <a:ext cx="2741760" cy="363600"/>
           </a:xfrm>
           <a:prstGeom prst="rect">
             <a:avLst/>
@@ -2951,7 +2951,7 @@
         <p:spPr>
           <a:xfrm>
             <a:off x="838080" y="365040"/>
-            <a:ext cx="10514520" cy="1324440"/>
+            <a:ext cx="10514160" cy="1324080"/>
           </a:xfrm>
           <a:prstGeom prst="rect">
             <a:avLst/>
@@ -3000,7 +3000,7 @@
         <p:spPr>
           <a:xfrm>
             <a:off x="838080" y="1825560"/>
-            <a:ext cx="10514520" cy="4350240"/>
+            <a:ext cx="10514160" cy="4349880"/>
           </a:xfrm>
           <a:prstGeom prst="rect">
             <a:avLst/>
@@ -3225,7 +3225,7 @@
         <p:spPr>
           <a:xfrm>
             <a:off x="4038480" y="6356520"/>
-            <a:ext cx="4113720" cy="363960"/>
+            <a:ext cx="4113360" cy="363600"/>
           </a:xfrm>
           <a:prstGeom prst="rect">
             <a:avLst/>
@@ -3297,7 +3297,7 @@
         <p:spPr>
           <a:xfrm>
             <a:off x="8610480" y="6356520"/>
-            <a:ext cx="2742120" cy="363960"/>
+            <a:ext cx="2741760" cy="363600"/>
           </a:xfrm>
           <a:prstGeom prst="rect">
             <a:avLst/>
@@ -3340,7 +3340,7 @@
                 <a:tab algn="l" pos="0"/>
               </a:tabLst>
             </a:pPr>
-            <a:fld id="{1E257D53-5FAF-4E06-8B60-05271E363F93}" type="slidenum">
+            <a:fld id="{89E370D1-119D-4CC7-9FEF-D80BADD0FC3F}" type="slidenum">
               <a:rPr b="0" lang="ru-RU" sz="1200" spc="-1" strike="noStrike">
                 <a:solidFill>
                   <a:schemeClr val="dk1">
@@ -3373,7 +3373,7 @@
         <p:spPr>
           <a:xfrm>
             <a:off x="838080" y="6356520"/>
-            <a:ext cx="2742120" cy="363960"/>
+            <a:ext cx="2741760" cy="363600"/>
           </a:xfrm>
           <a:prstGeom prst="rect">
             <a:avLst/>
@@ -3466,7 +3466,7 @@
         <p:spPr>
           <a:xfrm>
             <a:off x="838080" y="365040"/>
-            <a:ext cx="10514520" cy="1324440"/>
+            <a:ext cx="10514160" cy="1324080"/>
           </a:xfrm>
           <a:prstGeom prst="rect">
             <a:avLst/>
@@ -3515,7 +3515,7 @@
         <p:spPr>
           <a:xfrm>
             <a:off x="838080" y="1825560"/>
-            <a:ext cx="10514520" cy="4350240"/>
+            <a:ext cx="10514160" cy="4349880"/>
           </a:xfrm>
           <a:prstGeom prst="rect">
             <a:avLst/>
@@ -3740,7 +3740,7 @@
         <p:spPr>
           <a:xfrm>
             <a:off x="4038480" y="6356520"/>
-            <a:ext cx="4113720" cy="363960"/>
+            <a:ext cx="4113360" cy="363600"/>
           </a:xfrm>
           <a:prstGeom prst="rect">
             <a:avLst/>
@@ -3812,7 +3812,7 @@
         <p:spPr>
           <a:xfrm>
             <a:off x="8610480" y="6356520"/>
-            <a:ext cx="2742120" cy="363960"/>
+            <a:ext cx="2741760" cy="363600"/>
           </a:xfrm>
           <a:prstGeom prst="rect">
             <a:avLst/>
@@ -3855,7 +3855,7 @@
                 <a:tab algn="l" pos="0"/>
               </a:tabLst>
             </a:pPr>
-            <a:fld id="{99A3FEDE-3C08-4C35-B037-12874FC66C35}" type="slidenum">
+            <a:fld id="{44043522-0B92-4099-87CD-55147B625B15}" type="slidenum">
               <a:rPr b="0" lang="ru-RU" sz="1200" spc="-1" strike="noStrike">
                 <a:solidFill>
                   <a:schemeClr val="dk1">
@@ -3888,7 +3888,7 @@
         <p:spPr>
           <a:xfrm>
             <a:off x="838080" y="6356520"/>
-            <a:ext cx="2742120" cy="363960"/>
+            <a:ext cx="2741760" cy="363600"/>
           </a:xfrm>
           <a:prstGeom prst="rect">
             <a:avLst/>
@@ -3974,7 +3974,7 @@
         <p:spPr>
           <a:xfrm>
             <a:off x="987840" y="2975400"/>
-            <a:ext cx="10393920" cy="1854000"/>
+            <a:ext cx="10393560" cy="1853640"/>
           </a:xfrm>
           <a:prstGeom prst="rect">
             <a:avLst/>
@@ -4030,6 +4030,7 @@
                   <a:schemeClr val="dk1"/>
                 </a:solidFill>
                 <a:latin typeface="Calibri Light"/>
+                <a:ea typeface="Microsoft YaHei"/>
               </a:rPr>
               <a:t> Информационная система комплексной оценки надежности поставщиков</a:t>
             </a:r>
@@ -4055,7 +4056,7 @@
         <p:spPr>
           <a:xfrm>
             <a:off x="6185160" y="5002920"/>
-            <a:ext cx="6005880" cy="1854000"/>
+            <a:ext cx="6005520" cy="1853640"/>
           </a:xfrm>
           <a:prstGeom prst="rect">
             <a:avLst/>
@@ -4080,7 +4081,7 @@
               </a:tabLst>
             </a:pPr>
             <a:r>
-              <a:rPr b="0" i="1" lang="ru-RU" sz="1600" spc="-1" strike="noStrike">
+              <a:rPr b="0" lang="ru-RU" sz="1600" spc="-1" strike="noStrike">
                 <a:solidFill>
                   <a:schemeClr val="dk1"/>
                 </a:solidFill>
@@ -4107,7 +4108,7 @@
               </a:tabLst>
             </a:pPr>
             <a:r>
-              <a:rPr b="0" i="1" lang="ru-RU" sz="1600" spc="-1" strike="noStrike">
+              <a:rPr b="0" lang="ru-RU" sz="1600" spc="-1" strike="noStrike">
                 <a:solidFill>
                   <a:schemeClr val="dk1"/>
                 </a:solidFill>
@@ -4151,7 +4152,7 @@
               </a:tabLst>
             </a:pPr>
             <a:r>
-              <a:rPr b="0" i="1" lang="ru-RU" sz="1600" spc="-1" strike="noStrike">
+              <a:rPr b="0" lang="ru-RU" sz="1600" spc="-1" strike="noStrike">
                 <a:solidFill>
                   <a:schemeClr val="dk1"/>
                 </a:solidFill>
@@ -4178,7 +4179,7 @@
               </a:tabLst>
             </a:pPr>
             <a:r>
-              <a:rPr b="0" i="1" lang="ru-RU" sz="1600" spc="-1" strike="noStrike">
+              <a:rPr b="0" lang="ru-RU" sz="1600" spc="-1" strike="noStrike">
                 <a:solidFill>
                   <a:schemeClr val="dk1"/>
                 </a:solidFill>
@@ -4209,7 +4210,7 @@
         <p:spPr>
           <a:xfrm>
             <a:off x="11070720" y="-322920"/>
-            <a:ext cx="2241720" cy="2241720"/>
+            <a:ext cx="2241360" cy="2241360"/>
           </a:xfrm>
           <a:prstGeom prst="rect">
             <a:avLst/>
@@ -4239,7 +4240,7 @@
         <p:spPr>
           <a:xfrm>
             <a:off x="-885240" y="732600"/>
-            <a:ext cx="2241720" cy="2241720"/>
+            <a:ext cx="2241360" cy="2241360"/>
           </a:xfrm>
           <a:prstGeom prst="rect">
             <a:avLst/>
@@ -4265,7 +4266,7 @@
         <p:spPr>
           <a:xfrm>
             <a:off x="1772640" y="148320"/>
-            <a:ext cx="8823600" cy="2705760"/>
+            <a:ext cx="8823240" cy="2705400"/>
           </a:xfrm>
           <a:prstGeom prst="rect">
             <a:avLst/>
@@ -4503,7 +4504,7 @@
         <p:spPr>
           <a:xfrm>
             <a:off x="5326920" y="6444720"/>
-            <a:ext cx="1674720" cy="325080"/>
+            <a:ext cx="1674360" cy="324720"/>
           </a:xfrm>
           <a:prstGeom prst="rect">
             <a:avLst/>
@@ -4533,7 +4534,7 @@
               </a:tabLst>
             </a:pPr>
             <a:r>
-              <a:rPr b="0" i="1" lang="ru-RU" sz="1600" spc="-1" strike="noStrike">
+              <a:rPr b="0" lang="ru-RU" sz="1600" spc="-1" strike="noStrike">
                 <a:solidFill>
                   <a:schemeClr val="dk1"/>
                 </a:solidFill>
@@ -4594,7 +4595,7 @@
         <p:spPr>
           <a:xfrm>
             <a:off x="2323080" y="102960"/>
-            <a:ext cx="7936200" cy="820800"/>
+            <a:ext cx="7935840" cy="820440"/>
           </a:xfrm>
           <a:prstGeom prst="rect">
             <a:avLst/>
@@ -4634,7 +4635,7 @@
               <a:solidFill>
                 <a:srgbClr val="000000"/>
               </a:solidFill>
-              <a:latin typeface="Calibri"/>
+              <a:latin typeface="Arial"/>
             </a:endParaRPr>
           </a:p>
         </p:txBody>
@@ -4652,7 +4653,7 @@
         <p:spPr>
           <a:xfrm>
             <a:off x="-966240" y="5590800"/>
-            <a:ext cx="2241720" cy="2241720"/>
+            <a:ext cx="2241360" cy="2241360"/>
           </a:xfrm>
           <a:prstGeom prst="rect">
             <a:avLst/>
@@ -4678,7 +4679,7 @@
         <p:spPr>
           <a:xfrm>
             <a:off x="1371600" y="3519000"/>
-            <a:ext cx="183600" cy="368280"/>
+            <a:ext cx="183240" cy="367920"/>
           </a:xfrm>
           <a:prstGeom prst="rect">
             <a:avLst/>
@@ -4781,7 +4782,7 @@
         <p:spPr>
           <a:xfrm>
             <a:off x="10699200" y="-1121400"/>
-            <a:ext cx="2241720" cy="2241720"/>
+            <a:ext cx="2241360" cy="2241360"/>
           </a:xfrm>
           <a:prstGeom prst="rect">
             <a:avLst/>
@@ -4811,7 +4812,7 @@
         <p:spPr>
           <a:xfrm>
             <a:off x="540000" y="1341360"/>
-            <a:ext cx="11020320" cy="1717920"/>
+            <a:ext cx="11019960" cy="1717560"/>
           </a:xfrm>
           <a:prstGeom prst="rect">
             <a:avLst/>
@@ -4834,7 +4835,7 @@
         <p:spPr>
           <a:xfrm>
             <a:off x="180000" y="3673440"/>
-            <a:ext cx="12062160" cy="1365840"/>
+            <a:ext cx="12061800" cy="1365480"/>
           </a:xfrm>
           <a:prstGeom prst="rect">
             <a:avLst/>
@@ -4887,7 +4888,7 @@
         <p:spPr>
           <a:xfrm>
             <a:off x="1495080" y="145800"/>
-            <a:ext cx="9200520" cy="1324440"/>
+            <a:ext cx="9200160" cy="1324080"/>
           </a:xfrm>
           <a:prstGeom prst="rect">
             <a:avLst/>
@@ -4927,7 +4928,7 @@
               <a:solidFill>
                 <a:srgbClr val="000000"/>
               </a:solidFill>
-              <a:latin typeface="Calibri"/>
+              <a:latin typeface="Arial"/>
             </a:endParaRPr>
           </a:p>
         </p:txBody>
@@ -4945,7 +4946,7 @@
         <p:spPr>
           <a:xfrm>
             <a:off x="10862640" y="-771480"/>
-            <a:ext cx="2241720" cy="2241720"/>
+            <a:ext cx="2241360" cy="2241360"/>
           </a:xfrm>
           <a:prstGeom prst="rect">
             <a:avLst/>
@@ -5029,7 +5030,7 @@
         <p:spPr>
           <a:xfrm>
             <a:off x="-819000" y="5221440"/>
-            <a:ext cx="2241720" cy="2241720"/>
+            <a:ext cx="2241360" cy="2241360"/>
           </a:xfrm>
           <a:prstGeom prst="rect">
             <a:avLst/>
@@ -5059,7 +5060,7 @@
         <p:spPr>
           <a:xfrm>
             <a:off x="0" y="1216440"/>
-            <a:ext cx="3974400" cy="4004280"/>
+            <a:ext cx="3974040" cy="4003920"/>
           </a:xfrm>
           <a:prstGeom prst="rect">
             <a:avLst/>
@@ -5082,7 +5083,7 @@
         <p:spPr>
           <a:xfrm>
             <a:off x="4500000" y="1800000"/>
-            <a:ext cx="7405920" cy="3213000"/>
+            <a:ext cx="7405560" cy="3212640"/>
           </a:xfrm>
           <a:prstGeom prst="rect">
             <a:avLst/>
@@ -5135,7 +5136,7 @@
         <p:spPr>
           <a:xfrm>
             <a:off x="643320" y="10080"/>
-            <a:ext cx="10902600" cy="1324440"/>
+            <a:ext cx="10902240" cy="1324080"/>
           </a:xfrm>
           <a:prstGeom prst="rect">
             <a:avLst/>
@@ -5169,11 +5170,11 @@
               </a:rPr>
               <a:t>Сохранение результатов оценки</a:t>
             </a:r>
-            <a:endParaRPr b="1" lang="ru-RU" sz="4400" spc="-1" strike="noStrike">
-              <a:solidFill>
-                <a:srgbClr val="000000"/>
-              </a:solidFill>
-              <a:latin typeface="Calibri"/>
+            <a:endParaRPr b="0" lang="ru-RU" sz="4400" spc="-1" strike="noStrike">
+              <a:solidFill>
+                <a:srgbClr val="000000"/>
+              </a:solidFill>
+              <a:latin typeface="Arial"/>
             </a:endParaRPr>
           </a:p>
         </p:txBody>
@@ -5187,7 +5188,7 @@
         <p:spPr>
           <a:xfrm>
             <a:off x="1371600" y="3519000"/>
-            <a:ext cx="183600" cy="368280"/>
+            <a:ext cx="183240" cy="367920"/>
           </a:xfrm>
           <a:prstGeom prst="rect">
             <a:avLst/>
@@ -5290,7 +5291,7 @@
         <p:spPr>
           <a:xfrm>
             <a:off x="358920" y="1800000"/>
-            <a:ext cx="2520360" cy="2879280"/>
+            <a:ext cx="2520000" cy="2878920"/>
           </a:xfrm>
           <a:prstGeom prst="rect">
             <a:avLst/>
@@ -5313,7 +5314,7 @@
         <p:spPr>
           <a:xfrm>
             <a:off x="2880000" y="1800000"/>
-            <a:ext cx="7600320" cy="1238400"/>
+            <a:ext cx="7599960" cy="1238040"/>
           </a:xfrm>
           <a:prstGeom prst="rect">
             <a:avLst/>
@@ -5336,7 +5337,7 @@
         <p:spPr>
           <a:xfrm>
             <a:off x="2880000" y="3240000"/>
-            <a:ext cx="7450920" cy="2261880"/>
+            <a:ext cx="7450560" cy="2261520"/>
           </a:xfrm>
           <a:prstGeom prst="rect">
             <a:avLst/>
@@ -5359,7 +5360,7 @@
         <p:spPr>
           <a:xfrm>
             <a:off x="11070720" y="-816120"/>
-            <a:ext cx="2241720" cy="2241720"/>
+            <a:ext cx="2241360" cy="2241360"/>
           </a:xfrm>
           <a:prstGeom prst="rect">
             <a:avLst/>
@@ -5389,7 +5390,7 @@
         <p:spPr>
           <a:xfrm>
             <a:off x="-994680" y="5583240"/>
-            <a:ext cx="2241720" cy="2241720"/>
+            <a:ext cx="2241360" cy="2241360"/>
           </a:xfrm>
           <a:prstGeom prst="rect">
             <a:avLst/>
@@ -5449,7 +5450,7 @@
         <p:spPr>
           <a:xfrm>
             <a:off x="547560" y="10080"/>
-            <a:ext cx="11209680" cy="1324440"/>
+            <a:ext cx="11209320" cy="1324080"/>
           </a:xfrm>
           <a:prstGeom prst="rect">
             <a:avLst/>
@@ -5487,7 +5488,7 @@
               <a:solidFill>
                 <a:srgbClr val="000000"/>
               </a:solidFill>
-              <a:latin typeface="Calibri"/>
+              <a:latin typeface="Arial"/>
             </a:endParaRPr>
           </a:p>
         </p:txBody>
@@ -5501,7 +5502,7 @@
         <p:spPr>
           <a:xfrm>
             <a:off x="1371600" y="3519000"/>
-            <a:ext cx="183600" cy="368280"/>
+            <a:ext cx="183240" cy="367920"/>
           </a:xfrm>
           <a:prstGeom prst="rect">
             <a:avLst/>
@@ -5604,7 +5605,7 @@
         <p:spPr>
           <a:xfrm>
             <a:off x="4140000" y="1620000"/>
-            <a:ext cx="4139280" cy="4651920"/>
+            <a:ext cx="4138920" cy="4651560"/>
           </a:xfrm>
           <a:prstGeom prst="rect">
             <a:avLst/>
@@ -5627,7 +5628,7 @@
         <p:spPr>
           <a:xfrm>
             <a:off x="11070720" y="-816120"/>
-            <a:ext cx="2241720" cy="2241720"/>
+            <a:ext cx="2241360" cy="2241360"/>
           </a:xfrm>
           <a:prstGeom prst="rect">
             <a:avLst/>
@@ -5657,7 +5658,7 @@
         <p:spPr>
           <a:xfrm>
             <a:off x="-994680" y="5583240"/>
-            <a:ext cx="2241720" cy="2241720"/>
+            <a:ext cx="2241360" cy="2241360"/>
           </a:xfrm>
           <a:prstGeom prst="rect">
             <a:avLst/>
@@ -5713,7 +5714,7 @@
         <p:spPr>
           <a:xfrm>
             <a:off x="1371600" y="3519000"/>
-            <a:ext cx="183600" cy="368280"/>
+            <a:ext cx="183240" cy="367920"/>
           </a:xfrm>
           <a:prstGeom prst="rect">
             <a:avLst/>
@@ -5816,7 +5817,7 @@
         <p:spPr>
           <a:xfrm>
             <a:off x="2340000" y="1222560"/>
-            <a:ext cx="8052840" cy="2196720"/>
+            <a:ext cx="8052480" cy="2196360"/>
           </a:xfrm>
           <a:prstGeom prst="rect">
             <a:avLst/>
@@ -5839,7 +5840,7 @@
         <p:spPr>
           <a:xfrm>
             <a:off x="720000" y="-245160"/>
-            <a:ext cx="10902600" cy="1324440"/>
+            <a:ext cx="10902240" cy="1324080"/>
           </a:xfrm>
           <a:prstGeom prst="rect">
             <a:avLst/>
@@ -5877,7 +5878,7 @@
               <a:solidFill>
                 <a:srgbClr val="000000"/>
               </a:solidFill>
-              <a:latin typeface="Calibri"/>
+              <a:latin typeface="Arial"/>
             </a:endParaRPr>
           </a:p>
         </p:txBody>
@@ -5895,7 +5896,7 @@
         <p:spPr>
           <a:xfrm>
             <a:off x="11070720" y="-816120"/>
-            <a:ext cx="2241720" cy="2241720"/>
+            <a:ext cx="2241360" cy="2241360"/>
           </a:xfrm>
           <a:prstGeom prst="rect">
             <a:avLst/>
@@ -5925,7 +5926,7 @@
         <p:spPr>
           <a:xfrm>
             <a:off x="-994680" y="5583240"/>
-            <a:ext cx="2241720" cy="2241720"/>
+            <a:ext cx="2241360" cy="2241360"/>
           </a:xfrm>
           <a:prstGeom prst="rect">
             <a:avLst/>
@@ -5981,7 +5982,7 @@
         <p:spPr>
           <a:xfrm>
             <a:off x="1371600" y="3519000"/>
-            <a:ext cx="183600" cy="368280"/>
+            <a:ext cx="183240" cy="367920"/>
           </a:xfrm>
           <a:prstGeom prst="rect">
             <a:avLst/>
@@ -6084,7 +6085,7 @@
         <p:spPr>
           <a:xfrm>
             <a:off x="2502720" y="586800"/>
-            <a:ext cx="7396560" cy="2652480"/>
+            <a:ext cx="7396200" cy="2652120"/>
           </a:xfrm>
           <a:prstGeom prst="rect">
             <a:avLst/>
@@ -6107,7 +6108,7 @@
         <p:spPr>
           <a:xfrm>
             <a:off x="2520000" y="3470040"/>
-            <a:ext cx="7357680" cy="2653920"/>
+            <a:ext cx="7357320" cy="2653560"/>
           </a:xfrm>
           <a:prstGeom prst="rect">
             <a:avLst/>
@@ -6130,7 +6131,7 @@
         <p:spPr>
           <a:xfrm>
             <a:off x="11070720" y="-816120"/>
-            <a:ext cx="2241720" cy="2241720"/>
+            <a:ext cx="2241360" cy="2241360"/>
           </a:xfrm>
           <a:prstGeom prst="rect">
             <a:avLst/>
@@ -6160,7 +6161,7 @@
         <p:spPr>
           <a:xfrm>
             <a:off x="-994680" y="5583240"/>
-            <a:ext cx="2241720" cy="2241720"/>
+            <a:ext cx="2241360" cy="2241360"/>
           </a:xfrm>
           <a:prstGeom prst="rect">
             <a:avLst/>
@@ -6216,7 +6217,7 @@
         <p:spPr>
           <a:xfrm>
             <a:off x="5948280" y="6308280"/>
-            <a:ext cx="587160" cy="577440"/>
+            <a:ext cx="586800" cy="577440"/>
           </a:xfrm>
           <a:prstGeom prst="rect">
             <a:avLst/>
@@ -6274,7 +6275,7 @@
         <p:spPr>
           <a:xfrm>
             <a:off x="11070720" y="-816120"/>
-            <a:ext cx="2241720" cy="2241720"/>
+            <a:ext cx="2241360" cy="2241360"/>
           </a:xfrm>
           <a:prstGeom prst="rect">
             <a:avLst/>
@@ -6304,7 +6305,7 @@
         <p:spPr>
           <a:xfrm>
             <a:off x="-994680" y="5583240"/>
-            <a:ext cx="2241720" cy="2241720"/>
+            <a:ext cx="2241360" cy="2241360"/>
           </a:xfrm>
           <a:prstGeom prst="rect">
             <a:avLst/>
@@ -6334,7 +6335,7 @@
         <p:spPr>
           <a:xfrm>
             <a:off x="1030320" y="1260000"/>
-            <a:ext cx="10129680" cy="3960000"/>
+            <a:ext cx="10129320" cy="3959640"/>
           </a:xfrm>
           <a:prstGeom prst="rect">
             <a:avLst/>
@@ -6387,7 +6388,7 @@
         <p:spPr>
           <a:xfrm>
             <a:off x="540000" y="-244440"/>
-            <a:ext cx="11209680" cy="1324440"/>
+            <a:ext cx="11209320" cy="1324080"/>
           </a:xfrm>
           <a:prstGeom prst="rect">
             <a:avLst/>
@@ -6424,7 +6425,7 @@
               <a:solidFill>
                 <a:srgbClr val="000000"/>
               </a:solidFill>
-              <a:latin typeface="Calibri"/>
+              <a:latin typeface="Arial"/>
             </a:endParaRPr>
           </a:p>
         </p:txBody>
@@ -6438,7 +6439,7 @@
         <p:spPr>
           <a:xfrm>
             <a:off x="1371600" y="3519000"/>
-            <a:ext cx="183600" cy="368280"/>
+            <a:ext cx="183240" cy="367920"/>
           </a:xfrm>
           <a:prstGeom prst="rect">
             <a:avLst/>
@@ -6537,7 +6538,7 @@
         <p:spPr>
           <a:xfrm>
             <a:off x="1697400" y="2512080"/>
-            <a:ext cx="12191040" cy="360"/>
+            <a:ext cx="12190680" cy="360"/>
           </a:xfrm>
           <a:prstGeom prst="rect">
             <a:avLst/>
@@ -6586,7 +6587,7 @@
         <p:spPr>
           <a:xfrm>
             <a:off x="1234080" y="1439640"/>
-            <a:ext cx="366840" cy="350640"/>
+            <a:ext cx="366480" cy="350280"/>
           </a:xfrm>
           <a:prstGeom prst="rect">
             <a:avLst/>
@@ -6609,7 +6610,7 @@
         <p:spPr>
           <a:xfrm>
             <a:off x="1173240" y="2284200"/>
-            <a:ext cx="366840" cy="350640"/>
+            <a:ext cx="366480" cy="350280"/>
           </a:xfrm>
           <a:prstGeom prst="rect">
             <a:avLst/>
@@ -6632,7 +6633,7 @@
         <p:spPr>
           <a:xfrm>
             <a:off x="1137960" y="4331160"/>
-            <a:ext cx="366840" cy="350640"/>
+            <a:ext cx="366480" cy="350280"/>
           </a:xfrm>
           <a:prstGeom prst="rect">
             <a:avLst/>
@@ -6655,7 +6656,7 @@
         <p:spPr>
           <a:xfrm>
             <a:off x="1173240" y="5139360"/>
-            <a:ext cx="366840" cy="350640"/>
+            <a:ext cx="366480" cy="350280"/>
           </a:xfrm>
           <a:prstGeom prst="rect">
             <a:avLst/>
@@ -6678,7 +6679,7 @@
         <p:spPr>
           <a:xfrm>
             <a:off x="1173240" y="3522960"/>
-            <a:ext cx="366840" cy="350640"/>
+            <a:ext cx="366480" cy="350280"/>
           </a:xfrm>
           <a:prstGeom prst="rect">
             <a:avLst/>
@@ -6701,7 +6702,7 @@
         <p:spPr>
           <a:xfrm>
             <a:off x="1173240" y="2887560"/>
-            <a:ext cx="366840" cy="350640"/>
+            <a:ext cx="366480" cy="350280"/>
           </a:xfrm>
           <a:prstGeom prst="rect">
             <a:avLst/>
@@ -6724,7 +6725,7 @@
         <p:spPr>
           <a:xfrm>
             <a:off x="1143360" y="5933880"/>
-            <a:ext cx="366840" cy="350640"/>
+            <a:ext cx="366480" cy="350280"/>
           </a:xfrm>
           <a:prstGeom prst="rect">
             <a:avLst/>
@@ -7682,7 +7683,7 @@
         <p:spPr>
           <a:xfrm>
             <a:off x="11070720" y="-816120"/>
-            <a:ext cx="2241720" cy="2241720"/>
+            <a:ext cx="2241360" cy="2241360"/>
           </a:xfrm>
           <a:prstGeom prst="rect">
             <a:avLst/>
@@ -7712,7 +7713,7 @@
         <p:spPr>
           <a:xfrm>
             <a:off x="-994680" y="5583240"/>
-            <a:ext cx="2241720" cy="2241720"/>
+            <a:ext cx="2241360" cy="2241360"/>
           </a:xfrm>
           <a:prstGeom prst="rect">
             <a:avLst/>
@@ -7772,7 +7773,7 @@
         <p:spPr>
           <a:xfrm>
             <a:off x="4272480" y="313560"/>
-            <a:ext cx="3645720" cy="624240"/>
+            <a:ext cx="3645360" cy="623880"/>
           </a:xfrm>
           <a:prstGeom prst="rect">
             <a:avLst/>
@@ -7809,7 +7810,7 @@
               <a:solidFill>
                 <a:srgbClr val="000000"/>
               </a:solidFill>
-              <a:latin typeface="Calibri"/>
+              <a:latin typeface="Arial"/>
             </a:endParaRPr>
           </a:p>
         </p:txBody>
@@ -7823,7 +7824,7 @@
         <p:spPr>
           <a:xfrm>
             <a:off x="1371600" y="3519000"/>
-            <a:ext cx="183600" cy="368280"/>
+            <a:ext cx="183240" cy="367920"/>
           </a:xfrm>
           <a:prstGeom prst="rect">
             <a:avLst/>
@@ -7868,7 +7869,7 @@
         <p:spPr>
           <a:xfrm>
             <a:off x="720000" y="1273680"/>
-            <a:ext cx="11160000" cy="4367520"/>
+            <a:ext cx="11159640" cy="4366800"/>
           </a:xfrm>
           <a:prstGeom prst="rect">
             <a:avLst/>
@@ -7929,7 +7930,7 @@
               <a:solidFill>
                 <a:srgbClr val="000000"/>
               </a:solidFill>
-              <a:latin typeface="Calibri"/>
+              <a:latin typeface="Arial"/>
             </a:endParaRPr>
           </a:p>
           <a:p>
@@ -7973,7 +7974,7 @@
               <a:solidFill>
                 <a:srgbClr val="000000"/>
               </a:solidFill>
-              <a:latin typeface="Calibri"/>
+              <a:latin typeface="Arial"/>
             </a:endParaRPr>
           </a:p>
           <a:p>
@@ -8017,7 +8018,7 @@
               <a:solidFill>
                 <a:srgbClr val="000000"/>
               </a:solidFill>
-              <a:latin typeface="Calibri"/>
+              <a:latin typeface="Arial"/>
             </a:endParaRPr>
           </a:p>
           <a:p>
@@ -8043,6 +8044,7 @@
                   <a:srgbClr val="000000"/>
                 </a:solidFill>
                 <a:latin typeface="Calibri"/>
+                <a:ea typeface="DejaVu Sans"/>
               </a:rPr>
               <a:t> </a:t>
             </a:r>
@@ -8052,6 +8054,7 @@
                   <a:srgbClr val="000000"/>
                 </a:solidFill>
                 <a:latin typeface="Calibri"/>
+                <a:ea typeface="DejaVu Sans"/>
               </a:rPr>
               <a:t>Проведено тестирование и опытная эксплуатация разработанной информационной системы: </a:t>
             </a:r>
@@ -8061,6 +8064,7 @@
                   <a:srgbClr val="000000"/>
                 </a:solidFill>
                 <a:latin typeface="Calibri"/>
+                <a:ea typeface="DejaVu Sans"/>
               </a:rPr>
               <a:t>Ошибок в работе системы не обнаружено, что подтверждает стабильность и корректность функционирования разработанного модуля.</a:t>
             </a:r>
@@ -8068,7 +8072,7 @@
               <a:solidFill>
                 <a:srgbClr val="000000"/>
               </a:solidFill>
-              <a:latin typeface="Calibri"/>
+              <a:latin typeface="Arial"/>
             </a:endParaRPr>
           </a:p>
           <a:p>
@@ -8094,6 +8098,7 @@
                   <a:srgbClr val="000000"/>
                 </a:solidFill>
                 <a:latin typeface="Calibri"/>
+                <a:ea typeface="DejaVu Sans"/>
               </a:rPr>
               <a:t>Оценена экономическая эффективность внедрения разработанного проектного решения:</a:t>
             </a:r>
@@ -8103,6 +8108,7 @@
                   <a:srgbClr val="000000"/>
                 </a:solidFill>
                 <a:latin typeface="Calibri"/>
+                <a:ea typeface="DejaVu Sans"/>
               </a:rPr>
               <a:t> Расчетный срок окупаемости проекта составил 4 месяца, что подтверждает экономическую целесообразность и практическую значимость разработанной системы.</a:t>
             </a:r>
@@ -8110,7 +8116,7 @@
               <a:solidFill>
                 <a:srgbClr val="000000"/>
               </a:solidFill>
-              <a:latin typeface="Calibri"/>
+              <a:latin typeface="Arial"/>
             </a:endParaRPr>
           </a:p>
         </p:txBody>
@@ -8124,7 +8130,7 @@
         <p:spPr>
           <a:xfrm>
             <a:off x="5948280" y="6308280"/>
-            <a:ext cx="587160" cy="577440"/>
+            <a:ext cx="586800" cy="577440"/>
           </a:xfrm>
           <a:prstGeom prst="rect">
             <a:avLst/>
@@ -8178,7 +8184,7 @@
         <p:spPr>
           <a:xfrm>
             <a:off x="1868400" y="5918040"/>
-            <a:ext cx="8747280" cy="394560"/>
+            <a:ext cx="8746920" cy="394560"/>
           </a:xfrm>
           <a:prstGeom prst="rect">
             <a:avLst/>
@@ -8236,7 +8242,7 @@
         <p:spPr>
           <a:xfrm>
             <a:off x="11070720" y="-816120"/>
-            <a:ext cx="2241720" cy="2241720"/>
+            <a:ext cx="2241360" cy="2241360"/>
           </a:xfrm>
           <a:prstGeom prst="rect">
             <a:avLst/>
@@ -8266,7 +8272,7 @@
         <p:spPr>
           <a:xfrm>
             <a:off x="-994680" y="5583240"/>
-            <a:ext cx="2241720" cy="2241720"/>
+            <a:ext cx="2241360" cy="2241360"/>
           </a:xfrm>
           <a:prstGeom prst="rect">
             <a:avLst/>
@@ -8326,7 +8332,7 @@
         <p:spPr>
           <a:xfrm>
             <a:off x="0" y="2455560"/>
-            <a:ext cx="12240000" cy="1144440"/>
+            <a:ext cx="12239640" cy="1144080"/>
           </a:xfrm>
           <a:prstGeom prst="rect">
             <a:avLst/>
@@ -8363,7 +8369,7 @@
               <a:solidFill>
                 <a:srgbClr val="000000"/>
               </a:solidFill>
-              <a:latin typeface="Calibri"/>
+              <a:latin typeface="Arial"/>
             </a:endParaRPr>
           </a:p>
         </p:txBody>
@@ -8377,7 +8383,7 @@
         <p:spPr>
           <a:xfrm>
             <a:off x="1371600" y="3519000"/>
-            <a:ext cx="183600" cy="368280"/>
+            <a:ext cx="183240" cy="367920"/>
           </a:xfrm>
           <a:prstGeom prst="rect">
             <a:avLst/>
@@ -8432,7 +8438,7 @@
         <p:spPr>
           <a:xfrm>
             <a:off x="3124080" y="353880"/>
-            <a:ext cx="5942520" cy="1796400"/>
+            <a:ext cx="5942160" cy="1796040"/>
           </a:xfrm>
           <a:prstGeom prst="rect">
             <a:avLst/>
@@ -8445,13 +8451,13 @@
       <p:sp>
         <p:nvSpPr>
           <p:cNvPr id="165" name="PlaceHolder 4"/>
-          <p:cNvSpPr txBox="1"/>
+          <p:cNvSpPr/>
           <p:nvPr/>
         </p:nvSpPr>
         <p:spPr>
           <a:xfrm>
             <a:off x="987840" y="3318480"/>
-            <a:ext cx="10393920" cy="1854000"/>
+            <a:ext cx="10393560" cy="1853640"/>
           </a:xfrm>
           <a:prstGeom prst="rect">
             <a:avLst/>
@@ -8461,8 +8467,14 @@
             <a:noFill/>
           </a:ln>
         </p:spPr>
+        <p:style>
+          <a:lnRef idx="0"/>
+          <a:fillRef idx="0"/>
+          <a:effectRef idx="0"/>
+          <a:fontRef idx="minor"/>
+        </p:style>
         <p:txBody>
-          <a:bodyPr anchor="b">
+          <a:bodyPr lIns="90000" rIns="90000" tIns="45000" bIns="45000" anchor="b">
             <a:noAutofit/>
           </a:bodyPr>
           <a:p>
@@ -8506,6 +8518,7 @@
                   <a:schemeClr val="dk1"/>
                 </a:solidFill>
                 <a:latin typeface="Calibri Light"/>
+                <a:ea typeface="Microsoft YaHei"/>
               </a:rPr>
               <a:t> Информационная система комплексной оценки надежности поставщиков</a:t>
             </a:r>
@@ -8521,13 +8534,13 @@
       <p:sp>
         <p:nvSpPr>
           <p:cNvPr id="166" name="PlaceHolder 5"/>
-          <p:cNvSpPr txBox="1"/>
+          <p:cNvSpPr/>
           <p:nvPr/>
         </p:nvSpPr>
         <p:spPr>
           <a:xfrm>
             <a:off x="6185160" y="5346000"/>
-            <a:ext cx="6005880" cy="1854000"/>
+            <a:ext cx="6005520" cy="1853640"/>
           </a:xfrm>
           <a:prstGeom prst="rect">
             <a:avLst/>
@@ -8537,8 +8550,14 @@
             <a:noFill/>
           </a:ln>
         </p:spPr>
+        <p:style>
+          <a:lnRef idx="0"/>
+          <a:fillRef idx="0"/>
+          <a:effectRef idx="0"/>
+          <a:fontRef idx="minor"/>
+        </p:style>
         <p:txBody>
-          <a:bodyPr anchor="t">
+          <a:bodyPr lIns="90000" rIns="90000" tIns="45000" bIns="45000" anchor="t">
             <a:noAutofit/>
           </a:bodyPr>
           <a:p>
@@ -8551,7 +8570,7 @@
               </a:tabLst>
             </a:pPr>
             <a:r>
-              <a:rPr b="0" i="1" lang="ru-RU" sz="1600" spc="-1" strike="noStrike">
+              <a:rPr b="0" lang="ru-RU" sz="1600" spc="-1" strike="noStrike">
                 <a:solidFill>
                   <a:schemeClr val="dk1"/>
                 </a:solidFill>
@@ -8577,7 +8596,7 @@
               </a:tabLst>
             </a:pPr>
             <a:r>
-              <a:rPr b="0" i="1" lang="ru-RU" sz="1600" spc="-1" strike="noStrike">
+              <a:rPr b="0" lang="ru-RU" sz="1600" spc="-1" strike="noStrike">
                 <a:solidFill>
                   <a:schemeClr val="dk1"/>
                 </a:solidFill>
@@ -8619,7 +8638,7 @@
               </a:tabLst>
             </a:pPr>
             <a:r>
-              <a:rPr b="0" i="1" lang="ru-RU" sz="1600" spc="-1" strike="noStrike">
+              <a:rPr b="0" lang="ru-RU" sz="1600" spc="-1" strike="noStrike">
                 <a:solidFill>
                   <a:schemeClr val="dk1"/>
                 </a:solidFill>
@@ -8645,7 +8664,7 @@
               </a:tabLst>
             </a:pPr>
             <a:r>
-              <a:rPr b="0" i="1" lang="ru-RU" sz="1600" spc="-1" strike="noStrike">
+              <a:rPr b="0" lang="ru-RU" sz="1600" spc="-1" strike="noStrike">
                 <a:solidFill>
                   <a:schemeClr val="dk1"/>
                 </a:solidFill>
@@ -8706,7 +8725,7 @@
         <p:spPr>
           <a:xfrm>
             <a:off x="3295080" y="255960"/>
-            <a:ext cx="6078960" cy="531000"/>
+            <a:ext cx="6078600" cy="530640"/>
           </a:xfrm>
           <a:prstGeom prst="rect">
             <a:avLst/>
@@ -8743,7 +8762,7 @@
               <a:solidFill>
                 <a:srgbClr val="000000"/>
               </a:solidFill>
-              <a:latin typeface="Calibri"/>
+              <a:latin typeface="Arial"/>
             </a:endParaRPr>
           </a:p>
         </p:txBody>
@@ -8761,7 +8780,7 @@
         <p:spPr>
           <a:xfrm>
             <a:off x="635040" y="820800"/>
-            <a:ext cx="11244960" cy="1699200"/>
+            <a:ext cx="11244600" cy="1698840"/>
           </a:xfrm>
           <a:prstGeom prst="rect">
             <a:avLst/>
@@ -8777,7 +8796,13 @@
           </a:bodyPr>
           <a:p>
             <a:pPr indent="0">
+              <a:lnSpc>
+                <a:spcPct val="100000"/>
+              </a:lnSpc>
               <a:buNone/>
+              <a:tabLst>
+                <a:tab algn="l" pos="0"/>
+              </a:tabLst>
             </a:pPr>
             <a:r>
               <a:rPr b="0" lang="ru-RU" sz="8000" spc="-1" strike="noStrike">
@@ -8794,7 +8819,6 @@
                 <a:srgbClr val="000000"/>
               </a:solidFill>
               <a:latin typeface="Arial"/>
-              <a:ea typeface="Times New Roman"/>
             </a:endParaRPr>
           </a:p>
         </p:txBody>
@@ -8808,7 +8832,7 @@
         <p:spPr>
           <a:xfrm>
             <a:off x="5947920" y="6308280"/>
-            <a:ext cx="383040" cy="577440"/>
+            <a:ext cx="382680" cy="577440"/>
           </a:xfrm>
           <a:prstGeom prst="rect">
             <a:avLst/>
@@ -8862,7 +8886,7 @@
         <p:spPr>
           <a:xfrm>
             <a:off x="4656960" y="2533320"/>
-            <a:ext cx="2877120" cy="531000"/>
+            <a:ext cx="2876760" cy="530640"/>
           </a:xfrm>
           <a:prstGeom prst="rect">
             <a:avLst/>
@@ -8902,7 +8926,7 @@
               <a:solidFill>
                 <a:srgbClr val="000000"/>
               </a:solidFill>
-              <a:latin typeface="Calibri"/>
+              <a:latin typeface="Arial"/>
             </a:endParaRPr>
           </a:p>
         </p:txBody>
@@ -8916,7 +8940,7 @@
         <p:spPr>
           <a:xfrm>
             <a:off x="1513800" y="2600280"/>
-            <a:ext cx="9765720" cy="1741320"/>
+            <a:ext cx="9765360" cy="1740960"/>
           </a:xfrm>
           <a:prstGeom prst="rect">
             <a:avLst/>
@@ -8961,7 +8985,7 @@
         <p:spPr>
           <a:xfrm>
             <a:off x="5308560" y="3819240"/>
-            <a:ext cx="1573920" cy="531000"/>
+            <a:ext cx="1573560" cy="530640"/>
           </a:xfrm>
           <a:prstGeom prst="rect">
             <a:avLst/>
@@ -9001,7 +9025,7 @@
               <a:solidFill>
                 <a:srgbClr val="000000"/>
               </a:solidFill>
-              <a:latin typeface="Calibri"/>
+              <a:latin typeface="Arial"/>
             </a:endParaRPr>
           </a:p>
         </p:txBody>
@@ -9015,7 +9039,7 @@
         <p:spPr>
           <a:xfrm>
             <a:off x="635040" y="4508640"/>
-            <a:ext cx="11093760" cy="2303640"/>
+            <a:ext cx="11093400" cy="2303280"/>
           </a:xfrm>
           <a:prstGeom prst="rect">
             <a:avLst/>
@@ -9268,7 +9292,7 @@
         <p:spPr>
           <a:xfrm>
             <a:off x="635040" y="3117600"/>
-            <a:ext cx="11319840" cy="699480"/>
+            <a:ext cx="11319480" cy="699480"/>
           </a:xfrm>
           <a:prstGeom prst="rect">
             <a:avLst/>
@@ -9356,7 +9380,7 @@
         <p:spPr>
           <a:xfrm>
             <a:off x="11070720" y="-816120"/>
-            <a:ext cx="2241720" cy="2241720"/>
+            <a:ext cx="2241360" cy="2241360"/>
           </a:xfrm>
           <a:prstGeom prst="rect">
             <a:avLst/>
@@ -9386,7 +9410,7 @@
         <p:spPr>
           <a:xfrm>
             <a:off x="-994680" y="5583240"/>
-            <a:ext cx="2241720" cy="2241720"/>
+            <a:ext cx="2241360" cy="2241360"/>
           </a:xfrm>
           <a:prstGeom prst="rect">
             <a:avLst/>
@@ -9446,7 +9470,7 @@
         <p:spPr>
           <a:xfrm>
             <a:off x="4056120" y="136440"/>
-            <a:ext cx="4078440" cy="531000"/>
+            <a:ext cx="4078080" cy="530640"/>
           </a:xfrm>
           <a:prstGeom prst="rect">
             <a:avLst/>
@@ -9483,7 +9507,7 @@
               <a:solidFill>
                 <a:srgbClr val="000000"/>
               </a:solidFill>
-              <a:latin typeface="Calibri"/>
+              <a:latin typeface="Arial"/>
             </a:endParaRPr>
           </a:p>
         </p:txBody>
@@ -9501,7 +9525,7 @@
         <p:spPr>
           <a:xfrm>
             <a:off x="0" y="668520"/>
-            <a:ext cx="12191040" cy="1059840"/>
+            <a:ext cx="12190680" cy="1059480"/>
           </a:xfrm>
           <a:prstGeom prst="rect">
             <a:avLst/>
@@ -9583,7 +9607,7 @@
         <p:spPr>
           <a:xfrm>
             <a:off x="5947920" y="6308280"/>
-            <a:ext cx="383040" cy="577440"/>
+            <a:ext cx="382680" cy="577440"/>
           </a:xfrm>
           <a:prstGeom prst="rect">
             <a:avLst/>
@@ -9637,7 +9661,7 @@
         <p:spPr>
           <a:xfrm>
             <a:off x="4843800" y="1729440"/>
-            <a:ext cx="2739600" cy="531000"/>
+            <a:ext cx="2739240" cy="530640"/>
           </a:xfrm>
           <a:prstGeom prst="rect">
             <a:avLst/>
@@ -9691,7 +9715,7 @@
         <p:spPr>
           <a:xfrm>
             <a:off x="424080" y="2395080"/>
-            <a:ext cx="6241320" cy="3821040"/>
+            <a:ext cx="6240960" cy="3820680"/>
           </a:xfrm>
           <a:prstGeom prst="rect">
             <a:avLst/>
@@ -9979,7 +10003,7 @@
         <p:spPr>
           <a:xfrm>
             <a:off x="6849360" y="2399400"/>
-            <a:ext cx="4917600" cy="3821040"/>
+            <a:ext cx="4917240" cy="3820680"/>
           </a:xfrm>
           <a:prstGeom prst="rect">
             <a:avLst/>
@@ -10183,7 +10207,7 @@
         <p:spPr>
           <a:xfrm>
             <a:off x="11070720" y="-816120"/>
-            <a:ext cx="2241720" cy="2241720"/>
+            <a:ext cx="2241360" cy="2241360"/>
           </a:xfrm>
           <a:prstGeom prst="rect">
             <a:avLst/>
@@ -10213,7 +10237,7 @@
         <p:spPr>
           <a:xfrm>
             <a:off x="-994680" y="5583240"/>
-            <a:ext cx="2241720" cy="2241720"/>
+            <a:ext cx="2241360" cy="2241360"/>
           </a:xfrm>
           <a:prstGeom prst="rect">
             <a:avLst/>
@@ -10273,7 +10297,7 @@
         <p:spPr>
           <a:xfrm>
             <a:off x="1080000" y="307080"/>
-            <a:ext cx="9719280" cy="718560"/>
+            <a:ext cx="9718920" cy="718200"/>
           </a:xfrm>
           <a:prstGeom prst="rect">
             <a:avLst/>
@@ -10313,7 +10337,7 @@
               <a:solidFill>
                 <a:srgbClr val="000000"/>
               </a:solidFill>
-              <a:latin typeface="Calibri"/>
+              <a:latin typeface="Arial"/>
             </a:endParaRPr>
           </a:p>
         </p:txBody>
@@ -10331,7 +10355,7 @@
         <p:spPr>
           <a:xfrm>
             <a:off x="11070720" y="-843120"/>
-            <a:ext cx="2241720" cy="2241720"/>
+            <a:ext cx="2241360" cy="2241360"/>
           </a:xfrm>
           <a:prstGeom prst="rect">
             <a:avLst/>
@@ -10361,7 +10385,7 @@
         <p:spPr>
           <a:xfrm>
             <a:off x="-994680" y="5556240"/>
-            <a:ext cx="2241720" cy="2241720"/>
+            <a:ext cx="2241360" cy="2241360"/>
           </a:xfrm>
           <a:prstGeom prst="rect">
             <a:avLst/>
@@ -10387,7 +10411,7 @@
         <p:spPr>
           <a:xfrm>
             <a:off x="5947920" y="6308280"/>
-            <a:ext cx="383040" cy="577440"/>
+            <a:ext cx="382680" cy="577440"/>
           </a:xfrm>
           <a:prstGeom prst="rect">
             <a:avLst/>
@@ -10445,7 +10469,7 @@
         <p:spPr>
           <a:xfrm>
             <a:off x="720000" y="1620000"/>
-            <a:ext cx="5313960" cy="3713040"/>
+            <a:ext cx="5313600" cy="3712680"/>
           </a:xfrm>
           <a:prstGeom prst="rect">
             <a:avLst/>
@@ -10468,7 +10492,7 @@
         <p:spPr>
           <a:xfrm>
             <a:off x="6278040" y="1620000"/>
-            <a:ext cx="5241600" cy="3669840"/>
+            <a:ext cx="5241240" cy="3669480"/>
           </a:xfrm>
           <a:prstGeom prst="rect">
             <a:avLst/>
@@ -10521,7 +10545,7 @@
         <p:spPr>
           <a:xfrm>
             <a:off x="540000" y="180360"/>
-            <a:ext cx="11519280" cy="1324440"/>
+            <a:ext cx="11518920" cy="1324080"/>
           </a:xfrm>
           <a:prstGeom prst="rect">
             <a:avLst/>
@@ -10576,7 +10600,7 @@
               <a:solidFill>
                 <a:srgbClr val="000000"/>
               </a:solidFill>
-              <a:latin typeface="Calibri"/>
+              <a:latin typeface="Arial"/>
             </a:endParaRPr>
           </a:p>
         </p:txBody>
@@ -10590,7 +10614,7 @@
         <p:spPr>
           <a:xfrm>
             <a:off x="5947920" y="6308280"/>
-            <a:ext cx="383040" cy="577440"/>
+            <a:ext cx="382680" cy="577440"/>
           </a:xfrm>
           <a:prstGeom prst="rect">
             <a:avLst/>
@@ -10648,7 +10672,7 @@
         <p:spPr>
           <a:xfrm>
             <a:off x="3242880" y="1786680"/>
-            <a:ext cx="6476760" cy="4512960"/>
+            <a:ext cx="6476400" cy="4512600"/>
           </a:xfrm>
           <a:prstGeom prst="rect">
             <a:avLst/>
@@ -10671,7 +10695,7 @@
         <p:spPr>
           <a:xfrm>
             <a:off x="11070720" y="-816120"/>
-            <a:ext cx="2241720" cy="2241720"/>
+            <a:ext cx="2241360" cy="2241360"/>
           </a:xfrm>
           <a:prstGeom prst="rect">
             <a:avLst/>
@@ -10701,7 +10725,7 @@
         <p:spPr>
           <a:xfrm>
             <a:off x="-994680" y="5583240"/>
-            <a:ext cx="2241720" cy="2241720"/>
+            <a:ext cx="2241360" cy="2241360"/>
           </a:xfrm>
           <a:prstGeom prst="rect">
             <a:avLst/>
@@ -10761,7 +10785,7 @@
         <p:spPr>
           <a:xfrm>
             <a:off x="342360" y="369360"/>
-            <a:ext cx="11504520" cy="755280"/>
+            <a:ext cx="11504160" cy="754920"/>
           </a:xfrm>
           <a:prstGeom prst="rect">
             <a:avLst/>
@@ -10801,7 +10825,7 @@
               <a:solidFill>
                 <a:srgbClr val="000000"/>
               </a:solidFill>
-              <a:latin typeface="Calibri"/>
+              <a:latin typeface="Arial"/>
             </a:endParaRPr>
           </a:p>
         </p:txBody>
@@ -10815,7 +10839,7 @@
         <p:spPr>
           <a:xfrm>
             <a:off x="0" y="0"/>
-            <a:ext cx="12191040" cy="360"/>
+            <a:ext cx="12190680" cy="360"/>
           </a:xfrm>
           <a:prstGeom prst="rect">
             <a:avLst/>
@@ -10860,7 +10884,7 @@
         <p:spPr>
           <a:xfrm>
             <a:off x="5947920" y="6308280"/>
-            <a:ext cx="383040" cy="577440"/>
+            <a:ext cx="382680" cy="577440"/>
           </a:xfrm>
           <a:prstGeom prst="rect">
             <a:avLst/>
@@ -13754,7 +13778,7 @@
         <p:spPr>
           <a:xfrm>
             <a:off x="11070720" y="-816120"/>
-            <a:ext cx="2241720" cy="2241720"/>
+            <a:ext cx="2241360" cy="2241360"/>
           </a:xfrm>
           <a:prstGeom prst="rect">
             <a:avLst/>
@@ -13784,7 +13808,7 @@
         <p:spPr>
           <a:xfrm>
             <a:off x="-994680" y="5583240"/>
-            <a:ext cx="2241720" cy="2241720"/>
+            <a:ext cx="2241360" cy="2241360"/>
           </a:xfrm>
           <a:prstGeom prst="rect">
             <a:avLst/>
@@ -13844,7 +13868,7 @@
         <p:spPr>
           <a:xfrm>
             <a:off x="1218240" y="270000"/>
-            <a:ext cx="9754560" cy="1324440"/>
+            <a:ext cx="9754200" cy="1324080"/>
           </a:xfrm>
           <a:prstGeom prst="rect">
             <a:avLst/>
@@ -13887,7 +13911,7 @@
               <a:solidFill>
                 <a:srgbClr val="000000"/>
               </a:solidFill>
-              <a:latin typeface="Calibri"/>
+              <a:latin typeface="Arial"/>
             </a:endParaRPr>
           </a:p>
         </p:txBody>
@@ -13901,7 +13925,7 @@
         <p:spPr>
           <a:xfrm>
             <a:off x="1371600" y="3519000"/>
-            <a:ext cx="183600" cy="368280"/>
+            <a:ext cx="183240" cy="367920"/>
           </a:xfrm>
           <a:prstGeom prst="rect">
             <a:avLst/>
@@ -13946,7 +13970,7 @@
         <p:spPr>
           <a:xfrm>
             <a:off x="6050160" y="6308280"/>
-            <a:ext cx="383040" cy="577440"/>
+            <a:ext cx="382680" cy="577440"/>
           </a:xfrm>
           <a:prstGeom prst="rect">
             <a:avLst/>
@@ -14004,7 +14028,7 @@
         <p:spPr>
           <a:xfrm>
             <a:off x="2340000" y="1611720"/>
-            <a:ext cx="7559280" cy="4147560"/>
+            <a:ext cx="7558920" cy="4147200"/>
           </a:xfrm>
           <a:prstGeom prst="rect">
             <a:avLst/>
@@ -14027,7 +14051,7 @@
         <p:spPr>
           <a:xfrm>
             <a:off x="11070720" y="-816120"/>
-            <a:ext cx="2241720" cy="2241720"/>
+            <a:ext cx="2241360" cy="2241360"/>
           </a:xfrm>
           <a:prstGeom prst="rect">
             <a:avLst/>
@@ -14057,7 +14081,7 @@
         <p:spPr>
           <a:xfrm>
             <a:off x="-994680" y="5583240"/>
-            <a:ext cx="2241720" cy="2241720"/>
+            <a:ext cx="2241360" cy="2241360"/>
           </a:xfrm>
           <a:prstGeom prst="rect">
             <a:avLst/>
@@ -14117,7 +14141,7 @@
         <p:spPr>
           <a:xfrm>
             <a:off x="2674080" y="0"/>
-            <a:ext cx="7765200" cy="718560"/>
+            <a:ext cx="7764840" cy="718200"/>
           </a:xfrm>
           <a:prstGeom prst="rect">
             <a:avLst/>
@@ -14157,7 +14181,7 @@
               <a:solidFill>
                 <a:srgbClr val="000000"/>
               </a:solidFill>
-              <a:latin typeface="Calibri"/>
+              <a:latin typeface="Arial"/>
             </a:endParaRPr>
           </a:p>
         </p:txBody>
@@ -14175,7 +14199,7 @@
         <p:spPr>
           <a:xfrm>
             <a:off x="11070720" y="-585360"/>
-            <a:ext cx="2241720" cy="2241720"/>
+            <a:ext cx="2241360" cy="2241360"/>
           </a:xfrm>
           <a:prstGeom prst="rect">
             <a:avLst/>
@@ -14201,7 +14225,7 @@
         <p:spPr>
           <a:xfrm>
             <a:off x="5947920" y="6308280"/>
-            <a:ext cx="383040" cy="577440"/>
+            <a:ext cx="382680" cy="577440"/>
           </a:xfrm>
           <a:prstGeom prst="rect">
             <a:avLst/>
@@ -14259,7 +14283,7 @@
         <p:spPr>
           <a:xfrm>
             <a:off x="-994680" y="5556240"/>
-            <a:ext cx="2241720" cy="2241720"/>
+            <a:ext cx="2241360" cy="2241360"/>
           </a:xfrm>
           <a:prstGeom prst="rect">
             <a:avLst/>
@@ -14289,7 +14313,7 @@
         <p:spPr>
           <a:xfrm>
             <a:off x="3060000" y="837360"/>
-            <a:ext cx="6263280" cy="5641920"/>
+            <a:ext cx="6262920" cy="5641560"/>
           </a:xfrm>
           <a:prstGeom prst="rect">
             <a:avLst/>
@@ -14342,7 +14366,7 @@
         <p:spPr>
           <a:xfrm>
             <a:off x="1620000" y="0"/>
-            <a:ext cx="8819280" cy="705600"/>
+            <a:ext cx="8818920" cy="705240"/>
           </a:xfrm>
           <a:prstGeom prst="rect">
             <a:avLst/>
@@ -14378,11 +14402,11 @@
               </a:rPr>
               <a:t>Структура метаданных информационной системы</a:t>
             </a:r>
-            <a:endParaRPr b="1" lang="ru-RU" sz="3600" spc="-1" strike="noStrike">
-              <a:solidFill>
-                <a:srgbClr val="000000"/>
-              </a:solidFill>
-              <a:latin typeface="Calibri"/>
+            <a:endParaRPr b="0" lang="ru-RU" sz="3600" spc="-1" strike="noStrike">
+              <a:solidFill>
+                <a:srgbClr val="000000"/>
+              </a:solidFill>
+              <a:latin typeface="Arial"/>
             </a:endParaRPr>
           </a:p>
         </p:txBody>
@@ -14400,7 +14424,7 @@
         <p:spPr>
           <a:xfrm>
             <a:off x="10845720" y="-1278360"/>
-            <a:ext cx="2241720" cy="2241720"/>
+            <a:ext cx="2241360" cy="2241360"/>
           </a:xfrm>
           <a:prstGeom prst="rect">
             <a:avLst/>
@@ -14430,7 +14454,7 @@
         <p:spPr>
           <a:xfrm>
             <a:off x="-966240" y="5590800"/>
-            <a:ext cx="2241720" cy="2241720"/>
+            <a:ext cx="2241360" cy="2241360"/>
           </a:xfrm>
           <a:prstGeom prst="rect">
             <a:avLst/>
@@ -14456,7 +14480,7 @@
         <p:spPr>
           <a:xfrm>
             <a:off x="5925960" y="6273360"/>
-            <a:ext cx="383040" cy="577440"/>
+            <a:ext cx="382680" cy="577440"/>
           </a:xfrm>
           <a:prstGeom prst="rect">
             <a:avLst/>
@@ -14514,7 +14538,7 @@
         <p:spPr>
           <a:xfrm>
             <a:off x="1986480" y="1162800"/>
-            <a:ext cx="8632800" cy="4236480"/>
+            <a:ext cx="8632440" cy="4236120"/>
           </a:xfrm>
           <a:prstGeom prst="rect">
             <a:avLst/>

--- a/Презентацияя.pptx
+++ b/Презентацияя.pptx
@@ -361,7 +361,7 @@
             <a:pPr indent="0" algn="r">
               <a:buNone/>
             </a:pPr>
-            <a:fld id="{CCCFA6A0-0A3C-47DC-A859-7D603A349129}" type="slidenum">
+            <a:fld id="{0E91D209-2415-404E-BA1F-D45F467A98E8}" type="slidenum">
               <a:rPr b="0" lang="ru-RU" sz="1400" spc="-1" strike="noStrike">
                 <a:solidFill>
                   <a:srgbClr val="000000"/>
@@ -415,7 +415,7 @@
         <p:spPr>
           <a:xfrm>
             <a:off x="685800" y="1143000"/>
-            <a:ext cx="5484960" cy="3084840"/>
+            <a:ext cx="5484600" cy="3084480"/>
           </a:xfrm>
           <a:prstGeom prst="rect">
             <a:avLst/>
@@ -438,7 +438,7 @@
         <p:spPr>
           <a:xfrm>
             <a:off x="685800" y="4400640"/>
-            <a:ext cx="5484960" cy="3598920"/>
+            <a:ext cx="5484600" cy="3598560"/>
           </a:xfrm>
           <a:prstGeom prst="rect">
             <a:avLst/>
@@ -478,7 +478,7 @@
         <p:spPr>
           <a:xfrm>
             <a:off x="3884760" y="8685360"/>
-            <a:ext cx="2970360" cy="457200"/>
+            <a:ext cx="2970000" cy="456840"/>
           </a:xfrm>
           <a:prstGeom prst="rect">
             <a:avLst/>
@@ -519,7 +519,7 @@
                 <a:tab algn="l" pos="0"/>
               </a:tabLst>
             </a:pPr>
-            <a:fld id="{B793C74A-003B-47DC-A18F-2A9C8D2096C5}" type="slidenum">
+            <a:fld id="{BE951D12-F639-414B-AC03-493FD93CAEFC}" type="slidenum">
               <a:rPr b="0" lang="ru-RU" sz="1200" spc="-1" strike="noStrike">
                 <a:solidFill>
                   <a:srgbClr val="000000"/>
@@ -572,7 +572,7 @@
         <p:spPr>
           <a:xfrm>
             <a:off x="838080" y="365040"/>
-            <a:ext cx="10514160" cy="1324080"/>
+            <a:ext cx="10513800" cy="1323720"/>
           </a:xfrm>
           <a:prstGeom prst="rect">
             <a:avLst/>
@@ -612,7 +612,7 @@
         <p:spPr>
           <a:xfrm>
             <a:off x="838080" y="1825560"/>
-            <a:ext cx="10514160" cy="4349880"/>
+            <a:ext cx="10513800" cy="4349520"/>
           </a:xfrm>
           <a:prstGeom prst="rect">
             <a:avLst/>
@@ -673,7 +673,7 @@
         <p:txBody>
           <a:bodyPr/>
           <a:p>
-            <a:fld id="{DBFAA648-EB33-4878-89B2-E88EA329D08F}" type="slidenum">
+            <a:fld id="{C1B7BDE0-4888-4824-9C1D-4BB7A7497487}" type="slidenum">
               <a:t>&lt;#&gt;</a:t>
             </a:fld>
           </a:p>
@@ -735,7 +735,7 @@
         <p:spPr>
           <a:xfrm>
             <a:off x="838080" y="365040"/>
-            <a:ext cx="10514160" cy="1324080"/>
+            <a:ext cx="10513800" cy="1323720"/>
           </a:xfrm>
           <a:prstGeom prst="rect">
             <a:avLst/>
@@ -775,7 +775,7 @@
         <p:spPr>
           <a:xfrm>
             <a:off x="838080" y="1825560"/>
-            <a:ext cx="10514160" cy="4349880"/>
+            <a:ext cx="10513800" cy="4349520"/>
           </a:xfrm>
           <a:prstGeom prst="rect">
             <a:avLst/>
@@ -839,7 +839,7 @@
         <p:txBody>
           <a:bodyPr/>
           <a:p>
-            <a:fld id="{44F79816-0E68-4BC5-B5D0-68FBAA61CF62}" type="slidenum">
+            <a:fld id="{D1EE9D62-1CAE-4DCA-BF65-9A4F7FDCAE6A}" type="slidenum">
               <a:t>&lt;#&gt;</a:t>
             </a:fld>
           </a:p>
@@ -901,7 +901,7 @@
         <p:spPr>
           <a:xfrm>
             <a:off x="838080" y="365040"/>
-            <a:ext cx="10514160" cy="1324080"/>
+            <a:ext cx="10513800" cy="1323720"/>
           </a:xfrm>
           <a:prstGeom prst="rect">
             <a:avLst/>
@@ -941,7 +941,7 @@
         <p:spPr>
           <a:xfrm>
             <a:off x="838080" y="1825560"/>
-            <a:ext cx="10514160" cy="4349880"/>
+            <a:ext cx="10513800" cy="4349520"/>
           </a:xfrm>
           <a:prstGeom prst="rect">
             <a:avLst/>
@@ -1005,7 +1005,7 @@
         <p:txBody>
           <a:bodyPr/>
           <a:p>
-            <a:fld id="{AD5F05BF-C7E7-429D-8297-5CAE9A5490A2}" type="slidenum">
+            <a:fld id="{45109CC1-76B0-4CEB-B399-2D9C2048DBCF}" type="slidenum">
               <a:t>&lt;#&gt;</a:t>
             </a:fld>
           </a:p>
@@ -1067,7 +1067,7 @@
         <p:spPr>
           <a:xfrm>
             <a:off x="838080" y="365040"/>
-            <a:ext cx="10514160" cy="1324080"/>
+            <a:ext cx="10513800" cy="1323720"/>
           </a:xfrm>
           <a:prstGeom prst="rect">
             <a:avLst/>
@@ -1107,7 +1107,7 @@
         <p:spPr>
           <a:xfrm>
             <a:off x="838080" y="1825560"/>
-            <a:ext cx="10514160" cy="4349880"/>
+            <a:ext cx="10513800" cy="4349520"/>
           </a:xfrm>
           <a:prstGeom prst="rect">
             <a:avLst/>
@@ -1171,7 +1171,7 @@
         <p:txBody>
           <a:bodyPr/>
           <a:p>
-            <a:fld id="{58A6E60D-97A3-4207-A779-08A1EEDE2399}" type="slidenum">
+            <a:fld id="{7A3BFFE9-9415-4C13-AE1E-F402E441879E}" type="slidenum">
               <a:t>&lt;#&gt;</a:t>
             </a:fld>
           </a:p>
@@ -1233,7 +1233,7 @@
         <p:spPr>
           <a:xfrm>
             <a:off x="838080" y="365040"/>
-            <a:ext cx="10514160" cy="1324080"/>
+            <a:ext cx="10513800" cy="1323720"/>
           </a:xfrm>
           <a:prstGeom prst="rect">
             <a:avLst/>
@@ -1273,7 +1273,7 @@
         <p:spPr>
           <a:xfrm>
             <a:off x="838080" y="1825560"/>
-            <a:ext cx="10514160" cy="4349880"/>
+            <a:ext cx="10513800" cy="4349520"/>
           </a:xfrm>
           <a:prstGeom prst="rect">
             <a:avLst/>
@@ -1337,7 +1337,7 @@
         <p:txBody>
           <a:bodyPr/>
           <a:p>
-            <a:fld id="{5402AEA2-6B0C-4F07-99E4-AEA652B22D21}" type="slidenum">
+            <a:fld id="{7A331DF2-B463-40A9-8E9F-DA5BDC09C1C6}" type="slidenum">
               <a:t>&lt;#&gt;</a:t>
             </a:fld>
           </a:p>
@@ -1406,7 +1406,7 @@
         <p:spPr>
           <a:xfrm>
             <a:off x="838080" y="365040"/>
-            <a:ext cx="10514160" cy="1324080"/>
+            <a:ext cx="10513800" cy="1323720"/>
           </a:xfrm>
           <a:prstGeom prst="rect">
             <a:avLst/>
@@ -1455,7 +1455,7 @@
         <p:spPr>
           <a:xfrm>
             <a:off x="4038480" y="6356520"/>
-            <a:ext cx="4113360" cy="363600"/>
+            <a:ext cx="4113000" cy="363240"/>
           </a:xfrm>
           <a:prstGeom prst="rect">
             <a:avLst/>
@@ -1527,7 +1527,7 @@
         <p:spPr>
           <a:xfrm>
             <a:off x="8610480" y="6356520"/>
-            <a:ext cx="2741760" cy="363600"/>
+            <a:ext cx="2741400" cy="363240"/>
           </a:xfrm>
           <a:prstGeom prst="rect">
             <a:avLst/>
@@ -1570,7 +1570,7 @@
                 <a:tab algn="l" pos="0"/>
               </a:tabLst>
             </a:pPr>
-            <a:fld id="{E9EB89DD-F1DF-42CA-B3F2-112A1069F705}" type="slidenum">
+            <a:fld id="{12BCF021-ECCD-4E84-9771-C92BC7D5CFEB}" type="slidenum">
               <a:rPr b="0" lang="ru-RU" sz="1200" spc="-1" strike="noStrike">
                 <a:solidFill>
                   <a:schemeClr val="dk1">
@@ -1603,7 +1603,7 @@
         <p:spPr>
           <a:xfrm>
             <a:off x="838080" y="6356520"/>
-            <a:ext cx="2741760" cy="363600"/>
+            <a:ext cx="2741400" cy="363240"/>
           </a:xfrm>
           <a:prstGeom prst="rect">
             <a:avLst/>
@@ -1921,7 +1921,7 @@
         <p:spPr>
           <a:xfrm>
             <a:off x="838080" y="365040"/>
-            <a:ext cx="10514160" cy="1324080"/>
+            <a:ext cx="10513800" cy="1323720"/>
           </a:xfrm>
           <a:prstGeom prst="rect">
             <a:avLst/>
@@ -1970,7 +1970,7 @@
         <p:spPr>
           <a:xfrm>
             <a:off x="838080" y="1825560"/>
-            <a:ext cx="10514160" cy="4349880"/>
+            <a:ext cx="10513800" cy="4349520"/>
           </a:xfrm>
           <a:prstGeom prst="rect">
             <a:avLst/>
@@ -2195,7 +2195,7 @@
         <p:spPr>
           <a:xfrm>
             <a:off x="4038480" y="6356520"/>
-            <a:ext cx="4113360" cy="363600"/>
+            <a:ext cx="4113000" cy="363240"/>
           </a:xfrm>
           <a:prstGeom prst="rect">
             <a:avLst/>
@@ -2267,7 +2267,7 @@
         <p:spPr>
           <a:xfrm>
             <a:off x="8610480" y="6356520"/>
-            <a:ext cx="2741760" cy="363600"/>
+            <a:ext cx="2741400" cy="363240"/>
           </a:xfrm>
           <a:prstGeom prst="rect">
             <a:avLst/>
@@ -2310,7 +2310,7 @@
                 <a:tab algn="l" pos="0"/>
               </a:tabLst>
             </a:pPr>
-            <a:fld id="{EBAD2970-52BB-4817-8A71-336808D785A1}" type="slidenum">
+            <a:fld id="{ABB3B6F3-344C-4AAC-A95C-075818B282BF}" type="slidenum">
               <a:rPr b="0" lang="ru-RU" sz="1200" spc="-1" strike="noStrike">
                 <a:solidFill>
                   <a:schemeClr val="dk1">
@@ -2343,7 +2343,7 @@
         <p:spPr>
           <a:xfrm>
             <a:off x="838080" y="6356520"/>
-            <a:ext cx="2741760" cy="363600"/>
+            <a:ext cx="2741400" cy="363240"/>
           </a:xfrm>
           <a:prstGeom prst="rect">
             <a:avLst/>
@@ -2436,7 +2436,7 @@
         <p:spPr>
           <a:xfrm>
             <a:off x="838080" y="365040"/>
-            <a:ext cx="10514160" cy="1324080"/>
+            <a:ext cx="10513800" cy="1323720"/>
           </a:xfrm>
           <a:prstGeom prst="rect">
             <a:avLst/>
@@ -2485,7 +2485,7 @@
         <p:spPr>
           <a:xfrm>
             <a:off x="838080" y="1825560"/>
-            <a:ext cx="10514160" cy="4349880"/>
+            <a:ext cx="10513800" cy="4349520"/>
           </a:xfrm>
           <a:prstGeom prst="rect">
             <a:avLst/>
@@ -2710,7 +2710,7 @@
         <p:spPr>
           <a:xfrm>
             <a:off x="4038480" y="6356520"/>
-            <a:ext cx="4113360" cy="363600"/>
+            <a:ext cx="4113000" cy="363240"/>
           </a:xfrm>
           <a:prstGeom prst="rect">
             <a:avLst/>
@@ -2782,7 +2782,7 @@
         <p:spPr>
           <a:xfrm>
             <a:off x="8610480" y="6356520"/>
-            <a:ext cx="2741760" cy="363600"/>
+            <a:ext cx="2741400" cy="363240"/>
           </a:xfrm>
           <a:prstGeom prst="rect">
             <a:avLst/>
@@ -2825,7 +2825,7 @@
                 <a:tab algn="l" pos="0"/>
               </a:tabLst>
             </a:pPr>
-            <a:fld id="{E1F4BAB7-5DFF-4A4C-857F-1B91D72E74D8}" type="slidenum">
+            <a:fld id="{4DED5257-D9FA-4AC4-9FA7-ED28BBB7B55F}" type="slidenum">
               <a:rPr b="0" lang="ru-RU" sz="1200" spc="-1" strike="noStrike">
                 <a:solidFill>
                   <a:schemeClr val="dk1">
@@ -2858,7 +2858,7 @@
         <p:spPr>
           <a:xfrm>
             <a:off x="838080" y="6356520"/>
-            <a:ext cx="2741760" cy="363600"/>
+            <a:ext cx="2741400" cy="363240"/>
           </a:xfrm>
           <a:prstGeom prst="rect">
             <a:avLst/>
@@ -2951,7 +2951,7 @@
         <p:spPr>
           <a:xfrm>
             <a:off x="838080" y="365040"/>
-            <a:ext cx="10514160" cy="1324080"/>
+            <a:ext cx="10513800" cy="1323720"/>
           </a:xfrm>
           <a:prstGeom prst="rect">
             <a:avLst/>
@@ -3000,7 +3000,7 @@
         <p:spPr>
           <a:xfrm>
             <a:off x="838080" y="1825560"/>
-            <a:ext cx="10514160" cy="4349880"/>
+            <a:ext cx="10513800" cy="4349520"/>
           </a:xfrm>
           <a:prstGeom prst="rect">
             <a:avLst/>
@@ -3225,7 +3225,7 @@
         <p:spPr>
           <a:xfrm>
             <a:off x="4038480" y="6356520"/>
-            <a:ext cx="4113360" cy="363600"/>
+            <a:ext cx="4113000" cy="363240"/>
           </a:xfrm>
           <a:prstGeom prst="rect">
             <a:avLst/>
@@ -3297,7 +3297,7 @@
         <p:spPr>
           <a:xfrm>
             <a:off x="8610480" y="6356520"/>
-            <a:ext cx="2741760" cy="363600"/>
+            <a:ext cx="2741400" cy="363240"/>
           </a:xfrm>
           <a:prstGeom prst="rect">
             <a:avLst/>
@@ -3340,7 +3340,7 @@
                 <a:tab algn="l" pos="0"/>
               </a:tabLst>
             </a:pPr>
-            <a:fld id="{89E370D1-119D-4CC7-9FEF-D80BADD0FC3F}" type="slidenum">
+            <a:fld id="{9A7A09FD-2643-44E4-A709-4937FA7851FA}" type="slidenum">
               <a:rPr b="0" lang="ru-RU" sz="1200" spc="-1" strike="noStrike">
                 <a:solidFill>
                   <a:schemeClr val="dk1">
@@ -3373,7 +3373,7 @@
         <p:spPr>
           <a:xfrm>
             <a:off x="838080" y="6356520"/>
-            <a:ext cx="2741760" cy="363600"/>
+            <a:ext cx="2741400" cy="363240"/>
           </a:xfrm>
           <a:prstGeom prst="rect">
             <a:avLst/>
@@ -3466,7 +3466,7 @@
         <p:spPr>
           <a:xfrm>
             <a:off x="838080" y="365040"/>
-            <a:ext cx="10514160" cy="1324080"/>
+            <a:ext cx="10513800" cy="1323720"/>
           </a:xfrm>
           <a:prstGeom prst="rect">
             <a:avLst/>
@@ -3515,7 +3515,7 @@
         <p:spPr>
           <a:xfrm>
             <a:off x="838080" y="1825560"/>
-            <a:ext cx="10514160" cy="4349880"/>
+            <a:ext cx="10513800" cy="4349520"/>
           </a:xfrm>
           <a:prstGeom prst="rect">
             <a:avLst/>
@@ -3740,7 +3740,7 @@
         <p:spPr>
           <a:xfrm>
             <a:off x="4038480" y="6356520"/>
-            <a:ext cx="4113360" cy="363600"/>
+            <a:ext cx="4113000" cy="363240"/>
           </a:xfrm>
           <a:prstGeom prst="rect">
             <a:avLst/>
@@ -3812,7 +3812,7 @@
         <p:spPr>
           <a:xfrm>
             <a:off x="8610480" y="6356520"/>
-            <a:ext cx="2741760" cy="363600"/>
+            <a:ext cx="2741400" cy="363240"/>
           </a:xfrm>
           <a:prstGeom prst="rect">
             <a:avLst/>
@@ -3855,7 +3855,7 @@
                 <a:tab algn="l" pos="0"/>
               </a:tabLst>
             </a:pPr>
-            <a:fld id="{44043522-0B92-4099-87CD-55147B625B15}" type="slidenum">
+            <a:fld id="{2839A12F-9015-4661-8A62-BE5B8D157112}" type="slidenum">
               <a:rPr b="0" lang="ru-RU" sz="1200" spc="-1" strike="noStrike">
                 <a:solidFill>
                   <a:schemeClr val="dk1">
@@ -3888,7 +3888,7 @@
         <p:spPr>
           <a:xfrm>
             <a:off x="838080" y="6356520"/>
-            <a:ext cx="2741760" cy="363600"/>
+            <a:ext cx="2741400" cy="363240"/>
           </a:xfrm>
           <a:prstGeom prst="rect">
             <a:avLst/>
@@ -3974,7 +3974,7 @@
         <p:spPr>
           <a:xfrm>
             <a:off x="987840" y="2975400"/>
-            <a:ext cx="10393560" cy="1853640"/>
+            <a:ext cx="10393200" cy="1853280"/>
           </a:xfrm>
           <a:prstGeom prst="rect">
             <a:avLst/>
@@ -4056,7 +4056,7 @@
         <p:spPr>
           <a:xfrm>
             <a:off x="6185160" y="5002920"/>
-            <a:ext cx="6005520" cy="1853640"/>
+            <a:ext cx="6005160" cy="1853280"/>
           </a:xfrm>
           <a:prstGeom prst="rect">
             <a:avLst/>
@@ -4210,7 +4210,7 @@
         <p:spPr>
           <a:xfrm>
             <a:off x="11070720" y="-322920"/>
-            <a:ext cx="2241360" cy="2241360"/>
+            <a:ext cx="2241000" cy="2241000"/>
           </a:xfrm>
           <a:prstGeom prst="rect">
             <a:avLst/>
@@ -4240,7 +4240,7 @@
         <p:spPr>
           <a:xfrm>
             <a:off x="-885240" y="732600"/>
-            <a:ext cx="2241360" cy="2241360"/>
+            <a:ext cx="2241000" cy="2241000"/>
           </a:xfrm>
           <a:prstGeom prst="rect">
             <a:avLst/>
@@ -4266,7 +4266,7 @@
         <p:spPr>
           <a:xfrm>
             <a:off x="1772640" y="148320"/>
-            <a:ext cx="8823240" cy="2705400"/>
+            <a:ext cx="8822880" cy="2705040"/>
           </a:xfrm>
           <a:prstGeom prst="rect">
             <a:avLst/>
@@ -4504,7 +4504,7 @@
         <p:spPr>
           <a:xfrm>
             <a:off x="5326920" y="6444720"/>
-            <a:ext cx="1674360" cy="324720"/>
+            <a:ext cx="1674000" cy="324360"/>
           </a:xfrm>
           <a:prstGeom prst="rect">
             <a:avLst/>
@@ -4595,7 +4595,7 @@
         <p:spPr>
           <a:xfrm>
             <a:off x="2323080" y="102960"/>
-            <a:ext cx="7935840" cy="820440"/>
+            <a:ext cx="7935480" cy="820080"/>
           </a:xfrm>
           <a:prstGeom prst="rect">
             <a:avLst/>
@@ -4607,7 +4607,7 @@
         </p:spPr>
         <p:txBody>
           <a:bodyPr lIns="91440" rIns="91440" tIns="45720" bIns="45720" anchor="ctr">
-            <a:normAutofit/>
+            <a:normAutofit fontScale="91111"/>
           </a:bodyPr>
           <a:p>
             <a:pPr indent="0" algn="ctr" defTabSz="457200">
@@ -4629,7 +4629,7 @@
                 </a:solidFill>
                 <a:latin typeface="Calibri"/>
               </a:rPr>
-              <a:t>Справочники</a:t>
+              <a:t>Добавление поставщиков и групп товаров</a:t>
             </a:r>
             <a:endParaRPr b="0" lang="ru-RU" sz="3600" spc="-1" strike="noStrike">
               <a:solidFill>
@@ -4653,7 +4653,7 @@
         <p:spPr>
           <a:xfrm>
             <a:off x="-966240" y="5590800"/>
-            <a:ext cx="2241360" cy="2241360"/>
+            <a:ext cx="2241000" cy="2241000"/>
           </a:xfrm>
           <a:prstGeom prst="rect">
             <a:avLst/>
@@ -4679,7 +4679,7 @@
         <p:spPr>
           <a:xfrm>
             <a:off x="1371600" y="3519000"/>
-            <a:ext cx="183240" cy="367920"/>
+            <a:ext cx="182880" cy="367560"/>
           </a:xfrm>
           <a:prstGeom prst="rect">
             <a:avLst/>
@@ -4782,7 +4782,7 @@
         <p:spPr>
           <a:xfrm>
             <a:off x="10699200" y="-1121400"/>
-            <a:ext cx="2241360" cy="2241360"/>
+            <a:ext cx="2241000" cy="2241000"/>
           </a:xfrm>
           <a:prstGeom prst="rect">
             <a:avLst/>
@@ -4812,7 +4812,7 @@
         <p:spPr>
           <a:xfrm>
             <a:off x="540000" y="1341360"/>
-            <a:ext cx="11019960" cy="1717560"/>
+            <a:ext cx="11019600" cy="1717200"/>
           </a:xfrm>
           <a:prstGeom prst="rect">
             <a:avLst/>
@@ -4835,7 +4835,7 @@
         <p:spPr>
           <a:xfrm>
             <a:off x="180000" y="3673440"/>
-            <a:ext cx="12061800" cy="1365480"/>
+            <a:ext cx="12061440" cy="1365120"/>
           </a:xfrm>
           <a:prstGeom prst="rect">
             <a:avLst/>
@@ -4888,7 +4888,7 @@
         <p:spPr>
           <a:xfrm>
             <a:off x="1495080" y="145800"/>
-            <a:ext cx="9200160" cy="1324080"/>
+            <a:ext cx="9199800" cy="1323720"/>
           </a:xfrm>
           <a:prstGeom prst="rect">
             <a:avLst/>
@@ -4946,7 +4946,7 @@
         <p:spPr>
           <a:xfrm>
             <a:off x="10862640" y="-771480"/>
-            <a:ext cx="2241360" cy="2241360"/>
+            <a:ext cx="2241000" cy="2241000"/>
           </a:xfrm>
           <a:prstGeom prst="rect">
             <a:avLst/>
@@ -5030,7 +5030,7 @@
         <p:spPr>
           <a:xfrm>
             <a:off x="-819000" y="5221440"/>
-            <a:ext cx="2241360" cy="2241360"/>
+            <a:ext cx="2241000" cy="2241000"/>
           </a:xfrm>
           <a:prstGeom prst="rect">
             <a:avLst/>
@@ -5060,7 +5060,7 @@
         <p:spPr>
           <a:xfrm>
             <a:off x="0" y="1216440"/>
-            <a:ext cx="3974040" cy="4003920"/>
+            <a:ext cx="3973680" cy="4003560"/>
           </a:xfrm>
           <a:prstGeom prst="rect">
             <a:avLst/>
@@ -5083,7 +5083,7 @@
         <p:spPr>
           <a:xfrm>
             <a:off x="4500000" y="1800000"/>
-            <a:ext cx="7405560" cy="3212640"/>
+            <a:ext cx="7405200" cy="3212280"/>
           </a:xfrm>
           <a:prstGeom prst="rect">
             <a:avLst/>
@@ -5136,7 +5136,7 @@
         <p:spPr>
           <a:xfrm>
             <a:off x="643320" y="10080"/>
-            <a:ext cx="10902240" cy="1324080"/>
+            <a:ext cx="10901880" cy="1323720"/>
           </a:xfrm>
           <a:prstGeom prst="rect">
             <a:avLst/>
@@ -5188,7 +5188,7 @@
         <p:spPr>
           <a:xfrm>
             <a:off x="1371600" y="3519000"/>
-            <a:ext cx="183240" cy="367920"/>
+            <a:ext cx="182880" cy="367560"/>
           </a:xfrm>
           <a:prstGeom prst="rect">
             <a:avLst/>
@@ -5291,7 +5291,7 @@
         <p:spPr>
           <a:xfrm>
             <a:off x="358920" y="1800000"/>
-            <a:ext cx="2520000" cy="2878920"/>
+            <a:ext cx="2519640" cy="2878560"/>
           </a:xfrm>
           <a:prstGeom prst="rect">
             <a:avLst/>
@@ -5314,7 +5314,7 @@
         <p:spPr>
           <a:xfrm>
             <a:off x="2880000" y="1800000"/>
-            <a:ext cx="7599960" cy="1238040"/>
+            <a:ext cx="7599600" cy="1237680"/>
           </a:xfrm>
           <a:prstGeom prst="rect">
             <a:avLst/>
@@ -5337,7 +5337,7 @@
         <p:spPr>
           <a:xfrm>
             <a:off x="2880000" y="3240000"/>
-            <a:ext cx="7450560" cy="2261520"/>
+            <a:ext cx="7450200" cy="2261160"/>
           </a:xfrm>
           <a:prstGeom prst="rect">
             <a:avLst/>
@@ -5360,7 +5360,7 @@
         <p:spPr>
           <a:xfrm>
             <a:off x="11070720" y="-816120"/>
-            <a:ext cx="2241360" cy="2241360"/>
+            <a:ext cx="2241000" cy="2241000"/>
           </a:xfrm>
           <a:prstGeom prst="rect">
             <a:avLst/>
@@ -5390,7 +5390,7 @@
         <p:spPr>
           <a:xfrm>
             <a:off x="-994680" y="5583240"/>
-            <a:ext cx="2241360" cy="2241360"/>
+            <a:ext cx="2241000" cy="2241000"/>
           </a:xfrm>
           <a:prstGeom prst="rect">
             <a:avLst/>
@@ -5450,7 +5450,7 @@
         <p:spPr>
           <a:xfrm>
             <a:off x="547560" y="10080"/>
-            <a:ext cx="11209320" cy="1324080"/>
+            <a:ext cx="11208960" cy="1323720"/>
           </a:xfrm>
           <a:prstGeom prst="rect">
             <a:avLst/>
@@ -5502,7 +5502,7 @@
         <p:spPr>
           <a:xfrm>
             <a:off x="1371600" y="3519000"/>
-            <a:ext cx="183240" cy="367920"/>
+            <a:ext cx="182880" cy="367560"/>
           </a:xfrm>
           <a:prstGeom prst="rect">
             <a:avLst/>
@@ -5605,7 +5605,7 @@
         <p:spPr>
           <a:xfrm>
             <a:off x="4140000" y="1620000"/>
-            <a:ext cx="4138920" cy="4651560"/>
+            <a:ext cx="4138560" cy="4651200"/>
           </a:xfrm>
           <a:prstGeom prst="rect">
             <a:avLst/>
@@ -5628,7 +5628,7 @@
         <p:spPr>
           <a:xfrm>
             <a:off x="11070720" y="-816120"/>
-            <a:ext cx="2241360" cy="2241360"/>
+            <a:ext cx="2241000" cy="2241000"/>
           </a:xfrm>
           <a:prstGeom prst="rect">
             <a:avLst/>
@@ -5658,7 +5658,7 @@
         <p:spPr>
           <a:xfrm>
             <a:off x="-994680" y="5583240"/>
-            <a:ext cx="2241360" cy="2241360"/>
+            <a:ext cx="2241000" cy="2241000"/>
           </a:xfrm>
           <a:prstGeom prst="rect">
             <a:avLst/>
@@ -5714,7 +5714,7 @@
         <p:spPr>
           <a:xfrm>
             <a:off x="1371600" y="3519000"/>
-            <a:ext cx="183240" cy="367920"/>
+            <a:ext cx="182880" cy="367560"/>
           </a:xfrm>
           <a:prstGeom prst="rect">
             <a:avLst/>
@@ -5817,7 +5817,7 @@
         <p:spPr>
           <a:xfrm>
             <a:off x="2340000" y="1222560"/>
-            <a:ext cx="8052480" cy="2196360"/>
+            <a:ext cx="8052120" cy="2196000"/>
           </a:xfrm>
           <a:prstGeom prst="rect">
             <a:avLst/>
@@ -5840,7 +5840,7 @@
         <p:spPr>
           <a:xfrm>
             <a:off x="720000" y="-245160"/>
-            <a:ext cx="10902240" cy="1324080"/>
+            <a:ext cx="10901880" cy="1323720"/>
           </a:xfrm>
           <a:prstGeom prst="rect">
             <a:avLst/>
@@ -5896,7 +5896,7 @@
         <p:spPr>
           <a:xfrm>
             <a:off x="11070720" y="-816120"/>
-            <a:ext cx="2241360" cy="2241360"/>
+            <a:ext cx="2241000" cy="2241000"/>
           </a:xfrm>
           <a:prstGeom prst="rect">
             <a:avLst/>
@@ -5926,7 +5926,7 @@
         <p:spPr>
           <a:xfrm>
             <a:off x="-994680" y="5583240"/>
-            <a:ext cx="2241360" cy="2241360"/>
+            <a:ext cx="2241000" cy="2241000"/>
           </a:xfrm>
           <a:prstGeom prst="rect">
             <a:avLst/>
@@ -5982,7 +5982,7 @@
         <p:spPr>
           <a:xfrm>
             <a:off x="1371600" y="3519000"/>
-            <a:ext cx="183240" cy="367920"/>
+            <a:ext cx="182880" cy="367560"/>
           </a:xfrm>
           <a:prstGeom prst="rect">
             <a:avLst/>
@@ -6085,7 +6085,7 @@
         <p:spPr>
           <a:xfrm>
             <a:off x="2502720" y="586800"/>
-            <a:ext cx="7396200" cy="2652120"/>
+            <a:ext cx="7395840" cy="2651760"/>
           </a:xfrm>
           <a:prstGeom prst="rect">
             <a:avLst/>
@@ -6108,7 +6108,7 @@
         <p:spPr>
           <a:xfrm>
             <a:off x="2520000" y="3470040"/>
-            <a:ext cx="7357320" cy="2653560"/>
+            <a:ext cx="7356960" cy="2653200"/>
           </a:xfrm>
           <a:prstGeom prst="rect">
             <a:avLst/>
@@ -6131,7 +6131,7 @@
         <p:spPr>
           <a:xfrm>
             <a:off x="11070720" y="-816120"/>
-            <a:ext cx="2241360" cy="2241360"/>
+            <a:ext cx="2241000" cy="2241000"/>
           </a:xfrm>
           <a:prstGeom prst="rect">
             <a:avLst/>
@@ -6161,7 +6161,7 @@
         <p:spPr>
           <a:xfrm>
             <a:off x="-994680" y="5583240"/>
-            <a:ext cx="2241360" cy="2241360"/>
+            <a:ext cx="2241000" cy="2241000"/>
           </a:xfrm>
           <a:prstGeom prst="rect">
             <a:avLst/>
@@ -6217,7 +6217,7 @@
         <p:spPr>
           <a:xfrm>
             <a:off x="5948280" y="6308280"/>
-            <a:ext cx="586800" cy="577440"/>
+            <a:ext cx="586440" cy="577440"/>
           </a:xfrm>
           <a:prstGeom prst="rect">
             <a:avLst/>
@@ -6275,7 +6275,7 @@
         <p:spPr>
           <a:xfrm>
             <a:off x="11070720" y="-816120"/>
-            <a:ext cx="2241360" cy="2241360"/>
+            <a:ext cx="2241000" cy="2241000"/>
           </a:xfrm>
           <a:prstGeom prst="rect">
             <a:avLst/>
@@ -6305,7 +6305,7 @@
         <p:spPr>
           <a:xfrm>
             <a:off x="-994680" y="5583240"/>
-            <a:ext cx="2241360" cy="2241360"/>
+            <a:ext cx="2241000" cy="2241000"/>
           </a:xfrm>
           <a:prstGeom prst="rect">
             <a:avLst/>
@@ -6335,7 +6335,7 @@
         <p:spPr>
           <a:xfrm>
             <a:off x="1030320" y="1260000"/>
-            <a:ext cx="10129320" cy="3959640"/>
+            <a:ext cx="10128960" cy="3959280"/>
           </a:xfrm>
           <a:prstGeom prst="rect">
             <a:avLst/>
@@ -6388,7 +6388,7 @@
         <p:spPr>
           <a:xfrm>
             <a:off x="540000" y="-244440"/>
-            <a:ext cx="11209320" cy="1324080"/>
+            <a:ext cx="11208960" cy="1323720"/>
           </a:xfrm>
           <a:prstGeom prst="rect">
             <a:avLst/>
@@ -6439,7 +6439,7 @@
         <p:spPr>
           <a:xfrm>
             <a:off x="1371600" y="3519000"/>
-            <a:ext cx="183240" cy="367920"/>
+            <a:ext cx="182880" cy="367560"/>
           </a:xfrm>
           <a:prstGeom prst="rect">
             <a:avLst/>
@@ -6538,7 +6538,7 @@
         <p:spPr>
           <a:xfrm>
             <a:off x="1697400" y="2512080"/>
-            <a:ext cx="12190680" cy="360"/>
+            <a:ext cx="12190320" cy="360"/>
           </a:xfrm>
           <a:prstGeom prst="rect">
             <a:avLst/>
@@ -6587,7 +6587,7 @@
         <p:spPr>
           <a:xfrm>
             <a:off x="1234080" y="1439640"/>
-            <a:ext cx="366480" cy="350280"/>
+            <a:ext cx="366120" cy="349920"/>
           </a:xfrm>
           <a:prstGeom prst="rect">
             <a:avLst/>
@@ -6610,7 +6610,7 @@
         <p:spPr>
           <a:xfrm>
             <a:off x="1173240" y="2284200"/>
-            <a:ext cx="366480" cy="350280"/>
+            <a:ext cx="366120" cy="349920"/>
           </a:xfrm>
           <a:prstGeom prst="rect">
             <a:avLst/>
@@ -6633,7 +6633,7 @@
         <p:spPr>
           <a:xfrm>
             <a:off x="1137960" y="4331160"/>
-            <a:ext cx="366480" cy="350280"/>
+            <a:ext cx="366120" cy="349920"/>
           </a:xfrm>
           <a:prstGeom prst="rect">
             <a:avLst/>
@@ -6656,7 +6656,7 @@
         <p:spPr>
           <a:xfrm>
             <a:off x="1173240" y="5139360"/>
-            <a:ext cx="366480" cy="350280"/>
+            <a:ext cx="366120" cy="349920"/>
           </a:xfrm>
           <a:prstGeom prst="rect">
             <a:avLst/>
@@ -6679,7 +6679,7 @@
         <p:spPr>
           <a:xfrm>
             <a:off x="1173240" y="3522960"/>
-            <a:ext cx="366480" cy="350280"/>
+            <a:ext cx="366120" cy="349920"/>
           </a:xfrm>
           <a:prstGeom prst="rect">
             <a:avLst/>
@@ -6702,7 +6702,7 @@
         <p:spPr>
           <a:xfrm>
             <a:off x="1173240" y="2887560"/>
-            <a:ext cx="366480" cy="350280"/>
+            <a:ext cx="366120" cy="349920"/>
           </a:xfrm>
           <a:prstGeom prst="rect">
             <a:avLst/>
@@ -6725,7 +6725,7 @@
         <p:spPr>
           <a:xfrm>
             <a:off x="1143360" y="5933880"/>
-            <a:ext cx="366480" cy="350280"/>
+            <a:ext cx="366120" cy="349920"/>
           </a:xfrm>
           <a:prstGeom prst="rect">
             <a:avLst/>
@@ -7683,7 +7683,7 @@
         <p:spPr>
           <a:xfrm>
             <a:off x="11070720" y="-816120"/>
-            <a:ext cx="2241360" cy="2241360"/>
+            <a:ext cx="2241000" cy="2241000"/>
           </a:xfrm>
           <a:prstGeom prst="rect">
             <a:avLst/>
@@ -7713,7 +7713,7 @@
         <p:spPr>
           <a:xfrm>
             <a:off x="-994680" y="5583240"/>
-            <a:ext cx="2241360" cy="2241360"/>
+            <a:ext cx="2241000" cy="2241000"/>
           </a:xfrm>
           <a:prstGeom prst="rect">
             <a:avLst/>
@@ -7773,7 +7773,7 @@
         <p:spPr>
           <a:xfrm>
             <a:off x="4272480" y="313560"/>
-            <a:ext cx="3645360" cy="623880"/>
+            <a:ext cx="3645000" cy="623520"/>
           </a:xfrm>
           <a:prstGeom prst="rect">
             <a:avLst/>
@@ -7824,7 +7824,7 @@
         <p:spPr>
           <a:xfrm>
             <a:off x="1371600" y="3519000"/>
-            <a:ext cx="183240" cy="367920"/>
+            <a:ext cx="182880" cy="367560"/>
           </a:xfrm>
           <a:prstGeom prst="rect">
             <a:avLst/>
@@ -7869,7 +7869,7 @@
         <p:spPr>
           <a:xfrm>
             <a:off x="720000" y="1273680"/>
-            <a:ext cx="11159640" cy="4366800"/>
+            <a:ext cx="11159280" cy="4366800"/>
           </a:xfrm>
           <a:prstGeom prst="rect">
             <a:avLst/>
@@ -8130,7 +8130,7 @@
         <p:spPr>
           <a:xfrm>
             <a:off x="5948280" y="6308280"/>
-            <a:ext cx="586800" cy="577440"/>
+            <a:ext cx="586440" cy="577440"/>
           </a:xfrm>
           <a:prstGeom prst="rect">
             <a:avLst/>
@@ -8184,7 +8184,7 @@
         <p:spPr>
           <a:xfrm>
             <a:off x="1868400" y="5918040"/>
-            <a:ext cx="8746920" cy="394560"/>
+            <a:ext cx="8746560" cy="394560"/>
           </a:xfrm>
           <a:prstGeom prst="rect">
             <a:avLst/>
@@ -8242,7 +8242,7 @@
         <p:spPr>
           <a:xfrm>
             <a:off x="11070720" y="-816120"/>
-            <a:ext cx="2241360" cy="2241360"/>
+            <a:ext cx="2241000" cy="2241000"/>
           </a:xfrm>
           <a:prstGeom prst="rect">
             <a:avLst/>
@@ -8272,7 +8272,7 @@
         <p:spPr>
           <a:xfrm>
             <a:off x="-994680" y="5583240"/>
-            <a:ext cx="2241360" cy="2241360"/>
+            <a:ext cx="2241000" cy="2241000"/>
           </a:xfrm>
           <a:prstGeom prst="rect">
             <a:avLst/>
@@ -8332,7 +8332,7 @@
         <p:spPr>
           <a:xfrm>
             <a:off x="0" y="2455560"/>
-            <a:ext cx="12239640" cy="1144080"/>
+            <a:ext cx="12239280" cy="1143720"/>
           </a:xfrm>
           <a:prstGeom prst="rect">
             <a:avLst/>
@@ -8383,7 +8383,7 @@
         <p:spPr>
           <a:xfrm>
             <a:off x="1371600" y="3519000"/>
-            <a:ext cx="183240" cy="367920"/>
+            <a:ext cx="182880" cy="367560"/>
           </a:xfrm>
           <a:prstGeom prst="rect">
             <a:avLst/>
@@ -8438,7 +8438,7 @@
         <p:spPr>
           <a:xfrm>
             <a:off x="3124080" y="353880"/>
-            <a:ext cx="5942160" cy="1796040"/>
+            <a:ext cx="5941800" cy="1795680"/>
           </a:xfrm>
           <a:prstGeom prst="rect">
             <a:avLst/>
@@ -8457,7 +8457,7 @@
         <p:spPr>
           <a:xfrm>
             <a:off x="987840" y="3318480"/>
-            <a:ext cx="10393560" cy="1853640"/>
+            <a:ext cx="10393200" cy="1853280"/>
           </a:xfrm>
           <a:prstGeom prst="rect">
             <a:avLst/>
@@ -8540,7 +8540,7 @@
         <p:spPr>
           <a:xfrm>
             <a:off x="6185160" y="5346000"/>
-            <a:ext cx="6005520" cy="1853640"/>
+            <a:ext cx="6005160" cy="1853280"/>
           </a:xfrm>
           <a:prstGeom prst="rect">
             <a:avLst/>
@@ -8725,7 +8725,7 @@
         <p:spPr>
           <a:xfrm>
             <a:off x="3295080" y="255960"/>
-            <a:ext cx="6078600" cy="530640"/>
+            <a:ext cx="6078240" cy="530280"/>
           </a:xfrm>
           <a:prstGeom prst="rect">
             <a:avLst/>
@@ -8780,7 +8780,7 @@
         <p:spPr>
           <a:xfrm>
             <a:off x="635040" y="820800"/>
-            <a:ext cx="11244600" cy="1698840"/>
+            <a:ext cx="11244240" cy="1698480"/>
           </a:xfrm>
           <a:prstGeom prst="rect">
             <a:avLst/>
@@ -8832,7 +8832,7 @@
         <p:spPr>
           <a:xfrm>
             <a:off x="5947920" y="6308280"/>
-            <a:ext cx="382680" cy="577440"/>
+            <a:ext cx="382320" cy="577440"/>
           </a:xfrm>
           <a:prstGeom prst="rect">
             <a:avLst/>
@@ -8886,7 +8886,7 @@
         <p:spPr>
           <a:xfrm>
             <a:off x="4656960" y="2533320"/>
-            <a:ext cx="2876760" cy="530640"/>
+            <a:ext cx="2876400" cy="530280"/>
           </a:xfrm>
           <a:prstGeom prst="rect">
             <a:avLst/>
@@ -8940,7 +8940,7 @@
         <p:spPr>
           <a:xfrm>
             <a:off x="1513800" y="2600280"/>
-            <a:ext cx="9765360" cy="1740960"/>
+            <a:ext cx="9765000" cy="1740600"/>
           </a:xfrm>
           <a:prstGeom prst="rect">
             <a:avLst/>
@@ -8985,7 +8985,7 @@
         <p:spPr>
           <a:xfrm>
             <a:off x="5308560" y="3819240"/>
-            <a:ext cx="1573560" cy="530640"/>
+            <a:ext cx="1573200" cy="530280"/>
           </a:xfrm>
           <a:prstGeom prst="rect">
             <a:avLst/>
@@ -9039,7 +9039,7 @@
         <p:spPr>
           <a:xfrm>
             <a:off x="635040" y="4508640"/>
-            <a:ext cx="11093400" cy="2303280"/>
+            <a:ext cx="11093040" cy="2302920"/>
           </a:xfrm>
           <a:prstGeom prst="rect">
             <a:avLst/>
@@ -9292,7 +9292,7 @@
         <p:spPr>
           <a:xfrm>
             <a:off x="635040" y="3117600"/>
-            <a:ext cx="11319480" cy="699480"/>
+            <a:ext cx="11319120" cy="699480"/>
           </a:xfrm>
           <a:prstGeom prst="rect">
             <a:avLst/>
@@ -9380,7 +9380,7 @@
         <p:spPr>
           <a:xfrm>
             <a:off x="11070720" y="-816120"/>
-            <a:ext cx="2241360" cy="2241360"/>
+            <a:ext cx="2241000" cy="2241000"/>
           </a:xfrm>
           <a:prstGeom prst="rect">
             <a:avLst/>
@@ -9410,7 +9410,7 @@
         <p:spPr>
           <a:xfrm>
             <a:off x="-994680" y="5583240"/>
-            <a:ext cx="2241360" cy="2241360"/>
+            <a:ext cx="2241000" cy="2241000"/>
           </a:xfrm>
           <a:prstGeom prst="rect">
             <a:avLst/>
@@ -9470,7 +9470,7 @@
         <p:spPr>
           <a:xfrm>
             <a:off x="4056120" y="136440"/>
-            <a:ext cx="4078080" cy="530640"/>
+            <a:ext cx="4077720" cy="530280"/>
           </a:xfrm>
           <a:prstGeom prst="rect">
             <a:avLst/>
@@ -9525,7 +9525,7 @@
         <p:spPr>
           <a:xfrm>
             <a:off x="0" y="668520"/>
-            <a:ext cx="12190680" cy="1059480"/>
+            <a:ext cx="12190320" cy="1059120"/>
           </a:xfrm>
           <a:prstGeom prst="rect">
             <a:avLst/>
@@ -9607,7 +9607,7 @@
         <p:spPr>
           <a:xfrm>
             <a:off x="5947920" y="6308280"/>
-            <a:ext cx="382680" cy="577440"/>
+            <a:ext cx="382320" cy="577440"/>
           </a:xfrm>
           <a:prstGeom prst="rect">
             <a:avLst/>
@@ -9661,7 +9661,7 @@
         <p:spPr>
           <a:xfrm>
             <a:off x="4843800" y="1729440"/>
-            <a:ext cx="2739240" cy="530640"/>
+            <a:ext cx="2738880" cy="530280"/>
           </a:xfrm>
           <a:prstGeom prst="rect">
             <a:avLst/>
@@ -9715,7 +9715,7 @@
         <p:spPr>
           <a:xfrm>
             <a:off x="424080" y="2395080"/>
-            <a:ext cx="6240960" cy="3820680"/>
+            <a:ext cx="6240600" cy="3820320"/>
           </a:xfrm>
           <a:prstGeom prst="rect">
             <a:avLst/>
@@ -10003,7 +10003,7 @@
         <p:spPr>
           <a:xfrm>
             <a:off x="6849360" y="2399400"/>
-            <a:ext cx="4917240" cy="3820680"/>
+            <a:ext cx="4916880" cy="3820320"/>
           </a:xfrm>
           <a:prstGeom prst="rect">
             <a:avLst/>
@@ -10207,7 +10207,7 @@
         <p:spPr>
           <a:xfrm>
             <a:off x="11070720" y="-816120"/>
-            <a:ext cx="2241360" cy="2241360"/>
+            <a:ext cx="2241000" cy="2241000"/>
           </a:xfrm>
           <a:prstGeom prst="rect">
             <a:avLst/>
@@ -10237,7 +10237,7 @@
         <p:spPr>
           <a:xfrm>
             <a:off x="-994680" y="5583240"/>
-            <a:ext cx="2241360" cy="2241360"/>
+            <a:ext cx="2241000" cy="2241000"/>
           </a:xfrm>
           <a:prstGeom prst="rect">
             <a:avLst/>
@@ -10297,7 +10297,7 @@
         <p:spPr>
           <a:xfrm>
             <a:off x="1080000" y="307080"/>
-            <a:ext cx="9718920" cy="718200"/>
+            <a:ext cx="9718560" cy="717840"/>
           </a:xfrm>
           <a:prstGeom prst="rect">
             <a:avLst/>
@@ -10355,7 +10355,7 @@
         <p:spPr>
           <a:xfrm>
             <a:off x="11070720" y="-843120"/>
-            <a:ext cx="2241360" cy="2241360"/>
+            <a:ext cx="2241000" cy="2241000"/>
           </a:xfrm>
           <a:prstGeom prst="rect">
             <a:avLst/>
@@ -10385,7 +10385,7 @@
         <p:spPr>
           <a:xfrm>
             <a:off x="-994680" y="5556240"/>
-            <a:ext cx="2241360" cy="2241360"/>
+            <a:ext cx="2241000" cy="2241000"/>
           </a:xfrm>
           <a:prstGeom prst="rect">
             <a:avLst/>
@@ -10411,7 +10411,7 @@
         <p:spPr>
           <a:xfrm>
             <a:off x="5947920" y="6308280"/>
-            <a:ext cx="382680" cy="577440"/>
+            <a:ext cx="382320" cy="577440"/>
           </a:xfrm>
           <a:prstGeom prst="rect">
             <a:avLst/>
@@ -10469,7 +10469,7 @@
         <p:spPr>
           <a:xfrm>
             <a:off x="720000" y="1620000"/>
-            <a:ext cx="5313600" cy="3712680"/>
+            <a:ext cx="5313240" cy="3712320"/>
           </a:xfrm>
           <a:prstGeom prst="rect">
             <a:avLst/>
@@ -10492,7 +10492,7 @@
         <p:spPr>
           <a:xfrm>
             <a:off x="6278040" y="1620000"/>
-            <a:ext cx="5241240" cy="3669480"/>
+            <a:ext cx="5240880" cy="3669120"/>
           </a:xfrm>
           <a:prstGeom prst="rect">
             <a:avLst/>
@@ -10545,7 +10545,7 @@
         <p:spPr>
           <a:xfrm>
             <a:off x="540000" y="180360"/>
-            <a:ext cx="11518920" cy="1324080"/>
+            <a:ext cx="11518560" cy="1323720"/>
           </a:xfrm>
           <a:prstGeom prst="rect">
             <a:avLst/>
@@ -10614,7 +10614,7 @@
         <p:spPr>
           <a:xfrm>
             <a:off x="5947920" y="6308280"/>
-            <a:ext cx="382680" cy="577440"/>
+            <a:ext cx="382320" cy="577440"/>
           </a:xfrm>
           <a:prstGeom prst="rect">
             <a:avLst/>
@@ -10672,7 +10672,7 @@
         <p:spPr>
           <a:xfrm>
             <a:off x="3242880" y="1786680"/>
-            <a:ext cx="6476400" cy="4512600"/>
+            <a:ext cx="6476040" cy="4512240"/>
           </a:xfrm>
           <a:prstGeom prst="rect">
             <a:avLst/>
@@ -10695,7 +10695,7 @@
         <p:spPr>
           <a:xfrm>
             <a:off x="11070720" y="-816120"/>
-            <a:ext cx="2241360" cy="2241360"/>
+            <a:ext cx="2241000" cy="2241000"/>
           </a:xfrm>
           <a:prstGeom prst="rect">
             <a:avLst/>
@@ -10725,7 +10725,7 @@
         <p:spPr>
           <a:xfrm>
             <a:off x="-994680" y="5583240"/>
-            <a:ext cx="2241360" cy="2241360"/>
+            <a:ext cx="2241000" cy="2241000"/>
           </a:xfrm>
           <a:prstGeom prst="rect">
             <a:avLst/>
@@ -10785,7 +10785,7 @@
         <p:spPr>
           <a:xfrm>
             <a:off x="342360" y="369360"/>
-            <a:ext cx="11504160" cy="754920"/>
+            <a:ext cx="11503800" cy="754560"/>
           </a:xfrm>
           <a:prstGeom prst="rect">
             <a:avLst/>
@@ -10839,7 +10839,7 @@
         <p:spPr>
           <a:xfrm>
             <a:off x="0" y="0"/>
-            <a:ext cx="12190680" cy="360"/>
+            <a:ext cx="12190320" cy="360"/>
           </a:xfrm>
           <a:prstGeom prst="rect">
             <a:avLst/>
@@ -10884,7 +10884,7 @@
         <p:spPr>
           <a:xfrm>
             <a:off x="5947920" y="6308280"/>
-            <a:ext cx="382680" cy="577440"/>
+            <a:ext cx="382320" cy="577440"/>
           </a:xfrm>
           <a:prstGeom prst="rect">
             <a:avLst/>
@@ -13778,7 +13778,7 @@
         <p:spPr>
           <a:xfrm>
             <a:off x="11070720" y="-816120"/>
-            <a:ext cx="2241360" cy="2241360"/>
+            <a:ext cx="2241000" cy="2241000"/>
           </a:xfrm>
           <a:prstGeom prst="rect">
             <a:avLst/>
@@ -13808,7 +13808,7 @@
         <p:spPr>
           <a:xfrm>
             <a:off x="-994680" y="5583240"/>
-            <a:ext cx="2241360" cy="2241360"/>
+            <a:ext cx="2241000" cy="2241000"/>
           </a:xfrm>
           <a:prstGeom prst="rect">
             <a:avLst/>
@@ -13868,7 +13868,7 @@
         <p:spPr>
           <a:xfrm>
             <a:off x="1218240" y="270000"/>
-            <a:ext cx="9754200" cy="1324080"/>
+            <a:ext cx="9753840" cy="1323720"/>
           </a:xfrm>
           <a:prstGeom prst="rect">
             <a:avLst/>
@@ -13925,7 +13925,7 @@
         <p:spPr>
           <a:xfrm>
             <a:off x="1371600" y="3519000"/>
-            <a:ext cx="183240" cy="367920"/>
+            <a:ext cx="182880" cy="367560"/>
           </a:xfrm>
           <a:prstGeom prst="rect">
             <a:avLst/>
@@ -13970,7 +13970,7 @@
         <p:spPr>
           <a:xfrm>
             <a:off x="6050160" y="6308280"/>
-            <a:ext cx="382680" cy="577440"/>
+            <a:ext cx="382320" cy="577440"/>
           </a:xfrm>
           <a:prstGeom prst="rect">
             <a:avLst/>
@@ -14028,7 +14028,7 @@
         <p:spPr>
           <a:xfrm>
             <a:off x="2340000" y="1611720"/>
-            <a:ext cx="7558920" cy="4147200"/>
+            <a:ext cx="7558560" cy="4146840"/>
           </a:xfrm>
           <a:prstGeom prst="rect">
             <a:avLst/>
@@ -14051,7 +14051,7 @@
         <p:spPr>
           <a:xfrm>
             <a:off x="11070720" y="-816120"/>
-            <a:ext cx="2241360" cy="2241360"/>
+            <a:ext cx="2241000" cy="2241000"/>
           </a:xfrm>
           <a:prstGeom prst="rect">
             <a:avLst/>
@@ -14081,7 +14081,7 @@
         <p:spPr>
           <a:xfrm>
             <a:off x="-994680" y="5583240"/>
-            <a:ext cx="2241360" cy="2241360"/>
+            <a:ext cx="2241000" cy="2241000"/>
           </a:xfrm>
           <a:prstGeom prst="rect">
             <a:avLst/>
@@ -14141,7 +14141,7 @@
         <p:spPr>
           <a:xfrm>
             <a:off x="2674080" y="0"/>
-            <a:ext cx="7764840" cy="718200"/>
+            <a:ext cx="7764480" cy="717840"/>
           </a:xfrm>
           <a:prstGeom prst="rect">
             <a:avLst/>
@@ -14199,7 +14199,7 @@
         <p:spPr>
           <a:xfrm>
             <a:off x="11070720" y="-585360"/>
-            <a:ext cx="2241360" cy="2241360"/>
+            <a:ext cx="2241000" cy="2241000"/>
           </a:xfrm>
           <a:prstGeom prst="rect">
             <a:avLst/>
@@ -14225,7 +14225,7 @@
         <p:spPr>
           <a:xfrm>
             <a:off x="5947920" y="6308280"/>
-            <a:ext cx="382680" cy="577440"/>
+            <a:ext cx="382320" cy="577440"/>
           </a:xfrm>
           <a:prstGeom prst="rect">
             <a:avLst/>
@@ -14283,7 +14283,7 @@
         <p:spPr>
           <a:xfrm>
             <a:off x="-994680" y="5556240"/>
-            <a:ext cx="2241360" cy="2241360"/>
+            <a:ext cx="2241000" cy="2241000"/>
           </a:xfrm>
           <a:prstGeom prst="rect">
             <a:avLst/>
@@ -14313,7 +14313,7 @@
         <p:spPr>
           <a:xfrm>
             <a:off x="3060000" y="837360"/>
-            <a:ext cx="6262920" cy="5641560"/>
+            <a:ext cx="6262560" cy="5641200"/>
           </a:xfrm>
           <a:prstGeom prst="rect">
             <a:avLst/>
@@ -14366,7 +14366,7 @@
         <p:spPr>
           <a:xfrm>
             <a:off x="1620000" y="0"/>
-            <a:ext cx="8818920" cy="705240"/>
+            <a:ext cx="8818560" cy="704880"/>
           </a:xfrm>
           <a:prstGeom prst="rect">
             <a:avLst/>
@@ -14424,7 +14424,7 @@
         <p:spPr>
           <a:xfrm>
             <a:off x="10845720" y="-1278360"/>
-            <a:ext cx="2241360" cy="2241360"/>
+            <a:ext cx="2241000" cy="2241000"/>
           </a:xfrm>
           <a:prstGeom prst="rect">
             <a:avLst/>
@@ -14454,7 +14454,7 @@
         <p:spPr>
           <a:xfrm>
             <a:off x="-966240" y="5590800"/>
-            <a:ext cx="2241360" cy="2241360"/>
+            <a:ext cx="2241000" cy="2241000"/>
           </a:xfrm>
           <a:prstGeom prst="rect">
             <a:avLst/>
@@ -14480,7 +14480,7 @@
         <p:spPr>
           <a:xfrm>
             <a:off x="5925960" y="6273360"/>
-            <a:ext cx="382680" cy="577440"/>
+            <a:ext cx="382320" cy="577440"/>
           </a:xfrm>
           <a:prstGeom prst="rect">
             <a:avLst/>
@@ -14538,7 +14538,7 @@
         <p:spPr>
           <a:xfrm>
             <a:off x="1986480" y="1162800"/>
-            <a:ext cx="8632440" cy="4236120"/>
+            <a:ext cx="8632080" cy="4235760"/>
           </a:xfrm>
           <a:prstGeom prst="rect">
             <a:avLst/>
